--- a/리브스메드_패키징_OJT.pptx
+++ b/리브스메드_패키징_OJT.pptx
@@ -18,11 +18,9 @@
     <p:sldId id="266" r:id="rId12"/>
     <p:sldId id="267" r:id="rId13"/>
     <p:sldId id="268" r:id="rId14"/>
-    <p:sldId id="269" r:id="rId15"/>
-    <p:sldId id="270" r:id="rId16"/>
   </p:sldIdLst>
   <p:notesMasterIdLst>
-    <p:notesMasterId r:id="rId17"/>
+    <p:notesMasterId r:id="rId15"/>
   </p:notesMasterIdLst>
   <p:sldSz cx="12192000" cy="6858000"/>
   <p:notesSz cx="6858000" cy="12192000"/>
@@ -892,182 +890,6 @@
             <a:fld id="{F7021451-1387-4CA6-816F-3879F97B5CBC}" type="slidenum">
               <a:rPr lang="en-US"/>
               <a:t>13</a:t>
-            </a:fld>
-            <a:endParaRPr lang="en-US"/>
-          </a:p>
-        </p:txBody>
-      </p:sp>
-    </p:spTree>
-    <p:extLst>
-      <p:ext uri="{BB962C8B-B14F-4D97-AF65-F5344CB8AC3E}">
-        <p14:creationId xmlns:p14="http://schemas.microsoft.com/office/powerpoint/2010/main" val="1024086991"/>
-      </p:ext>
-    </p:extLst>
-  </p:cSld>
-  <p:clrMapOvr>
-    <a:masterClrMapping/>
-  </p:clrMapOvr>
-</p:notes>
-</file>
-
-<file path=ppt/notesSlides/notesSlide14.xml><?xml version="1.0" encoding="utf-8"?>
-<p:notes xmlns:a="http://schemas.openxmlformats.org/drawingml/2006/main" xmlns:r="http://schemas.openxmlformats.org/officeDocument/2006/relationships" xmlns:p="http://schemas.openxmlformats.org/presentationml/2006/main">
-  <p:cSld>
-    <p:spTree>
-      <p:nvGrpSpPr>
-        <p:cNvPr id="1" name=""/>
-        <p:cNvGrpSpPr/>
-        <p:nvPr/>
-      </p:nvGrpSpPr>
-      <p:grpSpPr>
-        <a:xfrm>
-          <a:off x="0" y="0"/>
-          <a:ext cx="0" cy="0"/>
-          <a:chOff x="0" y="0"/>
-          <a:chExt cx="0" cy="0"/>
-        </a:xfrm>
-      </p:grpSpPr>
-      <p:sp>
-        <p:nvSpPr>
-          <p:cNvPr id="2" name="Slide Image Placeholder 1"/>
-          <p:cNvSpPr>
-            <a:spLocks noGrp="1" noRot="1" noChangeAspect="1"/>
-          </p:cNvSpPr>
-          <p:nvPr>
-            <p:ph type="sldImg"/>
-          </p:nvPr>
-        </p:nvSpPr>
-        <p:spPr/>
-      </p:sp>
-      <p:sp>
-        <p:nvSpPr>
-          <p:cNvPr id="3" name="Notes Placeholder 2"/>
-          <p:cNvSpPr>
-            <a:spLocks noGrp="1"/>
-          </p:cNvSpPr>
-          <p:nvPr>
-            <p:ph type="body" idx="1"/>
-          </p:nvPr>
-        </p:nvSpPr>
-        <p:spPr/>
-        <p:txBody>
-          <a:bodyPr/>
-          <a:lstStyle/>
-          <a:p>
-            <a:r>
-              <a:rPr lang="en-US" dirty="0"/>
-              <a:t/>
-            </a:r>
-            <a:endParaRPr lang="en-US" dirty="0"/>
-          </a:p>
-        </p:txBody>
-      </p:sp>
-      <p:sp>
-        <p:nvSpPr>
-          <p:cNvPr id="4" name="Slide Number Placeholder 3"/>
-          <p:cNvSpPr>
-            <a:spLocks noGrp="1"/>
-          </p:cNvSpPr>
-          <p:nvPr>
-            <p:ph type="sldNum" sz="quarter" idx="10"/>
-          </p:nvPr>
-        </p:nvSpPr>
-        <p:spPr/>
-        <p:txBody>
-          <a:bodyPr/>
-          <a:lstStyle/>
-          <a:p>
-            <a:fld id="{F7021451-1387-4CA6-816F-3879F97B5CBC}" type="slidenum">
-              <a:rPr lang="en-US"/>
-              <a:t>14</a:t>
-            </a:fld>
-            <a:endParaRPr lang="en-US"/>
-          </a:p>
-        </p:txBody>
-      </p:sp>
-    </p:spTree>
-    <p:extLst>
-      <p:ext uri="{BB962C8B-B14F-4D97-AF65-F5344CB8AC3E}">
-        <p14:creationId xmlns:p14="http://schemas.microsoft.com/office/powerpoint/2010/main" val="1024086991"/>
-      </p:ext>
-    </p:extLst>
-  </p:cSld>
-  <p:clrMapOvr>
-    <a:masterClrMapping/>
-  </p:clrMapOvr>
-</p:notes>
-</file>
-
-<file path=ppt/notesSlides/notesSlide15.xml><?xml version="1.0" encoding="utf-8"?>
-<p:notes xmlns:a="http://schemas.openxmlformats.org/drawingml/2006/main" xmlns:r="http://schemas.openxmlformats.org/officeDocument/2006/relationships" xmlns:p="http://schemas.openxmlformats.org/presentationml/2006/main">
-  <p:cSld>
-    <p:spTree>
-      <p:nvGrpSpPr>
-        <p:cNvPr id="1" name=""/>
-        <p:cNvGrpSpPr/>
-        <p:nvPr/>
-      </p:nvGrpSpPr>
-      <p:grpSpPr>
-        <a:xfrm>
-          <a:off x="0" y="0"/>
-          <a:ext cx="0" cy="0"/>
-          <a:chOff x="0" y="0"/>
-          <a:chExt cx="0" cy="0"/>
-        </a:xfrm>
-      </p:grpSpPr>
-      <p:sp>
-        <p:nvSpPr>
-          <p:cNvPr id="2" name="Slide Image Placeholder 1"/>
-          <p:cNvSpPr>
-            <a:spLocks noGrp="1" noRot="1" noChangeAspect="1"/>
-          </p:cNvSpPr>
-          <p:nvPr>
-            <p:ph type="sldImg"/>
-          </p:nvPr>
-        </p:nvSpPr>
-        <p:spPr/>
-      </p:sp>
-      <p:sp>
-        <p:nvSpPr>
-          <p:cNvPr id="3" name="Notes Placeholder 2"/>
-          <p:cNvSpPr>
-            <a:spLocks noGrp="1"/>
-          </p:cNvSpPr>
-          <p:nvPr>
-            <p:ph type="body" idx="1"/>
-          </p:nvPr>
-        </p:nvSpPr>
-        <p:spPr/>
-        <p:txBody>
-          <a:bodyPr/>
-          <a:lstStyle/>
-          <a:p>
-            <a:r>
-              <a:rPr lang="en-US" dirty="0"/>
-              <a:t/>
-            </a:r>
-            <a:endParaRPr lang="en-US" dirty="0"/>
-          </a:p>
-        </p:txBody>
-      </p:sp>
-      <p:sp>
-        <p:nvSpPr>
-          <p:cNvPr id="4" name="Slide Number Placeholder 3"/>
-          <p:cNvSpPr>
-            <a:spLocks noGrp="1"/>
-          </p:cNvSpPr>
-          <p:nvPr>
-            <p:ph type="sldNum" sz="quarter" idx="10"/>
-          </p:nvPr>
-        </p:nvSpPr>
-        <p:spPr/>
-        <p:txBody>
-          <a:bodyPr/>
-          <a:lstStyle/>
-          <a:p>
-            <a:fld id="{F7021451-1387-4CA6-816F-3879F97B5CBC}" type="slidenum">
-              <a:rPr lang="en-US"/>
-              <a:t>15</a:t>
             </a:fld>
             <a:endParaRPr lang="en-US"/>
           </a:p>
@@ -2452,7 +2274,7 @@
                 <a:ea typeface="맑은 고딕" pitchFamily="34" charset="-122"/>
                 <a:cs typeface="맑은 고딕" pitchFamily="34" charset="-120"/>
               </a:rPr>
-              <a:t>항공 수출 시 – 아우터 박스 포장 형태</a:t>
+              <a:t>해상 수출 시 – Pallet 포장 형태</a:t>
             </a:r>
             <a:endParaRPr lang="en-US" sz="2400" dirty="0"/>
           </a:p>
@@ -2585,2771 +2407,6 @@
       </p:pic>
       <p:pic>
         <p:nvPicPr>
-          <p:cNvPr id="8" name="Image 1" descr="C:\Users\cjswl\AppData\Local\Temp\claude\c--Users-cjswl-OneDrive----GitHub-packing-information\3ba0e5b9-a872-4a6e-a9b8-bf1f212a4a00\scratchpad\img\image9.jpg">    </p:cNvPr>
-          <p:cNvPicPr>
-            <a:picLocks noChangeAspect="1"/>
-          </p:cNvPicPr>
-          <p:nvPr/>
-        </p:nvPicPr>
-        <p:blipFill>
-          <a:blip r:embed="rId2"/>
-          <a:stretch>
-            <a:fillRect/>
-          </a:stretch>
-        </p:blipFill>
-        <p:spPr>
-          <a:xfrm>
-            <a:off x="548640" y="1551595"/>
-            <a:ext cx="4206240" cy="4577769"/>
-          </a:xfrm>
-          <a:prstGeom prst="rect">
-            <a:avLst/>
-          </a:prstGeom>
-        </p:spPr>
-      </p:pic>
-      <p:sp>
-        <p:nvSpPr>
-          <p:cNvPr id="9" name="Text 5"/>
-          <p:cNvSpPr/>
-          <p:nvPr/>
-        </p:nvSpPr>
-        <p:spPr>
-          <a:xfrm>
-            <a:off x="5120640" y="1508760"/>
-            <a:ext cx="6400800" cy="320040"/>
-          </a:xfrm>
-          <a:prstGeom prst="rect">
-            <a:avLst/>
-          </a:prstGeom>
-          <a:noFill/>
-          <a:ln/>
-        </p:spPr>
-        <p:txBody>
-          <a:bodyPr wrap="square" lIns="0" tIns="0" rIns="0" bIns="0" rtlCol="0" anchor="ctr"/>
-          <a:lstStyle/>
-          <a:p>
-            <a:pPr indent="0" marL="0">
-              <a:buNone/>
-            </a:pPr>
-            <a:r>
-              <a:rPr lang="en-US" sz="1400" b="1" dirty="0">
-                <a:solidFill>
-                  <a:srgbClr val="1B2241"/>
-                </a:solidFill>
-                <a:latin typeface="맑은 고딕" pitchFamily="34" charset="0"/>
-                <a:ea typeface="맑은 고딕" pitchFamily="34" charset="-122"/>
-                <a:cs typeface="맑은 고딕" pitchFamily="34" charset="-120"/>
-              </a:rPr>
-              <a:t>ArtiSential 아우터 박스 (B 골지)</a:t>
-            </a:r>
-            <a:endParaRPr lang="en-US" sz="1400" dirty="0"/>
-          </a:p>
-        </p:txBody>
-      </p:sp>
-      <p:graphicFrame>
-        <p:nvGraphicFramePr>
-          <p:cNvPr id="11" name="Table 0"/>
-          <p:cNvGraphicFramePr>
-            <a:graphicFrameLocks noGrp="1"/>
-          </p:cNvGraphicFramePr>
-          <p:nvPr>
-            <p:extLst>
-              <p:ext uri="{D42A27DB-BD31-4B8C-83A1-F6EECF244321}">
-                <p14:modId xmlns:p14="http://schemas.microsoft.com/office/powerpoint/2010/main" val="1579011935"/>
-              </p:ext>
-            </p:extLst>
-          </p:nvPr>
-        </p:nvGraphicFramePr>
-        <p:xfrm>
-          <a:off x="5120640" y="1920240"/>
-          <a:ext cx="6519672" cy="914400"/>
-        </p:xfrm>
-        <a:graphic>
-          <a:graphicData uri="http://schemas.openxmlformats.org/drawingml/2006/table">
-            <a:tbl>
-              <a:tblPr/>
-              <a:tblGrid>
-                <a:gridCol w="1325880"/>
-                <a:gridCol w="1463040"/>
-                <a:gridCol w="822960"/>
-                <a:gridCol w="822960"/>
-                <a:gridCol w="822960"/>
-                <a:gridCol w="1261872"/>
-              </a:tblGrid>
-              <a:tr h="329184">
-                <a:tc>
-                  <a:txBody>
-                    <a:bodyPr/>
-                    <a:lstStyle/>
-                    <a:p>
-                      <a:pPr algn="ctr" indent="0" marL="0">
-                        <a:buNone/>
-                      </a:pPr>
-                      <a:r>
-                        <a:rPr lang="en-US" sz="1100" b="1" dirty="0">
-                          <a:solidFill>
-                            <a:srgbClr val="FFFFFF"/>
-                          </a:solidFill>
-                          <a:latin typeface="맑은 고딕" pitchFamily="34" charset="0"/>
-                          <a:ea typeface="맑은 고딕" pitchFamily="34" charset="-122"/>
-                          <a:cs typeface="맑은 고딕" pitchFamily="34" charset="-120"/>
-                        </a:rPr>
-                        <a:t>규격</a:t>
-                      </a:r>
-                      <a:endParaRPr lang="en-US" sz="1100" dirty="0">
-                        <a:latin typeface="맑은 고딕" charset="0"/>
-                        <a:ea typeface="맑은 고딕" charset="0"/>
-                        <a:cs typeface="맑은 고딕" charset="0"/>
-                      </a:endParaRPr>
-                    </a:p>
-                  </a:txBody>
-                  <a:tcPr marL="54864" marR="54864" marT="27432" marB="27432" anchor="ctr">
-                    <a:lnL w="9525" cap="flat" cmpd="sng" algn="ctr">
-                      <a:solidFill>
-                        <a:srgbClr val="C9CED6"/>
-                      </a:solidFill>
-                      <a:prstDash val="solid"/>
-                      <a:round/>
-                      <a:headEnd type="none" w="med" len="med"/>
-                      <a:tailEnd type="none" w="med" len="med"/>
-                    </a:lnL>
-                    <a:lnR w="9525" cap="flat" cmpd="sng" algn="ctr">
-                      <a:solidFill>
-                        <a:srgbClr val="C9CED6"/>
-                      </a:solidFill>
-                      <a:prstDash val="solid"/>
-                      <a:round/>
-                      <a:headEnd type="none" w="med" len="med"/>
-                      <a:tailEnd type="none" w="med" len="med"/>
-                    </a:lnR>
-                    <a:lnT w="9525" cap="flat" cmpd="sng" algn="ctr">
-                      <a:solidFill>
-                        <a:srgbClr val="C9CED6"/>
-                      </a:solidFill>
-                      <a:prstDash val="solid"/>
-                      <a:round/>
-                      <a:headEnd type="none" w="med" len="med"/>
-                      <a:tailEnd type="none" w="med" len="med"/>
-                    </a:lnT>
-                    <a:lnB w="9525" cap="flat" cmpd="sng" algn="ctr">
-                      <a:solidFill>
-                        <a:srgbClr val="C9CED6"/>
-                      </a:solidFill>
-                      <a:prstDash val="solid"/>
-                      <a:round/>
-                      <a:headEnd type="none" w="med" len="med"/>
-                      <a:tailEnd type="none" w="med" len="med"/>
-                    </a:lnB>
-                    <a:solidFill>
-                      <a:srgbClr val="1B2241"/>
-                    </a:solidFill>
-                  </a:tcPr>
-                </a:tc>
-                <a:tc>
-                  <a:txBody>
-                    <a:bodyPr/>
-                    <a:lstStyle/>
-                    <a:p>
-                      <a:pPr algn="ctr" indent="0" marL="0">
-                        <a:buNone/>
-                      </a:pPr>
-                      <a:r>
-                        <a:rPr lang="en-US" sz="1100" b="1" dirty="0">
-                          <a:solidFill>
-                            <a:srgbClr val="FFFFFF"/>
-                          </a:solidFill>
-                          <a:latin typeface="맑은 고딕" pitchFamily="34" charset="0"/>
-                          <a:ea typeface="맑은 고딕" pitchFamily="34" charset="-122"/>
-                          <a:cs typeface="맑은 고딕" pitchFamily="34" charset="-120"/>
-                        </a:rPr>
-                        <a:t>W × L × H (cm)</a:t>
-                      </a:r>
-                      <a:endParaRPr lang="en-US" sz="1100" dirty="0">
-                        <a:latin typeface="맑은 고딕" charset="0"/>
-                        <a:ea typeface="맑은 고딕" charset="0"/>
-                        <a:cs typeface="맑은 고딕" charset="0"/>
-                      </a:endParaRPr>
-                    </a:p>
-                  </a:txBody>
-                  <a:tcPr marL="54864" marR="54864" marT="27432" marB="27432" anchor="ctr">
-                    <a:lnL w="9525" cap="flat" cmpd="sng" algn="ctr">
-                      <a:solidFill>
-                        <a:srgbClr val="C9CED6"/>
-                      </a:solidFill>
-                      <a:prstDash val="solid"/>
-                      <a:round/>
-                      <a:headEnd type="none" w="med" len="med"/>
-                      <a:tailEnd type="none" w="med" len="med"/>
-                    </a:lnL>
-                    <a:lnR w="9525" cap="flat" cmpd="sng" algn="ctr">
-                      <a:solidFill>
-                        <a:srgbClr val="C9CED6"/>
-                      </a:solidFill>
-                      <a:prstDash val="solid"/>
-                      <a:round/>
-                      <a:headEnd type="none" w="med" len="med"/>
-                      <a:tailEnd type="none" w="med" len="med"/>
-                    </a:lnR>
-                    <a:lnT w="9525" cap="flat" cmpd="sng" algn="ctr">
-                      <a:solidFill>
-                        <a:srgbClr val="C9CED6"/>
-                      </a:solidFill>
-                      <a:prstDash val="solid"/>
-                      <a:round/>
-                      <a:headEnd type="none" w="med" len="med"/>
-                      <a:tailEnd type="none" w="med" len="med"/>
-                    </a:lnT>
-                    <a:lnB w="9525" cap="flat" cmpd="sng" algn="ctr">
-                      <a:solidFill>
-                        <a:srgbClr val="C9CED6"/>
-                      </a:solidFill>
-                      <a:prstDash val="solid"/>
-                      <a:round/>
-                      <a:headEnd type="none" w="med" len="med"/>
-                      <a:tailEnd type="none" w="med" len="med"/>
-                    </a:lnB>
-                    <a:solidFill>
-                      <a:srgbClr val="1B2241"/>
-                    </a:solidFill>
-                  </a:tcPr>
-                </a:tc>
-                <a:tc>
-                  <a:txBody>
-                    <a:bodyPr/>
-                    <a:lstStyle/>
-                    <a:p>
-                      <a:pPr algn="ctr" indent="0" marL="0">
-                        <a:buNone/>
-                      </a:pPr>
-                      <a:r>
-                        <a:rPr lang="en-US" sz="1100" b="1" dirty="0">
-                          <a:solidFill>
-                            <a:srgbClr val="FFFFFF"/>
-                          </a:solidFill>
-                          <a:latin typeface="맑은 고딕" pitchFamily="34" charset="0"/>
-                          <a:ea typeface="맑은 고딕" pitchFamily="34" charset="-122"/>
-                          <a:cs typeface="맑은 고딕" pitchFamily="34" charset="-120"/>
-                        </a:rPr>
-                        <a:t>Net</a:t>
-                      </a:r>
-                      <a:endParaRPr lang="en-US" sz="1100" dirty="0">
-                        <a:latin typeface="맑은 고딕" charset="0"/>
-                        <a:ea typeface="맑은 고딕" charset="0"/>
-                        <a:cs typeface="맑은 고딕" charset="0"/>
-                      </a:endParaRPr>
-                    </a:p>
-                  </a:txBody>
-                  <a:tcPr marL="54864" marR="54864" marT="27432" marB="27432" anchor="ctr">
-                    <a:lnL w="9525" cap="flat" cmpd="sng" algn="ctr">
-                      <a:solidFill>
-                        <a:srgbClr val="C9CED6"/>
-                      </a:solidFill>
-                      <a:prstDash val="solid"/>
-                      <a:round/>
-                      <a:headEnd type="none" w="med" len="med"/>
-                      <a:tailEnd type="none" w="med" len="med"/>
-                    </a:lnL>
-                    <a:lnR w="9525" cap="flat" cmpd="sng" algn="ctr">
-                      <a:solidFill>
-                        <a:srgbClr val="C9CED6"/>
-                      </a:solidFill>
-                      <a:prstDash val="solid"/>
-                      <a:round/>
-                      <a:headEnd type="none" w="med" len="med"/>
-                      <a:tailEnd type="none" w="med" len="med"/>
-                    </a:lnR>
-                    <a:lnT w="9525" cap="flat" cmpd="sng" algn="ctr">
-                      <a:solidFill>
-                        <a:srgbClr val="C9CED6"/>
-                      </a:solidFill>
-                      <a:prstDash val="solid"/>
-                      <a:round/>
-                      <a:headEnd type="none" w="med" len="med"/>
-                      <a:tailEnd type="none" w="med" len="med"/>
-                    </a:lnT>
-                    <a:lnB w="9525" cap="flat" cmpd="sng" algn="ctr">
-                      <a:solidFill>
-                        <a:srgbClr val="C9CED6"/>
-                      </a:solidFill>
-                      <a:prstDash val="solid"/>
-                      <a:round/>
-                      <a:headEnd type="none" w="med" len="med"/>
-                      <a:tailEnd type="none" w="med" len="med"/>
-                    </a:lnB>
-                    <a:solidFill>
-                      <a:srgbClr val="1B2241"/>
-                    </a:solidFill>
-                  </a:tcPr>
-                </a:tc>
-                <a:tc>
-                  <a:txBody>
-                    <a:bodyPr/>
-                    <a:lstStyle/>
-                    <a:p>
-                      <a:pPr algn="ctr" indent="0" marL="0">
-                        <a:buNone/>
-                      </a:pPr>
-                      <a:r>
-                        <a:rPr lang="en-US" sz="1100" b="1" dirty="0">
-                          <a:solidFill>
-                            <a:srgbClr val="FFFFFF"/>
-                          </a:solidFill>
-                          <a:latin typeface="맑은 고딕" pitchFamily="34" charset="0"/>
-                          <a:ea typeface="맑은 고딕" pitchFamily="34" charset="-122"/>
-                          <a:cs typeface="맑은 고딕" pitchFamily="34" charset="-120"/>
-                        </a:rPr>
-                        <a:t>Gross</a:t>
-                      </a:r>
-                      <a:endParaRPr lang="en-US" sz="1100" dirty="0">
-                        <a:latin typeface="맑은 고딕" charset="0"/>
-                        <a:ea typeface="맑은 고딕" charset="0"/>
-                        <a:cs typeface="맑은 고딕" charset="0"/>
-                      </a:endParaRPr>
-                    </a:p>
-                  </a:txBody>
-                  <a:tcPr marL="54864" marR="54864" marT="27432" marB="27432" anchor="ctr">
-                    <a:lnL w="9525" cap="flat" cmpd="sng" algn="ctr">
-                      <a:solidFill>
-                        <a:srgbClr val="C9CED6"/>
-                      </a:solidFill>
-                      <a:prstDash val="solid"/>
-                      <a:round/>
-                      <a:headEnd type="none" w="med" len="med"/>
-                      <a:tailEnd type="none" w="med" len="med"/>
-                    </a:lnL>
-                    <a:lnR w="9525" cap="flat" cmpd="sng" algn="ctr">
-                      <a:solidFill>
-                        <a:srgbClr val="C9CED6"/>
-                      </a:solidFill>
-                      <a:prstDash val="solid"/>
-                      <a:round/>
-                      <a:headEnd type="none" w="med" len="med"/>
-                      <a:tailEnd type="none" w="med" len="med"/>
-                    </a:lnR>
-                    <a:lnT w="9525" cap="flat" cmpd="sng" algn="ctr">
-                      <a:solidFill>
-                        <a:srgbClr val="C9CED6"/>
-                      </a:solidFill>
-                      <a:prstDash val="solid"/>
-                      <a:round/>
-                      <a:headEnd type="none" w="med" len="med"/>
-                      <a:tailEnd type="none" w="med" len="med"/>
-                    </a:lnT>
-                    <a:lnB w="9525" cap="flat" cmpd="sng" algn="ctr">
-                      <a:solidFill>
-                        <a:srgbClr val="C9CED6"/>
-                      </a:solidFill>
-                      <a:prstDash val="solid"/>
-                      <a:round/>
-                      <a:headEnd type="none" w="med" len="med"/>
-                      <a:tailEnd type="none" w="med" len="med"/>
-                    </a:lnB>
-                    <a:solidFill>
-                      <a:srgbClr val="1B2241"/>
-                    </a:solidFill>
-                  </a:tcPr>
-                </a:tc>
-                <a:tc>
-                  <a:txBody>
-                    <a:bodyPr/>
-                    <a:lstStyle/>
-                    <a:p>
-                      <a:pPr algn="ctr" indent="0" marL="0">
-                        <a:buNone/>
-                      </a:pPr>
-                      <a:r>
-                        <a:rPr lang="en-US" sz="1100" b="1" dirty="0">
-                          <a:solidFill>
-                            <a:srgbClr val="FFFFFF"/>
-                          </a:solidFill>
-                          <a:latin typeface="맑은 고딕" pitchFamily="34" charset="0"/>
-                          <a:ea typeface="맑은 고딕" pitchFamily="34" charset="-122"/>
-                          <a:cs typeface="맑은 고딕" pitchFamily="34" charset="-120"/>
-                        </a:rPr>
-                        <a:t>수량</a:t>
-                      </a:r>
-                      <a:endParaRPr lang="en-US" sz="1100" dirty="0">
-                        <a:latin typeface="맑은 고딕" charset="0"/>
-                        <a:ea typeface="맑은 고딕" charset="0"/>
-                        <a:cs typeface="맑은 고딕" charset="0"/>
-                      </a:endParaRPr>
-                    </a:p>
-                  </a:txBody>
-                  <a:tcPr marL="54864" marR="54864" marT="27432" marB="27432" anchor="ctr">
-                    <a:lnL w="9525" cap="flat" cmpd="sng" algn="ctr">
-                      <a:solidFill>
-                        <a:srgbClr val="C9CED6"/>
-                      </a:solidFill>
-                      <a:prstDash val="solid"/>
-                      <a:round/>
-                      <a:headEnd type="none" w="med" len="med"/>
-                      <a:tailEnd type="none" w="med" len="med"/>
-                    </a:lnL>
-                    <a:lnR w="9525" cap="flat" cmpd="sng" algn="ctr">
-                      <a:solidFill>
-                        <a:srgbClr val="C9CED6"/>
-                      </a:solidFill>
-                      <a:prstDash val="solid"/>
-                      <a:round/>
-                      <a:headEnd type="none" w="med" len="med"/>
-                      <a:tailEnd type="none" w="med" len="med"/>
-                    </a:lnR>
-                    <a:lnT w="9525" cap="flat" cmpd="sng" algn="ctr">
-                      <a:solidFill>
-                        <a:srgbClr val="C9CED6"/>
-                      </a:solidFill>
-                      <a:prstDash val="solid"/>
-                      <a:round/>
-                      <a:headEnd type="none" w="med" len="med"/>
-                      <a:tailEnd type="none" w="med" len="med"/>
-                    </a:lnT>
-                    <a:lnB w="9525" cap="flat" cmpd="sng" algn="ctr">
-                      <a:solidFill>
-                        <a:srgbClr val="C9CED6"/>
-                      </a:solidFill>
-                      <a:prstDash val="solid"/>
-                      <a:round/>
-                      <a:headEnd type="none" w="med" len="med"/>
-                      <a:tailEnd type="none" w="med" len="med"/>
-                    </a:lnB>
-                    <a:solidFill>
-                      <a:srgbClr val="1B2241"/>
-                    </a:solidFill>
-                  </a:tcPr>
-                </a:tc>
-                <a:tc>
-                  <a:txBody>
-                    <a:bodyPr/>
-                    <a:lstStyle/>
-                    <a:p>
-                      <a:pPr algn="ctr" indent="0" marL="0">
-                        <a:buNone/>
-                      </a:pPr>
-                      <a:r>
-                        <a:rPr lang="en-US" sz="1100" b="1" dirty="0">
-                          <a:solidFill>
-                            <a:srgbClr val="FFFFFF"/>
-                          </a:solidFill>
-                          <a:latin typeface="맑은 고딕" pitchFamily="34" charset="0"/>
-                          <a:ea typeface="맑은 고딕" pitchFamily="34" charset="-122"/>
-                          <a:cs typeface="맑은 고딕" pitchFamily="34" charset="-120"/>
-                        </a:rPr>
-                        <a:t>Validation</a:t>
-                      </a:r>
-                      <a:endParaRPr lang="en-US" sz="1100" dirty="0">
-                        <a:latin typeface="맑은 고딕" charset="0"/>
-                        <a:ea typeface="맑은 고딕" charset="0"/>
-                        <a:cs typeface="맑은 고딕" charset="0"/>
-                      </a:endParaRPr>
-                    </a:p>
-                  </a:txBody>
-                  <a:tcPr marL="54864" marR="54864" marT="27432" marB="27432" anchor="ctr">
-                    <a:lnL w="9525" cap="flat" cmpd="sng" algn="ctr">
-                      <a:solidFill>
-                        <a:srgbClr val="C9CED6"/>
-                      </a:solidFill>
-                      <a:prstDash val="solid"/>
-                      <a:round/>
-                      <a:headEnd type="none" w="med" len="med"/>
-                      <a:tailEnd type="none" w="med" len="med"/>
-                    </a:lnL>
-                    <a:lnR w="9525" cap="flat" cmpd="sng" algn="ctr">
-                      <a:solidFill>
-                        <a:srgbClr val="C9CED6"/>
-                      </a:solidFill>
-                      <a:prstDash val="solid"/>
-                      <a:round/>
-                      <a:headEnd type="none" w="med" len="med"/>
-                      <a:tailEnd type="none" w="med" len="med"/>
-                    </a:lnR>
-                    <a:lnT w="9525" cap="flat" cmpd="sng" algn="ctr">
-                      <a:solidFill>
-                        <a:srgbClr val="C9CED6"/>
-                      </a:solidFill>
-                      <a:prstDash val="solid"/>
-                      <a:round/>
-                      <a:headEnd type="none" w="med" len="med"/>
-                      <a:tailEnd type="none" w="med" len="med"/>
-                    </a:lnT>
-                    <a:lnB w="9525" cap="flat" cmpd="sng" algn="ctr">
-                      <a:solidFill>
-                        <a:srgbClr val="C9CED6"/>
-                      </a:solidFill>
-                      <a:prstDash val="solid"/>
-                      <a:round/>
-                      <a:headEnd type="none" w="med" len="med"/>
-                      <a:tailEnd type="none" w="med" len="med"/>
-                    </a:lnB>
-                    <a:solidFill>
-                      <a:srgbClr val="1B2241"/>
-                    </a:solidFill>
-                  </a:tcPr>
-                </a:tc>
-              </a:tr>
-              <a:tr h="329184">
-                <a:tc>
-                  <a:txBody>
-                    <a:bodyPr/>
-                    <a:lstStyle/>
-                    <a:p>
-                      <a:pPr algn="ctr" indent="0" marL="0">
-                        <a:buNone/>
-                      </a:pPr>
-                      <a:r>
-                        <a:rPr lang="en-US" sz="1100" dirty="0">
-                          <a:solidFill>
-                            <a:srgbClr val="222222"/>
-                          </a:solidFill>
-                          <a:latin typeface="맑은 고딕" pitchFamily="34" charset="0"/>
-                          <a:ea typeface="맑은 고딕" pitchFamily="34" charset="-122"/>
-                          <a:cs typeface="맑은 고딕" pitchFamily="34" charset="-120"/>
-                        </a:rPr>
-                        <a:t>10개용(38cm)</a:t>
-                      </a:r>
-                      <a:endParaRPr lang="en-US" sz="1100" dirty="0">
-                        <a:latin typeface="맑은 고딕" charset="0"/>
-                        <a:ea typeface="맑은 고딕" charset="0"/>
-                        <a:cs typeface="맑은 고딕" charset="0"/>
-                      </a:endParaRPr>
-                    </a:p>
-                  </a:txBody>
-                  <a:tcPr marL="54864" marR="54864" marT="27432" marB="27432" anchor="ctr">
-                    <a:lnL w="9525" cap="flat" cmpd="sng" algn="ctr">
-                      <a:solidFill>
-                        <a:srgbClr val="C9CED6"/>
-                      </a:solidFill>
-                      <a:prstDash val="solid"/>
-                      <a:round/>
-                      <a:headEnd type="none" w="med" len="med"/>
-                      <a:tailEnd type="none" w="med" len="med"/>
-                    </a:lnL>
-                    <a:lnR w="9525" cap="flat" cmpd="sng" algn="ctr">
-                      <a:solidFill>
-                        <a:srgbClr val="C9CED6"/>
-                      </a:solidFill>
-                      <a:prstDash val="solid"/>
-                      <a:round/>
-                      <a:headEnd type="none" w="med" len="med"/>
-                      <a:tailEnd type="none" w="med" len="med"/>
-                    </a:lnR>
-                    <a:lnT w="9525" cap="flat" cmpd="sng" algn="ctr">
-                      <a:solidFill>
-                        <a:srgbClr val="C9CED6"/>
-                      </a:solidFill>
-                      <a:prstDash val="solid"/>
-                      <a:round/>
-                      <a:headEnd type="none" w="med" len="med"/>
-                      <a:tailEnd type="none" w="med" len="med"/>
-                    </a:lnT>
-                    <a:lnB w="9525" cap="flat" cmpd="sng" algn="ctr">
-                      <a:solidFill>
-                        <a:srgbClr val="C9CED6"/>
-                      </a:solidFill>
-                      <a:prstDash val="solid"/>
-                      <a:round/>
-                      <a:headEnd type="none" w="med" len="med"/>
-                      <a:tailEnd type="none" w="med" len="med"/>
-                    </a:lnB>
-                  </a:tcPr>
-                </a:tc>
-                <a:tc>
-                  <a:txBody>
-                    <a:bodyPr/>
-                    <a:lstStyle/>
-                    <a:p>
-                      <a:pPr algn="ctr" indent="0" marL="0">
-                        <a:buNone/>
-                      </a:pPr>
-                      <a:r>
-                        <a:rPr lang="en-US" sz="1100" dirty="0">
-                          <a:solidFill>
-                            <a:srgbClr val="222222"/>
-                          </a:solidFill>
-                          <a:latin typeface="맑은 고딕" pitchFamily="34" charset="0"/>
-                          <a:ea typeface="맑은 고딕" pitchFamily="34" charset="-122"/>
-                          <a:cs typeface="맑은 고딕" pitchFamily="34" charset="-120"/>
-                        </a:rPr>
-                        <a:t>77 × 66 × 56</a:t>
-                      </a:r>
-                      <a:endParaRPr lang="en-US" sz="1100" dirty="0">
-                        <a:latin typeface="맑은 고딕" charset="0"/>
-                        <a:ea typeface="맑은 고딕" charset="0"/>
-                        <a:cs typeface="맑은 고딕" charset="0"/>
-                      </a:endParaRPr>
-                    </a:p>
-                  </a:txBody>
-                  <a:tcPr marL="54864" marR="54864" marT="27432" marB="27432" anchor="ctr">
-                    <a:lnL w="9525" cap="flat" cmpd="sng" algn="ctr">
-                      <a:solidFill>
-                        <a:srgbClr val="C9CED6"/>
-                      </a:solidFill>
-                      <a:prstDash val="solid"/>
-                      <a:round/>
-                      <a:headEnd type="none" w="med" len="med"/>
-                      <a:tailEnd type="none" w="med" len="med"/>
-                    </a:lnL>
-                    <a:lnR w="9525" cap="flat" cmpd="sng" algn="ctr">
-                      <a:solidFill>
-                        <a:srgbClr val="C9CED6"/>
-                      </a:solidFill>
-                      <a:prstDash val="solid"/>
-                      <a:round/>
-                      <a:headEnd type="none" w="med" len="med"/>
-                      <a:tailEnd type="none" w="med" len="med"/>
-                    </a:lnR>
-                    <a:lnT w="9525" cap="flat" cmpd="sng" algn="ctr">
-                      <a:solidFill>
-                        <a:srgbClr val="C9CED6"/>
-                      </a:solidFill>
-                      <a:prstDash val="solid"/>
-                      <a:round/>
-                      <a:headEnd type="none" w="med" len="med"/>
-                      <a:tailEnd type="none" w="med" len="med"/>
-                    </a:lnT>
-                    <a:lnB w="9525" cap="flat" cmpd="sng" algn="ctr">
-                      <a:solidFill>
-                        <a:srgbClr val="C9CED6"/>
-                      </a:solidFill>
-                      <a:prstDash val="solid"/>
-                      <a:round/>
-                      <a:headEnd type="none" w="med" len="med"/>
-                      <a:tailEnd type="none" w="med" len="med"/>
-                    </a:lnB>
-                  </a:tcPr>
-                </a:tc>
-                <a:tc>
-                  <a:txBody>
-                    <a:bodyPr/>
-                    <a:lstStyle/>
-                    <a:p>
-                      <a:pPr algn="ctr" indent="0" marL="0">
-                        <a:buNone/>
-                      </a:pPr>
-                      <a:r>
-                        <a:rPr lang="en-US" sz="1100" dirty="0">
-                          <a:solidFill>
-                            <a:srgbClr val="222222"/>
-                          </a:solidFill>
-                          <a:latin typeface="맑은 고딕" pitchFamily="34" charset="0"/>
-                          <a:ea typeface="맑은 고딕" pitchFamily="34" charset="-122"/>
-                          <a:cs typeface="맑은 고딕" pitchFamily="34" charset="-120"/>
-                        </a:rPr>
-                        <a:t>15</a:t>
-                      </a:r>
-                      <a:endParaRPr lang="en-US" sz="1100" dirty="0">
-                        <a:latin typeface="맑은 고딕" charset="0"/>
-                        <a:ea typeface="맑은 고딕" charset="0"/>
-                        <a:cs typeface="맑은 고딕" charset="0"/>
-                      </a:endParaRPr>
-                    </a:p>
-                  </a:txBody>
-                  <a:tcPr marL="54864" marR="54864" marT="27432" marB="27432" anchor="ctr">
-                    <a:lnL w="9525" cap="flat" cmpd="sng" algn="ctr">
-                      <a:solidFill>
-                        <a:srgbClr val="C9CED6"/>
-                      </a:solidFill>
-                      <a:prstDash val="solid"/>
-                      <a:round/>
-                      <a:headEnd type="none" w="med" len="med"/>
-                      <a:tailEnd type="none" w="med" len="med"/>
-                    </a:lnL>
-                    <a:lnR w="9525" cap="flat" cmpd="sng" algn="ctr">
-                      <a:solidFill>
-                        <a:srgbClr val="C9CED6"/>
-                      </a:solidFill>
-                      <a:prstDash val="solid"/>
-                      <a:round/>
-                      <a:headEnd type="none" w="med" len="med"/>
-                      <a:tailEnd type="none" w="med" len="med"/>
-                    </a:lnR>
-                    <a:lnT w="9525" cap="flat" cmpd="sng" algn="ctr">
-                      <a:solidFill>
-                        <a:srgbClr val="C9CED6"/>
-                      </a:solidFill>
-                      <a:prstDash val="solid"/>
-                      <a:round/>
-                      <a:headEnd type="none" w="med" len="med"/>
-                      <a:tailEnd type="none" w="med" len="med"/>
-                    </a:lnT>
-                    <a:lnB w="9525" cap="flat" cmpd="sng" algn="ctr">
-                      <a:solidFill>
-                        <a:srgbClr val="C9CED6"/>
-                      </a:solidFill>
-                      <a:prstDash val="solid"/>
-                      <a:round/>
-                      <a:headEnd type="none" w="med" len="med"/>
-                      <a:tailEnd type="none" w="med" len="med"/>
-                    </a:lnB>
-                  </a:tcPr>
-                </a:tc>
-                <a:tc>
-                  <a:txBody>
-                    <a:bodyPr/>
-                    <a:lstStyle/>
-                    <a:p>
-                      <a:pPr algn="ctr" indent="0" marL="0">
-                        <a:buNone/>
-                      </a:pPr>
-                      <a:r>
-                        <a:rPr lang="en-US" sz="1100" dirty="0">
-                          <a:solidFill>
-                            <a:srgbClr val="222222"/>
-                          </a:solidFill>
-                          <a:latin typeface="맑은 고딕" pitchFamily="34" charset="0"/>
-                          <a:ea typeface="맑은 고딕" pitchFamily="34" charset="-122"/>
-                          <a:cs typeface="맑은 고딕" pitchFamily="34" charset="-120"/>
-                        </a:rPr>
-                        <a:t>18.5</a:t>
-                      </a:r>
-                      <a:endParaRPr lang="en-US" sz="1100" dirty="0">
-                        <a:latin typeface="맑은 고딕" charset="0"/>
-                        <a:ea typeface="맑은 고딕" charset="0"/>
-                        <a:cs typeface="맑은 고딕" charset="0"/>
-                      </a:endParaRPr>
-                    </a:p>
-                  </a:txBody>
-                  <a:tcPr marL="54864" marR="54864" marT="27432" marB="27432" anchor="ctr">
-                    <a:lnL w="9525" cap="flat" cmpd="sng" algn="ctr">
-                      <a:solidFill>
-                        <a:srgbClr val="C9CED6"/>
-                      </a:solidFill>
-                      <a:prstDash val="solid"/>
-                      <a:round/>
-                      <a:headEnd type="none" w="med" len="med"/>
-                      <a:tailEnd type="none" w="med" len="med"/>
-                    </a:lnL>
-                    <a:lnR w="9525" cap="flat" cmpd="sng" algn="ctr">
-                      <a:solidFill>
-                        <a:srgbClr val="C9CED6"/>
-                      </a:solidFill>
-                      <a:prstDash val="solid"/>
-                      <a:round/>
-                      <a:headEnd type="none" w="med" len="med"/>
-                      <a:tailEnd type="none" w="med" len="med"/>
-                    </a:lnR>
-                    <a:lnT w="9525" cap="flat" cmpd="sng" algn="ctr">
-                      <a:solidFill>
-                        <a:srgbClr val="C9CED6"/>
-                      </a:solidFill>
-                      <a:prstDash val="solid"/>
-                      <a:round/>
-                      <a:headEnd type="none" w="med" len="med"/>
-                      <a:tailEnd type="none" w="med" len="med"/>
-                    </a:lnT>
-                    <a:lnB w="9525" cap="flat" cmpd="sng" algn="ctr">
-                      <a:solidFill>
-                        <a:srgbClr val="C9CED6"/>
-                      </a:solidFill>
-                      <a:prstDash val="solid"/>
-                      <a:round/>
-                      <a:headEnd type="none" w="med" len="med"/>
-                      <a:tailEnd type="none" w="med" len="med"/>
-                    </a:lnB>
-                  </a:tcPr>
-                </a:tc>
-                <a:tc>
-                  <a:txBody>
-                    <a:bodyPr/>
-                    <a:lstStyle/>
-                    <a:p>
-                      <a:pPr algn="ctr" indent="0" marL="0">
-                        <a:buNone/>
-                      </a:pPr>
-                      <a:r>
-                        <a:rPr lang="en-US" sz="1100" dirty="0">
-                          <a:solidFill>
-                            <a:srgbClr val="222222"/>
-                          </a:solidFill>
-                          <a:latin typeface="맑은 고딕" pitchFamily="34" charset="0"/>
-                          <a:ea typeface="맑은 고딕" pitchFamily="34" charset="-122"/>
-                          <a:cs typeface="맑은 고딕" pitchFamily="34" charset="-120"/>
-                        </a:rPr>
-                        <a:t>10</a:t>
-                      </a:r>
-                      <a:endParaRPr lang="en-US" sz="1100" dirty="0">
-                        <a:latin typeface="맑은 고딕" charset="0"/>
-                        <a:ea typeface="맑은 고딕" charset="0"/>
-                        <a:cs typeface="맑은 고딕" charset="0"/>
-                      </a:endParaRPr>
-                    </a:p>
-                  </a:txBody>
-                  <a:tcPr marL="54864" marR="54864" marT="27432" marB="27432" anchor="ctr">
-                    <a:lnL w="9525" cap="flat" cmpd="sng" algn="ctr">
-                      <a:solidFill>
-                        <a:srgbClr val="C9CED6"/>
-                      </a:solidFill>
-                      <a:prstDash val="solid"/>
-                      <a:round/>
-                      <a:headEnd type="none" w="med" len="med"/>
-                      <a:tailEnd type="none" w="med" len="med"/>
-                    </a:lnL>
-                    <a:lnR w="9525" cap="flat" cmpd="sng" algn="ctr">
-                      <a:solidFill>
-                        <a:srgbClr val="C9CED6"/>
-                      </a:solidFill>
-                      <a:prstDash val="solid"/>
-                      <a:round/>
-                      <a:headEnd type="none" w="med" len="med"/>
-                      <a:tailEnd type="none" w="med" len="med"/>
-                    </a:lnR>
-                    <a:lnT w="9525" cap="flat" cmpd="sng" algn="ctr">
-                      <a:solidFill>
-                        <a:srgbClr val="C9CED6"/>
-                      </a:solidFill>
-                      <a:prstDash val="solid"/>
-                      <a:round/>
-                      <a:headEnd type="none" w="med" len="med"/>
-                      <a:tailEnd type="none" w="med" len="med"/>
-                    </a:lnT>
-                    <a:lnB w="9525" cap="flat" cmpd="sng" algn="ctr">
-                      <a:solidFill>
-                        <a:srgbClr val="C9CED6"/>
-                      </a:solidFill>
-                      <a:prstDash val="solid"/>
-                      <a:round/>
-                      <a:headEnd type="none" w="med" len="med"/>
-                      <a:tailEnd type="none" w="med" len="med"/>
-                    </a:lnB>
-                  </a:tcPr>
-                </a:tc>
-                <a:tc>
-                  <a:txBody>
-                    <a:bodyPr/>
-                    <a:lstStyle/>
-                    <a:p>
-                      <a:pPr algn="ctr" indent="0" marL="0">
-                        <a:buNone/>
-                      </a:pPr>
-                      <a:r>
-                        <a:rPr lang="en-US" sz="1100" dirty="0">
-                          <a:solidFill>
-                            <a:srgbClr val="222222"/>
-                          </a:solidFill>
-                          <a:latin typeface="맑은 고딕" pitchFamily="34" charset="0"/>
-                          <a:ea typeface="맑은 고딕" pitchFamily="34" charset="-122"/>
-                          <a:cs typeface="맑은 고딕" pitchFamily="34" charset="-120"/>
-                        </a:rPr>
-                        <a:t>O</a:t>
-                      </a:r>
-                      <a:endParaRPr lang="en-US" sz="1100" dirty="0">
-                        <a:latin typeface="맑은 고딕" charset="0"/>
-                        <a:ea typeface="맑은 고딕" charset="0"/>
-                        <a:cs typeface="맑은 고딕" charset="0"/>
-                      </a:endParaRPr>
-                    </a:p>
-                  </a:txBody>
-                  <a:tcPr marL="54864" marR="54864" marT="27432" marB="27432" anchor="ctr">
-                    <a:lnL w="9525" cap="flat" cmpd="sng" algn="ctr">
-                      <a:solidFill>
-                        <a:srgbClr val="C9CED6"/>
-                      </a:solidFill>
-                      <a:prstDash val="solid"/>
-                      <a:round/>
-                      <a:headEnd type="none" w="med" len="med"/>
-                      <a:tailEnd type="none" w="med" len="med"/>
-                    </a:lnL>
-                    <a:lnR w="9525" cap="flat" cmpd="sng" algn="ctr">
-                      <a:solidFill>
-                        <a:srgbClr val="C9CED6"/>
-                      </a:solidFill>
-                      <a:prstDash val="solid"/>
-                      <a:round/>
-                      <a:headEnd type="none" w="med" len="med"/>
-                      <a:tailEnd type="none" w="med" len="med"/>
-                    </a:lnR>
-                    <a:lnT w="9525" cap="flat" cmpd="sng" algn="ctr">
-                      <a:solidFill>
-                        <a:srgbClr val="C9CED6"/>
-                      </a:solidFill>
-                      <a:prstDash val="solid"/>
-                      <a:round/>
-                      <a:headEnd type="none" w="med" len="med"/>
-                      <a:tailEnd type="none" w="med" len="med"/>
-                    </a:lnT>
-                    <a:lnB w="9525" cap="flat" cmpd="sng" algn="ctr">
-                      <a:solidFill>
-                        <a:srgbClr val="C9CED6"/>
-                      </a:solidFill>
-                      <a:prstDash val="solid"/>
-                      <a:round/>
-                      <a:headEnd type="none" w="med" len="med"/>
-                      <a:tailEnd type="none" w="med" len="med"/>
-                    </a:lnB>
-                  </a:tcPr>
-                </a:tc>
-              </a:tr>
-              <a:tr h="329184">
-                <a:tc>
-                  <a:txBody>
-                    <a:bodyPr/>
-                    <a:lstStyle/>
-                    <a:p>
-                      <a:pPr algn="ctr" indent="0" marL="0">
-                        <a:buNone/>
-                      </a:pPr>
-                      <a:r>
-                        <a:rPr lang="en-US" sz="1100" dirty="0">
-                          <a:solidFill>
-                            <a:srgbClr val="222222"/>
-                          </a:solidFill>
-                          <a:latin typeface="맑은 고딕" pitchFamily="34" charset="0"/>
-                          <a:ea typeface="맑은 고딕" pitchFamily="34" charset="-122"/>
-                          <a:cs typeface="맑은 고딕" pitchFamily="34" charset="-120"/>
-                        </a:rPr>
-                        <a:t>10개용(45cm)</a:t>
-                      </a:r>
-                      <a:endParaRPr lang="en-US" sz="1100" dirty="0">
-                        <a:latin typeface="맑은 고딕" charset="0"/>
-                        <a:ea typeface="맑은 고딕" charset="0"/>
-                        <a:cs typeface="맑은 고딕" charset="0"/>
-                      </a:endParaRPr>
-                    </a:p>
-                  </a:txBody>
-                  <a:tcPr marL="54864" marR="54864" marT="27432" marB="27432" anchor="ctr">
-                    <a:lnL w="9525" cap="flat" cmpd="sng" algn="ctr">
-                      <a:solidFill>
-                        <a:srgbClr val="C9CED6"/>
-                      </a:solidFill>
-                      <a:prstDash val="solid"/>
-                      <a:round/>
-                      <a:headEnd type="none" w="med" len="med"/>
-                      <a:tailEnd type="none" w="med" len="med"/>
-                    </a:lnL>
-                    <a:lnR w="9525" cap="flat" cmpd="sng" algn="ctr">
-                      <a:solidFill>
-                        <a:srgbClr val="C9CED6"/>
-                      </a:solidFill>
-                      <a:prstDash val="solid"/>
-                      <a:round/>
-                      <a:headEnd type="none" w="med" len="med"/>
-                      <a:tailEnd type="none" w="med" len="med"/>
-                    </a:lnR>
-                    <a:lnT w="9525" cap="flat" cmpd="sng" algn="ctr">
-                      <a:solidFill>
-                        <a:srgbClr val="C9CED6"/>
-                      </a:solidFill>
-                      <a:prstDash val="solid"/>
-                      <a:round/>
-                      <a:headEnd type="none" w="med" len="med"/>
-                      <a:tailEnd type="none" w="med" len="med"/>
-                    </a:lnT>
-                    <a:lnB w="9525" cap="flat" cmpd="sng" algn="ctr">
-                      <a:solidFill>
-                        <a:srgbClr val="C9CED6"/>
-                      </a:solidFill>
-                      <a:prstDash val="solid"/>
-                      <a:round/>
-                      <a:headEnd type="none" w="med" len="med"/>
-                      <a:tailEnd type="none" w="med" len="med"/>
-                    </a:lnB>
-                  </a:tcPr>
-                </a:tc>
-                <a:tc>
-                  <a:txBody>
-                    <a:bodyPr/>
-                    <a:lstStyle/>
-                    <a:p>
-                      <a:pPr algn="ctr" indent="0" marL="0">
-                        <a:buNone/>
-                      </a:pPr>
-                      <a:r>
-                        <a:rPr lang="en-US" sz="1100" dirty="0">
-                          <a:solidFill>
-                            <a:srgbClr val="222222"/>
-                          </a:solidFill>
-                          <a:latin typeface="맑은 고딕" pitchFamily="34" charset="0"/>
-                          <a:ea typeface="맑은 고딕" pitchFamily="34" charset="-122"/>
-                          <a:cs typeface="맑은 고딕" pitchFamily="34" charset="-120"/>
-                        </a:rPr>
-                        <a:t>85 × 66 × 56</a:t>
-                      </a:r>
-                      <a:endParaRPr lang="en-US" sz="1100" dirty="0">
-                        <a:latin typeface="맑은 고딕" charset="0"/>
-                        <a:ea typeface="맑은 고딕" charset="0"/>
-                        <a:cs typeface="맑은 고딕" charset="0"/>
-                      </a:endParaRPr>
-                    </a:p>
-                  </a:txBody>
-                  <a:tcPr marL="54864" marR="54864" marT="27432" marB="27432" anchor="ctr">
-                    <a:lnL w="9525" cap="flat" cmpd="sng" algn="ctr">
-                      <a:solidFill>
-                        <a:srgbClr val="C9CED6"/>
-                      </a:solidFill>
-                      <a:prstDash val="solid"/>
-                      <a:round/>
-                      <a:headEnd type="none" w="med" len="med"/>
-                      <a:tailEnd type="none" w="med" len="med"/>
-                    </a:lnL>
-                    <a:lnR w="9525" cap="flat" cmpd="sng" algn="ctr">
-                      <a:solidFill>
-                        <a:srgbClr val="C9CED6"/>
-                      </a:solidFill>
-                      <a:prstDash val="solid"/>
-                      <a:round/>
-                      <a:headEnd type="none" w="med" len="med"/>
-                      <a:tailEnd type="none" w="med" len="med"/>
-                    </a:lnR>
-                    <a:lnT w="9525" cap="flat" cmpd="sng" algn="ctr">
-                      <a:solidFill>
-                        <a:srgbClr val="C9CED6"/>
-                      </a:solidFill>
-                      <a:prstDash val="solid"/>
-                      <a:round/>
-                      <a:headEnd type="none" w="med" len="med"/>
-                      <a:tailEnd type="none" w="med" len="med"/>
-                    </a:lnT>
-                    <a:lnB w="9525" cap="flat" cmpd="sng" algn="ctr">
-                      <a:solidFill>
-                        <a:srgbClr val="C9CED6"/>
-                      </a:solidFill>
-                      <a:prstDash val="solid"/>
-                      <a:round/>
-                      <a:headEnd type="none" w="med" len="med"/>
-                      <a:tailEnd type="none" w="med" len="med"/>
-                    </a:lnB>
-                  </a:tcPr>
-                </a:tc>
-                <a:tc>
-                  <a:txBody>
-                    <a:bodyPr/>
-                    <a:lstStyle/>
-                    <a:p>
-                      <a:pPr algn="ctr" indent="0" marL="0">
-                        <a:buNone/>
-                      </a:pPr>
-                      <a:r>
-                        <a:rPr lang="en-US" sz="1100" dirty="0">
-                          <a:solidFill>
-                            <a:srgbClr val="222222"/>
-                          </a:solidFill>
-                          <a:latin typeface="맑은 고딕" pitchFamily="34" charset="0"/>
-                          <a:ea typeface="맑은 고딕" pitchFamily="34" charset="-122"/>
-                          <a:cs typeface="맑은 고딕" pitchFamily="34" charset="-120"/>
-                        </a:rPr>
-                        <a:t>15</a:t>
-                      </a:r>
-                      <a:endParaRPr lang="en-US" sz="1100" dirty="0">
-                        <a:latin typeface="맑은 고딕" charset="0"/>
-                        <a:ea typeface="맑은 고딕" charset="0"/>
-                        <a:cs typeface="맑은 고딕" charset="0"/>
-                      </a:endParaRPr>
-                    </a:p>
-                  </a:txBody>
-                  <a:tcPr marL="54864" marR="54864" marT="27432" marB="27432" anchor="ctr">
-                    <a:lnL w="9525" cap="flat" cmpd="sng" algn="ctr">
-                      <a:solidFill>
-                        <a:srgbClr val="C9CED6"/>
-                      </a:solidFill>
-                      <a:prstDash val="solid"/>
-                      <a:round/>
-                      <a:headEnd type="none" w="med" len="med"/>
-                      <a:tailEnd type="none" w="med" len="med"/>
-                    </a:lnL>
-                    <a:lnR w="9525" cap="flat" cmpd="sng" algn="ctr">
-                      <a:solidFill>
-                        <a:srgbClr val="C9CED6"/>
-                      </a:solidFill>
-                      <a:prstDash val="solid"/>
-                      <a:round/>
-                      <a:headEnd type="none" w="med" len="med"/>
-                      <a:tailEnd type="none" w="med" len="med"/>
-                    </a:lnR>
-                    <a:lnT w="9525" cap="flat" cmpd="sng" algn="ctr">
-                      <a:solidFill>
-                        <a:srgbClr val="C9CED6"/>
-                      </a:solidFill>
-                      <a:prstDash val="solid"/>
-                      <a:round/>
-                      <a:headEnd type="none" w="med" len="med"/>
-                      <a:tailEnd type="none" w="med" len="med"/>
-                    </a:lnT>
-                    <a:lnB w="9525" cap="flat" cmpd="sng" algn="ctr">
-                      <a:solidFill>
-                        <a:srgbClr val="C9CED6"/>
-                      </a:solidFill>
-                      <a:prstDash val="solid"/>
-                      <a:round/>
-                      <a:headEnd type="none" w="med" len="med"/>
-                      <a:tailEnd type="none" w="med" len="med"/>
-                    </a:lnB>
-                  </a:tcPr>
-                </a:tc>
-                <a:tc>
-                  <a:txBody>
-                    <a:bodyPr/>
-                    <a:lstStyle/>
-                    <a:p>
-                      <a:pPr algn="ctr" indent="0" marL="0">
-                        <a:buNone/>
-                      </a:pPr>
-                      <a:r>
-                        <a:rPr lang="en-US" sz="1100" dirty="0">
-                          <a:solidFill>
-                            <a:srgbClr val="222222"/>
-                          </a:solidFill>
-                          <a:latin typeface="맑은 고딕" pitchFamily="34" charset="0"/>
-                          <a:ea typeface="맑은 고딕" pitchFamily="34" charset="-122"/>
-                          <a:cs typeface="맑은 고딕" pitchFamily="34" charset="-120"/>
-                        </a:rPr>
-                        <a:t>18.5</a:t>
-                      </a:r>
-                      <a:endParaRPr lang="en-US" sz="1100" dirty="0">
-                        <a:latin typeface="맑은 고딕" charset="0"/>
-                        <a:ea typeface="맑은 고딕" charset="0"/>
-                        <a:cs typeface="맑은 고딕" charset="0"/>
-                      </a:endParaRPr>
-                    </a:p>
-                  </a:txBody>
-                  <a:tcPr marL="54864" marR="54864" marT="27432" marB="27432" anchor="ctr">
-                    <a:lnL w="9525" cap="flat" cmpd="sng" algn="ctr">
-                      <a:solidFill>
-                        <a:srgbClr val="C9CED6"/>
-                      </a:solidFill>
-                      <a:prstDash val="solid"/>
-                      <a:round/>
-                      <a:headEnd type="none" w="med" len="med"/>
-                      <a:tailEnd type="none" w="med" len="med"/>
-                    </a:lnL>
-                    <a:lnR w="9525" cap="flat" cmpd="sng" algn="ctr">
-                      <a:solidFill>
-                        <a:srgbClr val="C9CED6"/>
-                      </a:solidFill>
-                      <a:prstDash val="solid"/>
-                      <a:round/>
-                      <a:headEnd type="none" w="med" len="med"/>
-                      <a:tailEnd type="none" w="med" len="med"/>
-                    </a:lnR>
-                    <a:lnT w="9525" cap="flat" cmpd="sng" algn="ctr">
-                      <a:solidFill>
-                        <a:srgbClr val="C9CED6"/>
-                      </a:solidFill>
-                      <a:prstDash val="solid"/>
-                      <a:round/>
-                      <a:headEnd type="none" w="med" len="med"/>
-                      <a:tailEnd type="none" w="med" len="med"/>
-                    </a:lnT>
-                    <a:lnB w="9525" cap="flat" cmpd="sng" algn="ctr">
-                      <a:solidFill>
-                        <a:srgbClr val="C9CED6"/>
-                      </a:solidFill>
-                      <a:prstDash val="solid"/>
-                      <a:round/>
-                      <a:headEnd type="none" w="med" len="med"/>
-                      <a:tailEnd type="none" w="med" len="med"/>
-                    </a:lnB>
-                  </a:tcPr>
-                </a:tc>
-                <a:tc>
-                  <a:txBody>
-                    <a:bodyPr/>
-                    <a:lstStyle/>
-                    <a:p>
-                      <a:pPr algn="ctr" indent="0" marL="0">
-                        <a:buNone/>
-                      </a:pPr>
-                      <a:r>
-                        <a:rPr lang="en-US" sz="1100" dirty="0">
-                          <a:solidFill>
-                            <a:srgbClr val="222222"/>
-                          </a:solidFill>
-                          <a:latin typeface="맑은 고딕" pitchFamily="34" charset="0"/>
-                          <a:ea typeface="맑은 고딕" pitchFamily="34" charset="-122"/>
-                          <a:cs typeface="맑은 고딕" pitchFamily="34" charset="-120"/>
-                        </a:rPr>
-                        <a:t>10</a:t>
-                      </a:r>
-                      <a:endParaRPr lang="en-US" sz="1100" dirty="0">
-                        <a:latin typeface="맑은 고딕" charset="0"/>
-                        <a:ea typeface="맑은 고딕" charset="0"/>
-                        <a:cs typeface="맑은 고딕" charset="0"/>
-                      </a:endParaRPr>
-                    </a:p>
-                  </a:txBody>
-                  <a:tcPr marL="54864" marR="54864" marT="27432" marB="27432" anchor="ctr">
-                    <a:lnL w="9525" cap="flat" cmpd="sng" algn="ctr">
-                      <a:solidFill>
-                        <a:srgbClr val="C9CED6"/>
-                      </a:solidFill>
-                      <a:prstDash val="solid"/>
-                      <a:round/>
-                      <a:headEnd type="none" w="med" len="med"/>
-                      <a:tailEnd type="none" w="med" len="med"/>
-                    </a:lnL>
-                    <a:lnR w="9525" cap="flat" cmpd="sng" algn="ctr">
-                      <a:solidFill>
-                        <a:srgbClr val="C9CED6"/>
-                      </a:solidFill>
-                      <a:prstDash val="solid"/>
-                      <a:round/>
-                      <a:headEnd type="none" w="med" len="med"/>
-                      <a:tailEnd type="none" w="med" len="med"/>
-                    </a:lnR>
-                    <a:lnT w="9525" cap="flat" cmpd="sng" algn="ctr">
-                      <a:solidFill>
-                        <a:srgbClr val="C9CED6"/>
-                      </a:solidFill>
-                      <a:prstDash val="solid"/>
-                      <a:round/>
-                      <a:headEnd type="none" w="med" len="med"/>
-                      <a:tailEnd type="none" w="med" len="med"/>
-                    </a:lnT>
-                    <a:lnB w="9525" cap="flat" cmpd="sng" algn="ctr">
-                      <a:solidFill>
-                        <a:srgbClr val="C9CED6"/>
-                      </a:solidFill>
-                      <a:prstDash val="solid"/>
-                      <a:round/>
-                      <a:headEnd type="none" w="med" len="med"/>
-                      <a:tailEnd type="none" w="med" len="med"/>
-                    </a:lnB>
-                  </a:tcPr>
-                </a:tc>
-                <a:tc>
-                  <a:txBody>
-                    <a:bodyPr/>
-                    <a:lstStyle/>
-                    <a:p>
-                      <a:pPr algn="ctr" indent="0" marL="0">
-                        <a:buNone/>
-                      </a:pPr>
-                      <a:r>
-                        <a:rPr lang="en-US" sz="1100" dirty="0">
-                          <a:solidFill>
-                            <a:srgbClr val="222222"/>
-                          </a:solidFill>
-                          <a:latin typeface="맑은 고딕" pitchFamily="34" charset="0"/>
-                          <a:ea typeface="맑은 고딕" pitchFamily="34" charset="-122"/>
-                          <a:cs typeface="맑은 고딕" pitchFamily="34" charset="-120"/>
-                        </a:rPr>
-                        <a:t>O</a:t>
-                      </a:r>
-                      <a:endParaRPr lang="en-US" sz="1100" dirty="0">
-                        <a:latin typeface="맑은 고딕" charset="0"/>
-                        <a:ea typeface="맑은 고딕" charset="0"/>
-                        <a:cs typeface="맑은 고딕" charset="0"/>
-                      </a:endParaRPr>
-                    </a:p>
-                  </a:txBody>
-                  <a:tcPr marL="54864" marR="54864" marT="27432" marB="27432" anchor="ctr">
-                    <a:lnL w="9525" cap="flat" cmpd="sng" algn="ctr">
-                      <a:solidFill>
-                        <a:srgbClr val="C9CED6"/>
-                      </a:solidFill>
-                      <a:prstDash val="solid"/>
-                      <a:round/>
-                      <a:headEnd type="none" w="med" len="med"/>
-                      <a:tailEnd type="none" w="med" len="med"/>
-                    </a:lnL>
-                    <a:lnR w="9525" cap="flat" cmpd="sng" algn="ctr">
-                      <a:solidFill>
-                        <a:srgbClr val="C9CED6"/>
-                      </a:solidFill>
-                      <a:prstDash val="solid"/>
-                      <a:round/>
-                      <a:headEnd type="none" w="med" len="med"/>
-                      <a:tailEnd type="none" w="med" len="med"/>
-                    </a:lnR>
-                    <a:lnT w="9525" cap="flat" cmpd="sng" algn="ctr">
-                      <a:solidFill>
-                        <a:srgbClr val="C9CED6"/>
-                      </a:solidFill>
-                      <a:prstDash val="solid"/>
-                      <a:round/>
-                      <a:headEnd type="none" w="med" len="med"/>
-                      <a:tailEnd type="none" w="med" len="med"/>
-                    </a:lnT>
-                    <a:lnB w="9525" cap="flat" cmpd="sng" algn="ctr">
-                      <a:solidFill>
-                        <a:srgbClr val="C9CED6"/>
-                      </a:solidFill>
-                      <a:prstDash val="solid"/>
-                      <a:round/>
-                      <a:headEnd type="none" w="med" len="med"/>
-                      <a:tailEnd type="none" w="med" len="med"/>
-                    </a:lnB>
-                  </a:tcPr>
-                </a:tc>
-              </a:tr>
-              <a:tr h="329184">
-                <a:tc>
-                  <a:txBody>
-                    <a:bodyPr/>
-                    <a:lstStyle/>
-                    <a:p>
-                      <a:pPr algn="ctr" indent="0" marL="0">
-                        <a:buNone/>
-                      </a:pPr>
-                      <a:r>
-                        <a:rPr lang="en-US" sz="1100" dirty="0">
-                          <a:solidFill>
-                            <a:srgbClr val="222222"/>
-                          </a:solidFill>
-                          <a:latin typeface="맑은 고딕" pitchFamily="34" charset="0"/>
-                          <a:ea typeface="맑은 고딕" pitchFamily="34" charset="-122"/>
-                          <a:cs typeface="맑은 고딕" pitchFamily="34" charset="-120"/>
-                        </a:rPr>
-                        <a:t>5개용(38cm)</a:t>
-                      </a:r>
-                      <a:endParaRPr lang="en-US" sz="1100" dirty="0">
-                        <a:latin typeface="맑은 고딕" charset="0"/>
-                        <a:ea typeface="맑은 고딕" charset="0"/>
-                        <a:cs typeface="맑은 고딕" charset="0"/>
-                      </a:endParaRPr>
-                    </a:p>
-                  </a:txBody>
-                  <a:tcPr marL="54864" marR="54864" marT="27432" marB="27432" anchor="ctr">
-                    <a:lnL w="9525" cap="flat" cmpd="sng" algn="ctr">
-                      <a:solidFill>
-                        <a:srgbClr val="C9CED6"/>
-                      </a:solidFill>
-                      <a:prstDash val="solid"/>
-                      <a:round/>
-                      <a:headEnd type="none" w="med" len="med"/>
-                      <a:tailEnd type="none" w="med" len="med"/>
-                    </a:lnL>
-                    <a:lnR w="9525" cap="flat" cmpd="sng" algn="ctr">
-                      <a:solidFill>
-                        <a:srgbClr val="C9CED6"/>
-                      </a:solidFill>
-                      <a:prstDash val="solid"/>
-                      <a:round/>
-                      <a:headEnd type="none" w="med" len="med"/>
-                      <a:tailEnd type="none" w="med" len="med"/>
-                    </a:lnR>
-                    <a:lnT w="9525" cap="flat" cmpd="sng" algn="ctr">
-                      <a:solidFill>
-                        <a:srgbClr val="C9CED6"/>
-                      </a:solidFill>
-                      <a:prstDash val="solid"/>
-                      <a:round/>
-                      <a:headEnd type="none" w="med" len="med"/>
-                      <a:tailEnd type="none" w="med" len="med"/>
-                    </a:lnT>
-                    <a:lnB w="9525" cap="flat" cmpd="sng" algn="ctr">
-                      <a:solidFill>
-                        <a:srgbClr val="C9CED6"/>
-                      </a:solidFill>
-                      <a:prstDash val="solid"/>
-                      <a:round/>
-                      <a:headEnd type="none" w="med" len="med"/>
-                      <a:tailEnd type="none" w="med" len="med"/>
-                    </a:lnB>
-                  </a:tcPr>
-                </a:tc>
-                <a:tc>
-                  <a:txBody>
-                    <a:bodyPr/>
-                    <a:lstStyle/>
-                    <a:p>
-                      <a:pPr algn="ctr" indent="0" marL="0">
-                        <a:buNone/>
-                      </a:pPr>
-                      <a:r>
-                        <a:rPr lang="en-US" sz="1100" dirty="0">
-                          <a:solidFill>
-                            <a:srgbClr val="222222"/>
-                          </a:solidFill>
-                          <a:latin typeface="맑은 고딕" pitchFamily="34" charset="0"/>
-                          <a:ea typeface="맑은 고딕" pitchFamily="34" charset="-122"/>
-                          <a:cs typeface="맑은 고딕" pitchFamily="34" charset="-120"/>
-                        </a:rPr>
-                        <a:t>77 × 35 × 56</a:t>
-                      </a:r>
-                      <a:endParaRPr lang="en-US" sz="1100" dirty="0">
-                        <a:latin typeface="맑은 고딕" charset="0"/>
-                        <a:ea typeface="맑은 고딕" charset="0"/>
-                        <a:cs typeface="맑은 고딕" charset="0"/>
-                      </a:endParaRPr>
-                    </a:p>
-                  </a:txBody>
-                  <a:tcPr marL="54864" marR="54864" marT="27432" marB="27432" anchor="ctr">
-                    <a:lnL w="9525" cap="flat" cmpd="sng" algn="ctr">
-                      <a:solidFill>
-                        <a:srgbClr val="C9CED6"/>
-                      </a:solidFill>
-                      <a:prstDash val="solid"/>
-                      <a:round/>
-                      <a:headEnd type="none" w="med" len="med"/>
-                      <a:tailEnd type="none" w="med" len="med"/>
-                    </a:lnL>
-                    <a:lnR w="9525" cap="flat" cmpd="sng" algn="ctr">
-                      <a:solidFill>
-                        <a:srgbClr val="C9CED6"/>
-                      </a:solidFill>
-                      <a:prstDash val="solid"/>
-                      <a:round/>
-                      <a:headEnd type="none" w="med" len="med"/>
-                      <a:tailEnd type="none" w="med" len="med"/>
-                    </a:lnR>
-                    <a:lnT w="9525" cap="flat" cmpd="sng" algn="ctr">
-                      <a:solidFill>
-                        <a:srgbClr val="C9CED6"/>
-                      </a:solidFill>
-                      <a:prstDash val="solid"/>
-                      <a:round/>
-                      <a:headEnd type="none" w="med" len="med"/>
-                      <a:tailEnd type="none" w="med" len="med"/>
-                    </a:lnT>
-                    <a:lnB w="9525" cap="flat" cmpd="sng" algn="ctr">
-                      <a:solidFill>
-                        <a:srgbClr val="C9CED6"/>
-                      </a:solidFill>
-                      <a:prstDash val="solid"/>
-                      <a:round/>
-                      <a:headEnd type="none" w="med" len="med"/>
-                      <a:tailEnd type="none" w="med" len="med"/>
-                    </a:lnB>
-                  </a:tcPr>
-                </a:tc>
-                <a:tc>
-                  <a:txBody>
-                    <a:bodyPr/>
-                    <a:lstStyle/>
-                    <a:p>
-                      <a:pPr algn="ctr" indent="0" marL="0">
-                        <a:buNone/>
-                      </a:pPr>
-                      <a:r>
-                        <a:rPr lang="en-US" sz="1100" dirty="0">
-                          <a:solidFill>
-                            <a:srgbClr val="222222"/>
-                          </a:solidFill>
-                          <a:latin typeface="맑은 고딕" pitchFamily="34" charset="0"/>
-                          <a:ea typeface="맑은 고딕" pitchFamily="34" charset="-122"/>
-                          <a:cs typeface="맑은 고딕" pitchFamily="34" charset="-120"/>
-                        </a:rPr>
-                        <a:t>6.5</a:t>
-                      </a:r>
-                      <a:endParaRPr lang="en-US" sz="1100" dirty="0">
-                        <a:latin typeface="맑은 고딕" charset="0"/>
-                        <a:ea typeface="맑은 고딕" charset="0"/>
-                        <a:cs typeface="맑은 고딕" charset="0"/>
-                      </a:endParaRPr>
-                    </a:p>
-                  </a:txBody>
-                  <a:tcPr marL="54864" marR="54864" marT="27432" marB="27432" anchor="ctr">
-                    <a:lnL w="9525" cap="flat" cmpd="sng" algn="ctr">
-                      <a:solidFill>
-                        <a:srgbClr val="C9CED6"/>
-                      </a:solidFill>
-                      <a:prstDash val="solid"/>
-                      <a:round/>
-                      <a:headEnd type="none" w="med" len="med"/>
-                      <a:tailEnd type="none" w="med" len="med"/>
-                    </a:lnL>
-                    <a:lnR w="9525" cap="flat" cmpd="sng" algn="ctr">
-                      <a:solidFill>
-                        <a:srgbClr val="C9CED6"/>
-                      </a:solidFill>
-                      <a:prstDash val="solid"/>
-                      <a:round/>
-                      <a:headEnd type="none" w="med" len="med"/>
-                      <a:tailEnd type="none" w="med" len="med"/>
-                    </a:lnR>
-                    <a:lnT w="9525" cap="flat" cmpd="sng" algn="ctr">
-                      <a:solidFill>
-                        <a:srgbClr val="C9CED6"/>
-                      </a:solidFill>
-                      <a:prstDash val="solid"/>
-                      <a:round/>
-                      <a:headEnd type="none" w="med" len="med"/>
-                      <a:tailEnd type="none" w="med" len="med"/>
-                    </a:lnT>
-                    <a:lnB w="9525" cap="flat" cmpd="sng" algn="ctr">
-                      <a:solidFill>
-                        <a:srgbClr val="C9CED6"/>
-                      </a:solidFill>
-                      <a:prstDash val="solid"/>
-                      <a:round/>
-                      <a:headEnd type="none" w="med" len="med"/>
-                      <a:tailEnd type="none" w="med" len="med"/>
-                    </a:lnB>
-                  </a:tcPr>
-                </a:tc>
-                <a:tc>
-                  <a:txBody>
-                    <a:bodyPr/>
-                    <a:lstStyle/>
-                    <a:p>
-                      <a:pPr algn="ctr" indent="0" marL="0">
-                        <a:buNone/>
-                      </a:pPr>
-                      <a:r>
-                        <a:rPr lang="en-US" sz="1100" dirty="0">
-                          <a:solidFill>
-                            <a:srgbClr val="222222"/>
-                          </a:solidFill>
-                          <a:latin typeface="맑은 고딕" pitchFamily="34" charset="0"/>
-                          <a:ea typeface="맑은 고딕" pitchFamily="34" charset="-122"/>
-                          <a:cs typeface="맑은 고딕" pitchFamily="34" charset="-120"/>
-                        </a:rPr>
-                        <a:t>10</a:t>
-                      </a:r>
-                      <a:endParaRPr lang="en-US" sz="1100" dirty="0">
-                        <a:latin typeface="맑은 고딕" charset="0"/>
-                        <a:ea typeface="맑은 고딕" charset="0"/>
-                        <a:cs typeface="맑은 고딕" charset="0"/>
-                      </a:endParaRPr>
-                    </a:p>
-                  </a:txBody>
-                  <a:tcPr marL="54864" marR="54864" marT="27432" marB="27432" anchor="ctr">
-                    <a:lnL w="9525" cap="flat" cmpd="sng" algn="ctr">
-                      <a:solidFill>
-                        <a:srgbClr val="C9CED6"/>
-                      </a:solidFill>
-                      <a:prstDash val="solid"/>
-                      <a:round/>
-                      <a:headEnd type="none" w="med" len="med"/>
-                      <a:tailEnd type="none" w="med" len="med"/>
-                    </a:lnL>
-                    <a:lnR w="9525" cap="flat" cmpd="sng" algn="ctr">
-                      <a:solidFill>
-                        <a:srgbClr val="C9CED6"/>
-                      </a:solidFill>
-                      <a:prstDash val="solid"/>
-                      <a:round/>
-                      <a:headEnd type="none" w="med" len="med"/>
-                      <a:tailEnd type="none" w="med" len="med"/>
-                    </a:lnR>
-                    <a:lnT w="9525" cap="flat" cmpd="sng" algn="ctr">
-                      <a:solidFill>
-                        <a:srgbClr val="C9CED6"/>
-                      </a:solidFill>
-                      <a:prstDash val="solid"/>
-                      <a:round/>
-                      <a:headEnd type="none" w="med" len="med"/>
-                      <a:tailEnd type="none" w="med" len="med"/>
-                    </a:lnT>
-                    <a:lnB w="9525" cap="flat" cmpd="sng" algn="ctr">
-                      <a:solidFill>
-                        <a:srgbClr val="C9CED6"/>
-                      </a:solidFill>
-                      <a:prstDash val="solid"/>
-                      <a:round/>
-                      <a:headEnd type="none" w="med" len="med"/>
-                      <a:tailEnd type="none" w="med" len="med"/>
-                    </a:lnB>
-                  </a:tcPr>
-                </a:tc>
-                <a:tc>
-                  <a:txBody>
-                    <a:bodyPr/>
-                    <a:lstStyle/>
-                    <a:p>
-                      <a:pPr algn="ctr" indent="0" marL="0">
-                        <a:buNone/>
-                      </a:pPr>
-                      <a:r>
-                        <a:rPr lang="en-US" sz="1100" dirty="0">
-                          <a:solidFill>
-                            <a:srgbClr val="222222"/>
-                          </a:solidFill>
-                          <a:latin typeface="맑은 고딕" pitchFamily="34" charset="0"/>
-                          <a:ea typeface="맑은 고딕" pitchFamily="34" charset="-122"/>
-                          <a:cs typeface="맑은 고딕" pitchFamily="34" charset="-120"/>
-                        </a:rPr>
-                        <a:t>5</a:t>
-                      </a:r>
-                      <a:endParaRPr lang="en-US" sz="1100" dirty="0">
-                        <a:latin typeface="맑은 고딕" charset="0"/>
-                        <a:ea typeface="맑은 고딕" charset="0"/>
-                        <a:cs typeface="맑은 고딕" charset="0"/>
-                      </a:endParaRPr>
-                    </a:p>
-                  </a:txBody>
-                  <a:tcPr marL="54864" marR="54864" marT="27432" marB="27432" anchor="ctr">
-                    <a:lnL w="9525" cap="flat" cmpd="sng" algn="ctr">
-                      <a:solidFill>
-                        <a:srgbClr val="C9CED6"/>
-                      </a:solidFill>
-                      <a:prstDash val="solid"/>
-                      <a:round/>
-                      <a:headEnd type="none" w="med" len="med"/>
-                      <a:tailEnd type="none" w="med" len="med"/>
-                    </a:lnL>
-                    <a:lnR w="9525" cap="flat" cmpd="sng" algn="ctr">
-                      <a:solidFill>
-                        <a:srgbClr val="C9CED6"/>
-                      </a:solidFill>
-                      <a:prstDash val="solid"/>
-                      <a:round/>
-                      <a:headEnd type="none" w="med" len="med"/>
-                      <a:tailEnd type="none" w="med" len="med"/>
-                    </a:lnR>
-                    <a:lnT w="9525" cap="flat" cmpd="sng" algn="ctr">
-                      <a:solidFill>
-                        <a:srgbClr val="C9CED6"/>
-                      </a:solidFill>
-                      <a:prstDash val="solid"/>
-                      <a:round/>
-                      <a:headEnd type="none" w="med" len="med"/>
-                      <a:tailEnd type="none" w="med" len="med"/>
-                    </a:lnT>
-                    <a:lnB w="9525" cap="flat" cmpd="sng" algn="ctr">
-                      <a:solidFill>
-                        <a:srgbClr val="C9CED6"/>
-                      </a:solidFill>
-                      <a:prstDash val="solid"/>
-                      <a:round/>
-                      <a:headEnd type="none" w="med" len="med"/>
-                      <a:tailEnd type="none" w="med" len="med"/>
-                    </a:lnB>
-                  </a:tcPr>
-                </a:tc>
-                <a:tc>
-                  <a:txBody>
-                    <a:bodyPr/>
-                    <a:lstStyle/>
-                    <a:p>
-                      <a:pPr algn="ctr" indent="0" marL="0">
-                        <a:buNone/>
-                      </a:pPr>
-                      <a:r>
-                        <a:rPr lang="en-US" sz="1100" dirty="0">
-                          <a:solidFill>
-                            <a:srgbClr val="222222"/>
-                          </a:solidFill>
-                          <a:latin typeface="맑은 고딕" pitchFamily="34" charset="0"/>
-                          <a:ea typeface="맑은 고딕" pitchFamily="34" charset="-122"/>
-                          <a:cs typeface="맑은 고딕" pitchFamily="34" charset="-120"/>
-                        </a:rPr>
-                        <a:t>O</a:t>
-                      </a:r>
-                      <a:endParaRPr lang="en-US" sz="1100" dirty="0">
-                        <a:latin typeface="맑은 고딕" charset="0"/>
-                        <a:ea typeface="맑은 고딕" charset="0"/>
-                        <a:cs typeface="맑은 고딕" charset="0"/>
-                      </a:endParaRPr>
-                    </a:p>
-                  </a:txBody>
-                  <a:tcPr marL="54864" marR="54864" marT="27432" marB="27432" anchor="ctr">
-                    <a:lnL w="9525" cap="flat" cmpd="sng" algn="ctr">
-                      <a:solidFill>
-                        <a:srgbClr val="C9CED6"/>
-                      </a:solidFill>
-                      <a:prstDash val="solid"/>
-                      <a:round/>
-                      <a:headEnd type="none" w="med" len="med"/>
-                      <a:tailEnd type="none" w="med" len="med"/>
-                    </a:lnL>
-                    <a:lnR w="9525" cap="flat" cmpd="sng" algn="ctr">
-                      <a:solidFill>
-                        <a:srgbClr val="C9CED6"/>
-                      </a:solidFill>
-                      <a:prstDash val="solid"/>
-                      <a:round/>
-                      <a:headEnd type="none" w="med" len="med"/>
-                      <a:tailEnd type="none" w="med" len="med"/>
-                    </a:lnR>
-                    <a:lnT w="9525" cap="flat" cmpd="sng" algn="ctr">
-                      <a:solidFill>
-                        <a:srgbClr val="C9CED6"/>
-                      </a:solidFill>
-                      <a:prstDash val="solid"/>
-                      <a:round/>
-                      <a:headEnd type="none" w="med" len="med"/>
-                      <a:tailEnd type="none" w="med" len="med"/>
-                    </a:lnT>
-                    <a:lnB w="9525" cap="flat" cmpd="sng" algn="ctr">
-                      <a:solidFill>
-                        <a:srgbClr val="C9CED6"/>
-                      </a:solidFill>
-                      <a:prstDash val="solid"/>
-                      <a:round/>
-                      <a:headEnd type="none" w="med" len="med"/>
-                      <a:tailEnd type="none" w="med" len="med"/>
-                    </a:lnB>
-                  </a:tcPr>
-                </a:tc>
-              </a:tr>
-              <a:tr h="329184">
-                <a:tc>
-                  <a:txBody>
-                    <a:bodyPr/>
-                    <a:lstStyle/>
-                    <a:p>
-                      <a:pPr algn="ctr" indent="0" marL="0">
-                        <a:buNone/>
-                      </a:pPr>
-                      <a:r>
-                        <a:rPr lang="en-US" sz="1100" dirty="0">
-                          <a:solidFill>
-                            <a:srgbClr val="222222"/>
-                          </a:solidFill>
-                          <a:latin typeface="맑은 고딕" pitchFamily="34" charset="0"/>
-                          <a:ea typeface="맑은 고딕" pitchFamily="34" charset="-122"/>
-                          <a:cs typeface="맑은 고딕" pitchFamily="34" charset="-120"/>
-                        </a:rPr>
-                        <a:t>5개용(45cm)</a:t>
-                      </a:r>
-                      <a:endParaRPr lang="en-US" sz="1100" dirty="0">
-                        <a:latin typeface="맑은 고딕" charset="0"/>
-                        <a:ea typeface="맑은 고딕" charset="0"/>
-                        <a:cs typeface="맑은 고딕" charset="0"/>
-                      </a:endParaRPr>
-                    </a:p>
-                  </a:txBody>
-                  <a:tcPr marL="54864" marR="54864" marT="27432" marB="27432" anchor="ctr">
-                    <a:lnL w="9525" cap="flat" cmpd="sng" algn="ctr">
-                      <a:solidFill>
-                        <a:srgbClr val="C9CED6"/>
-                      </a:solidFill>
-                      <a:prstDash val="solid"/>
-                      <a:round/>
-                      <a:headEnd type="none" w="med" len="med"/>
-                      <a:tailEnd type="none" w="med" len="med"/>
-                    </a:lnL>
-                    <a:lnR w="9525" cap="flat" cmpd="sng" algn="ctr">
-                      <a:solidFill>
-                        <a:srgbClr val="C9CED6"/>
-                      </a:solidFill>
-                      <a:prstDash val="solid"/>
-                      <a:round/>
-                      <a:headEnd type="none" w="med" len="med"/>
-                      <a:tailEnd type="none" w="med" len="med"/>
-                    </a:lnR>
-                    <a:lnT w="9525" cap="flat" cmpd="sng" algn="ctr">
-                      <a:solidFill>
-                        <a:srgbClr val="C9CED6"/>
-                      </a:solidFill>
-                      <a:prstDash val="solid"/>
-                      <a:round/>
-                      <a:headEnd type="none" w="med" len="med"/>
-                      <a:tailEnd type="none" w="med" len="med"/>
-                    </a:lnT>
-                    <a:lnB w="9525" cap="flat" cmpd="sng" algn="ctr">
-                      <a:solidFill>
-                        <a:srgbClr val="C9CED6"/>
-                      </a:solidFill>
-                      <a:prstDash val="solid"/>
-                      <a:round/>
-                      <a:headEnd type="none" w="med" len="med"/>
-                      <a:tailEnd type="none" w="med" len="med"/>
-                    </a:lnB>
-                  </a:tcPr>
-                </a:tc>
-                <a:tc>
-                  <a:txBody>
-                    <a:bodyPr/>
-                    <a:lstStyle/>
-                    <a:p>
-                      <a:pPr algn="ctr" indent="0" marL="0">
-                        <a:buNone/>
-                      </a:pPr>
-                      <a:r>
-                        <a:rPr lang="en-US" sz="1100" dirty="0">
-                          <a:solidFill>
-                            <a:srgbClr val="222222"/>
-                          </a:solidFill>
-                          <a:latin typeface="맑은 고딕" pitchFamily="34" charset="0"/>
-                          <a:ea typeface="맑은 고딕" pitchFamily="34" charset="-122"/>
-                          <a:cs typeface="맑은 고딕" pitchFamily="34" charset="-120"/>
-                        </a:rPr>
-                        <a:t>85 × 35 × 56</a:t>
-                      </a:r>
-                      <a:endParaRPr lang="en-US" sz="1100" dirty="0">
-                        <a:latin typeface="맑은 고딕" charset="0"/>
-                        <a:ea typeface="맑은 고딕" charset="0"/>
-                        <a:cs typeface="맑은 고딕" charset="0"/>
-                      </a:endParaRPr>
-                    </a:p>
-                  </a:txBody>
-                  <a:tcPr marL="54864" marR="54864" marT="27432" marB="27432" anchor="ctr">
-                    <a:lnL w="9525" cap="flat" cmpd="sng" algn="ctr">
-                      <a:solidFill>
-                        <a:srgbClr val="C9CED6"/>
-                      </a:solidFill>
-                      <a:prstDash val="solid"/>
-                      <a:round/>
-                      <a:headEnd type="none" w="med" len="med"/>
-                      <a:tailEnd type="none" w="med" len="med"/>
-                    </a:lnL>
-                    <a:lnR w="9525" cap="flat" cmpd="sng" algn="ctr">
-                      <a:solidFill>
-                        <a:srgbClr val="C9CED6"/>
-                      </a:solidFill>
-                      <a:prstDash val="solid"/>
-                      <a:round/>
-                      <a:headEnd type="none" w="med" len="med"/>
-                      <a:tailEnd type="none" w="med" len="med"/>
-                    </a:lnR>
-                    <a:lnT w="9525" cap="flat" cmpd="sng" algn="ctr">
-                      <a:solidFill>
-                        <a:srgbClr val="C9CED6"/>
-                      </a:solidFill>
-                      <a:prstDash val="solid"/>
-                      <a:round/>
-                      <a:headEnd type="none" w="med" len="med"/>
-                      <a:tailEnd type="none" w="med" len="med"/>
-                    </a:lnT>
-                    <a:lnB w="9525" cap="flat" cmpd="sng" algn="ctr">
-                      <a:solidFill>
-                        <a:srgbClr val="C9CED6"/>
-                      </a:solidFill>
-                      <a:prstDash val="solid"/>
-                      <a:round/>
-                      <a:headEnd type="none" w="med" len="med"/>
-                      <a:tailEnd type="none" w="med" len="med"/>
-                    </a:lnB>
-                  </a:tcPr>
-                </a:tc>
-                <a:tc>
-                  <a:txBody>
-                    <a:bodyPr/>
-                    <a:lstStyle/>
-                    <a:p>
-                      <a:pPr algn="ctr" indent="0" marL="0">
-                        <a:buNone/>
-                      </a:pPr>
-                      <a:r>
-                        <a:rPr lang="en-US" sz="1100" dirty="0">
-                          <a:solidFill>
-                            <a:srgbClr val="222222"/>
-                          </a:solidFill>
-                          <a:latin typeface="맑은 고딕" pitchFamily="34" charset="0"/>
-                          <a:ea typeface="맑은 고딕" pitchFamily="34" charset="-122"/>
-                          <a:cs typeface="맑은 고딕" pitchFamily="34" charset="-120"/>
-                        </a:rPr>
-                        <a:t>6.5</a:t>
-                      </a:r>
-                      <a:endParaRPr lang="en-US" sz="1100" dirty="0">
-                        <a:latin typeface="맑은 고딕" charset="0"/>
-                        <a:ea typeface="맑은 고딕" charset="0"/>
-                        <a:cs typeface="맑은 고딕" charset="0"/>
-                      </a:endParaRPr>
-                    </a:p>
-                  </a:txBody>
-                  <a:tcPr marL="54864" marR="54864" marT="27432" marB="27432" anchor="ctr">
-                    <a:lnL w="9525" cap="flat" cmpd="sng" algn="ctr">
-                      <a:solidFill>
-                        <a:srgbClr val="C9CED6"/>
-                      </a:solidFill>
-                      <a:prstDash val="solid"/>
-                      <a:round/>
-                      <a:headEnd type="none" w="med" len="med"/>
-                      <a:tailEnd type="none" w="med" len="med"/>
-                    </a:lnL>
-                    <a:lnR w="9525" cap="flat" cmpd="sng" algn="ctr">
-                      <a:solidFill>
-                        <a:srgbClr val="C9CED6"/>
-                      </a:solidFill>
-                      <a:prstDash val="solid"/>
-                      <a:round/>
-                      <a:headEnd type="none" w="med" len="med"/>
-                      <a:tailEnd type="none" w="med" len="med"/>
-                    </a:lnR>
-                    <a:lnT w="9525" cap="flat" cmpd="sng" algn="ctr">
-                      <a:solidFill>
-                        <a:srgbClr val="C9CED6"/>
-                      </a:solidFill>
-                      <a:prstDash val="solid"/>
-                      <a:round/>
-                      <a:headEnd type="none" w="med" len="med"/>
-                      <a:tailEnd type="none" w="med" len="med"/>
-                    </a:lnT>
-                    <a:lnB w="9525" cap="flat" cmpd="sng" algn="ctr">
-                      <a:solidFill>
-                        <a:srgbClr val="C9CED6"/>
-                      </a:solidFill>
-                      <a:prstDash val="solid"/>
-                      <a:round/>
-                      <a:headEnd type="none" w="med" len="med"/>
-                      <a:tailEnd type="none" w="med" len="med"/>
-                    </a:lnB>
-                  </a:tcPr>
-                </a:tc>
-                <a:tc>
-                  <a:txBody>
-                    <a:bodyPr/>
-                    <a:lstStyle/>
-                    <a:p>
-                      <a:pPr algn="ctr" indent="0" marL="0">
-                        <a:buNone/>
-                      </a:pPr>
-                      <a:r>
-                        <a:rPr lang="en-US" sz="1100" dirty="0">
-                          <a:solidFill>
-                            <a:srgbClr val="222222"/>
-                          </a:solidFill>
-                          <a:latin typeface="맑은 고딕" pitchFamily="34" charset="0"/>
-                          <a:ea typeface="맑은 고딕" pitchFamily="34" charset="-122"/>
-                          <a:cs typeface="맑은 고딕" pitchFamily="34" charset="-120"/>
-                        </a:rPr>
-                        <a:t>10</a:t>
-                      </a:r>
-                      <a:endParaRPr lang="en-US" sz="1100" dirty="0">
-                        <a:latin typeface="맑은 고딕" charset="0"/>
-                        <a:ea typeface="맑은 고딕" charset="0"/>
-                        <a:cs typeface="맑은 고딕" charset="0"/>
-                      </a:endParaRPr>
-                    </a:p>
-                  </a:txBody>
-                  <a:tcPr marL="54864" marR="54864" marT="27432" marB="27432" anchor="ctr">
-                    <a:lnL w="9525" cap="flat" cmpd="sng" algn="ctr">
-                      <a:solidFill>
-                        <a:srgbClr val="C9CED6"/>
-                      </a:solidFill>
-                      <a:prstDash val="solid"/>
-                      <a:round/>
-                      <a:headEnd type="none" w="med" len="med"/>
-                      <a:tailEnd type="none" w="med" len="med"/>
-                    </a:lnL>
-                    <a:lnR w="9525" cap="flat" cmpd="sng" algn="ctr">
-                      <a:solidFill>
-                        <a:srgbClr val="C9CED6"/>
-                      </a:solidFill>
-                      <a:prstDash val="solid"/>
-                      <a:round/>
-                      <a:headEnd type="none" w="med" len="med"/>
-                      <a:tailEnd type="none" w="med" len="med"/>
-                    </a:lnR>
-                    <a:lnT w="9525" cap="flat" cmpd="sng" algn="ctr">
-                      <a:solidFill>
-                        <a:srgbClr val="C9CED6"/>
-                      </a:solidFill>
-                      <a:prstDash val="solid"/>
-                      <a:round/>
-                      <a:headEnd type="none" w="med" len="med"/>
-                      <a:tailEnd type="none" w="med" len="med"/>
-                    </a:lnT>
-                    <a:lnB w="9525" cap="flat" cmpd="sng" algn="ctr">
-                      <a:solidFill>
-                        <a:srgbClr val="C9CED6"/>
-                      </a:solidFill>
-                      <a:prstDash val="solid"/>
-                      <a:round/>
-                      <a:headEnd type="none" w="med" len="med"/>
-                      <a:tailEnd type="none" w="med" len="med"/>
-                    </a:lnB>
-                  </a:tcPr>
-                </a:tc>
-                <a:tc>
-                  <a:txBody>
-                    <a:bodyPr/>
-                    <a:lstStyle/>
-                    <a:p>
-                      <a:pPr algn="ctr" indent="0" marL="0">
-                        <a:buNone/>
-                      </a:pPr>
-                      <a:r>
-                        <a:rPr lang="en-US" sz="1100" dirty="0">
-                          <a:solidFill>
-                            <a:srgbClr val="222222"/>
-                          </a:solidFill>
-                          <a:latin typeface="맑은 고딕" pitchFamily="34" charset="0"/>
-                          <a:ea typeface="맑은 고딕" pitchFamily="34" charset="-122"/>
-                          <a:cs typeface="맑은 고딕" pitchFamily="34" charset="-120"/>
-                        </a:rPr>
-                        <a:t>5</a:t>
-                      </a:r>
-                      <a:endParaRPr lang="en-US" sz="1100" dirty="0">
-                        <a:latin typeface="맑은 고딕" charset="0"/>
-                        <a:ea typeface="맑은 고딕" charset="0"/>
-                        <a:cs typeface="맑은 고딕" charset="0"/>
-                      </a:endParaRPr>
-                    </a:p>
-                  </a:txBody>
-                  <a:tcPr marL="54864" marR="54864" marT="27432" marB="27432" anchor="ctr">
-                    <a:lnL w="9525" cap="flat" cmpd="sng" algn="ctr">
-                      <a:solidFill>
-                        <a:srgbClr val="C9CED6"/>
-                      </a:solidFill>
-                      <a:prstDash val="solid"/>
-                      <a:round/>
-                      <a:headEnd type="none" w="med" len="med"/>
-                      <a:tailEnd type="none" w="med" len="med"/>
-                    </a:lnL>
-                    <a:lnR w="9525" cap="flat" cmpd="sng" algn="ctr">
-                      <a:solidFill>
-                        <a:srgbClr val="C9CED6"/>
-                      </a:solidFill>
-                      <a:prstDash val="solid"/>
-                      <a:round/>
-                      <a:headEnd type="none" w="med" len="med"/>
-                      <a:tailEnd type="none" w="med" len="med"/>
-                    </a:lnR>
-                    <a:lnT w="9525" cap="flat" cmpd="sng" algn="ctr">
-                      <a:solidFill>
-                        <a:srgbClr val="C9CED6"/>
-                      </a:solidFill>
-                      <a:prstDash val="solid"/>
-                      <a:round/>
-                      <a:headEnd type="none" w="med" len="med"/>
-                      <a:tailEnd type="none" w="med" len="med"/>
-                    </a:lnT>
-                    <a:lnB w="9525" cap="flat" cmpd="sng" algn="ctr">
-                      <a:solidFill>
-                        <a:srgbClr val="C9CED6"/>
-                      </a:solidFill>
-                      <a:prstDash val="solid"/>
-                      <a:round/>
-                      <a:headEnd type="none" w="med" len="med"/>
-                      <a:tailEnd type="none" w="med" len="med"/>
-                    </a:lnB>
-                  </a:tcPr>
-                </a:tc>
-                <a:tc>
-                  <a:txBody>
-                    <a:bodyPr/>
-                    <a:lstStyle/>
-                    <a:p>
-                      <a:pPr algn="ctr" indent="0" marL="0">
-                        <a:buNone/>
-                      </a:pPr>
-                      <a:r>
-                        <a:rPr lang="en-US" sz="1100" dirty="0">
-                          <a:solidFill>
-                            <a:srgbClr val="222222"/>
-                          </a:solidFill>
-                          <a:latin typeface="맑은 고딕" pitchFamily="34" charset="0"/>
-                          <a:ea typeface="맑은 고딕" pitchFamily="34" charset="-122"/>
-                          <a:cs typeface="맑은 고딕" pitchFamily="34" charset="-120"/>
-                        </a:rPr>
-                        <a:t>O</a:t>
-                      </a:r>
-                      <a:endParaRPr lang="en-US" sz="1100" dirty="0">
-                        <a:latin typeface="맑은 고딕" charset="0"/>
-                        <a:ea typeface="맑은 고딕" charset="0"/>
-                        <a:cs typeface="맑은 고딕" charset="0"/>
-                      </a:endParaRPr>
-                    </a:p>
-                  </a:txBody>
-                  <a:tcPr marL="54864" marR="54864" marT="27432" marB="27432" anchor="ctr">
-                    <a:lnL w="9525" cap="flat" cmpd="sng" algn="ctr">
-                      <a:solidFill>
-                        <a:srgbClr val="C9CED6"/>
-                      </a:solidFill>
-                      <a:prstDash val="solid"/>
-                      <a:round/>
-                      <a:headEnd type="none" w="med" len="med"/>
-                      <a:tailEnd type="none" w="med" len="med"/>
-                    </a:lnL>
-                    <a:lnR w="9525" cap="flat" cmpd="sng" algn="ctr">
-                      <a:solidFill>
-                        <a:srgbClr val="C9CED6"/>
-                      </a:solidFill>
-                      <a:prstDash val="solid"/>
-                      <a:round/>
-                      <a:headEnd type="none" w="med" len="med"/>
-                      <a:tailEnd type="none" w="med" len="med"/>
-                    </a:lnR>
-                    <a:lnT w="9525" cap="flat" cmpd="sng" algn="ctr">
-                      <a:solidFill>
-                        <a:srgbClr val="C9CED6"/>
-                      </a:solidFill>
-                      <a:prstDash val="solid"/>
-                      <a:round/>
-                      <a:headEnd type="none" w="med" len="med"/>
-                      <a:tailEnd type="none" w="med" len="med"/>
-                    </a:lnT>
-                    <a:lnB w="9525" cap="flat" cmpd="sng" algn="ctr">
-                      <a:solidFill>
-                        <a:srgbClr val="C9CED6"/>
-                      </a:solidFill>
-                      <a:prstDash val="solid"/>
-                      <a:round/>
-                      <a:headEnd type="none" w="med" len="med"/>
-                      <a:tailEnd type="none" w="med" len="med"/>
-                    </a:lnB>
-                  </a:tcPr>
-                </a:tc>
-              </a:tr>
-              <a:tr h="329184">
-                <a:tc>
-                  <a:txBody>
-                    <a:bodyPr/>
-                    <a:lstStyle/>
-                    <a:p>
-                      <a:pPr algn="ctr" indent="0" marL="0">
-                        <a:buNone/>
-                      </a:pPr>
-                      <a:r>
-                        <a:rPr lang="en-US" sz="1100" dirty="0">
-                          <a:solidFill>
-                            <a:srgbClr val="222222"/>
-                          </a:solidFill>
-                          <a:latin typeface="맑은 고딕" pitchFamily="34" charset="0"/>
-                          <a:ea typeface="맑은 고딕" pitchFamily="34" charset="-122"/>
-                          <a:cs typeface="맑은 고딕" pitchFamily="34" charset="-120"/>
-                        </a:rPr>
-                        <a:t>2개용(38cm)</a:t>
-                      </a:r>
-                      <a:endParaRPr lang="en-US" sz="1100" dirty="0">
-                        <a:latin typeface="맑은 고딕" charset="0"/>
-                        <a:ea typeface="맑은 고딕" charset="0"/>
-                        <a:cs typeface="맑은 고딕" charset="0"/>
-                      </a:endParaRPr>
-                    </a:p>
-                  </a:txBody>
-                  <a:tcPr marL="54864" marR="54864" marT="27432" marB="27432" anchor="ctr">
-                    <a:lnL w="9525" cap="flat" cmpd="sng" algn="ctr">
-                      <a:solidFill>
-                        <a:srgbClr val="C9CED6"/>
-                      </a:solidFill>
-                      <a:prstDash val="solid"/>
-                      <a:round/>
-                      <a:headEnd type="none" w="med" len="med"/>
-                      <a:tailEnd type="none" w="med" len="med"/>
-                    </a:lnL>
-                    <a:lnR w="9525" cap="flat" cmpd="sng" algn="ctr">
-                      <a:solidFill>
-                        <a:srgbClr val="C9CED6"/>
-                      </a:solidFill>
-                      <a:prstDash val="solid"/>
-                      <a:round/>
-                      <a:headEnd type="none" w="med" len="med"/>
-                      <a:tailEnd type="none" w="med" len="med"/>
-                    </a:lnR>
-                    <a:lnT w="9525" cap="flat" cmpd="sng" algn="ctr">
-                      <a:solidFill>
-                        <a:srgbClr val="C9CED6"/>
-                      </a:solidFill>
-                      <a:prstDash val="solid"/>
-                      <a:round/>
-                      <a:headEnd type="none" w="med" len="med"/>
-                      <a:tailEnd type="none" w="med" len="med"/>
-                    </a:lnT>
-                    <a:lnB w="9525" cap="flat" cmpd="sng" algn="ctr">
-                      <a:solidFill>
-                        <a:srgbClr val="C9CED6"/>
-                      </a:solidFill>
-                      <a:prstDash val="solid"/>
-                      <a:round/>
-                      <a:headEnd type="none" w="med" len="med"/>
-                      <a:tailEnd type="none" w="med" len="med"/>
-                    </a:lnB>
-                  </a:tcPr>
-                </a:tc>
-                <a:tc>
-                  <a:txBody>
-                    <a:bodyPr/>
-                    <a:lstStyle/>
-                    <a:p>
-                      <a:pPr algn="ctr" indent="0" marL="0">
-                        <a:buNone/>
-                      </a:pPr>
-                      <a:r>
-                        <a:rPr lang="en-US" sz="1100" dirty="0">
-                          <a:solidFill>
-                            <a:srgbClr val="222222"/>
-                          </a:solidFill>
-                          <a:latin typeface="맑은 고딕" pitchFamily="34" charset="0"/>
-                          <a:ea typeface="맑은 고딕" pitchFamily="34" charset="-122"/>
-                          <a:cs typeface="맑은 고딕" pitchFamily="34" charset="-120"/>
-                        </a:rPr>
-                        <a:t>77 × 35 × 22</a:t>
-                      </a:r>
-                      <a:endParaRPr lang="en-US" sz="1100" dirty="0">
-                        <a:latin typeface="맑은 고딕" charset="0"/>
-                        <a:ea typeface="맑은 고딕" charset="0"/>
-                        <a:cs typeface="맑은 고딕" charset="0"/>
-                      </a:endParaRPr>
-                    </a:p>
-                  </a:txBody>
-                  <a:tcPr marL="54864" marR="54864" marT="27432" marB="27432" anchor="ctr">
-                    <a:lnL w="9525" cap="flat" cmpd="sng" algn="ctr">
-                      <a:solidFill>
-                        <a:srgbClr val="C9CED6"/>
-                      </a:solidFill>
-                      <a:prstDash val="solid"/>
-                      <a:round/>
-                      <a:headEnd type="none" w="med" len="med"/>
-                      <a:tailEnd type="none" w="med" len="med"/>
-                    </a:lnL>
-                    <a:lnR w="9525" cap="flat" cmpd="sng" algn="ctr">
-                      <a:solidFill>
-                        <a:srgbClr val="C9CED6"/>
-                      </a:solidFill>
-                      <a:prstDash val="solid"/>
-                      <a:round/>
-                      <a:headEnd type="none" w="med" len="med"/>
-                      <a:tailEnd type="none" w="med" len="med"/>
-                    </a:lnR>
-                    <a:lnT w="9525" cap="flat" cmpd="sng" algn="ctr">
-                      <a:solidFill>
-                        <a:srgbClr val="C9CED6"/>
-                      </a:solidFill>
-                      <a:prstDash val="solid"/>
-                      <a:round/>
-                      <a:headEnd type="none" w="med" len="med"/>
-                      <a:tailEnd type="none" w="med" len="med"/>
-                    </a:lnT>
-                    <a:lnB w="9525" cap="flat" cmpd="sng" algn="ctr">
-                      <a:solidFill>
-                        <a:srgbClr val="C9CED6"/>
-                      </a:solidFill>
-                      <a:prstDash val="solid"/>
-                      <a:round/>
-                      <a:headEnd type="none" w="med" len="med"/>
-                      <a:tailEnd type="none" w="med" len="med"/>
-                    </a:lnB>
-                  </a:tcPr>
-                </a:tc>
-                <a:tc>
-                  <a:txBody>
-                    <a:bodyPr/>
-                    <a:lstStyle/>
-                    <a:p>
-                      <a:pPr algn="ctr" indent="0" marL="0">
-                        <a:buNone/>
-                      </a:pPr>
-                      <a:endParaRPr lang="en-US" sz="1100" dirty="0">
-                        <a:latin typeface="맑은 고딕" charset="0"/>
-                        <a:ea typeface="맑은 고딕" charset="0"/>
-                        <a:cs typeface="맑은 고딕" charset="0"/>
-                      </a:endParaRPr>
-                    </a:p>
-                  </a:txBody>
-                  <a:tcPr marL="54864" marR="54864" marT="27432" marB="27432" anchor="ctr">
-                    <a:lnL w="9525" cap="flat" cmpd="sng" algn="ctr">
-                      <a:solidFill>
-                        <a:srgbClr val="C9CED6"/>
-                      </a:solidFill>
-                      <a:prstDash val="solid"/>
-                      <a:round/>
-                      <a:headEnd type="none" w="med" len="med"/>
-                      <a:tailEnd type="none" w="med" len="med"/>
-                    </a:lnL>
-                    <a:lnR w="9525" cap="flat" cmpd="sng" algn="ctr">
-                      <a:solidFill>
-                        <a:srgbClr val="C9CED6"/>
-                      </a:solidFill>
-                      <a:prstDash val="solid"/>
-                      <a:round/>
-                      <a:headEnd type="none" w="med" len="med"/>
-                      <a:tailEnd type="none" w="med" len="med"/>
-                    </a:lnR>
-                    <a:lnT w="9525" cap="flat" cmpd="sng" algn="ctr">
-                      <a:solidFill>
-                        <a:srgbClr val="C9CED6"/>
-                      </a:solidFill>
-                      <a:prstDash val="solid"/>
-                      <a:round/>
-                      <a:headEnd type="none" w="med" len="med"/>
-                      <a:tailEnd type="none" w="med" len="med"/>
-                    </a:lnT>
-                    <a:lnB w="9525" cap="flat" cmpd="sng" algn="ctr">
-                      <a:solidFill>
-                        <a:srgbClr val="C9CED6"/>
-                      </a:solidFill>
-                      <a:prstDash val="solid"/>
-                      <a:round/>
-                      <a:headEnd type="none" w="med" len="med"/>
-                      <a:tailEnd type="none" w="med" len="med"/>
-                    </a:lnB>
-                  </a:tcPr>
-                </a:tc>
-                <a:tc>
-                  <a:txBody>
-                    <a:bodyPr/>
-                    <a:lstStyle/>
-                    <a:p>
-                      <a:pPr algn="ctr" indent="0" marL="0">
-                        <a:buNone/>
-                      </a:pPr>
-                      <a:endParaRPr lang="en-US" sz="1100" dirty="0">
-                        <a:latin typeface="맑은 고딕" charset="0"/>
-                        <a:ea typeface="맑은 고딕" charset="0"/>
-                        <a:cs typeface="맑은 고딕" charset="0"/>
-                      </a:endParaRPr>
-                    </a:p>
-                  </a:txBody>
-                  <a:tcPr marL="54864" marR="54864" marT="27432" marB="27432" anchor="ctr">
-                    <a:lnL w="9525" cap="flat" cmpd="sng" algn="ctr">
-                      <a:solidFill>
-                        <a:srgbClr val="C9CED6"/>
-                      </a:solidFill>
-                      <a:prstDash val="solid"/>
-                      <a:round/>
-                      <a:headEnd type="none" w="med" len="med"/>
-                      <a:tailEnd type="none" w="med" len="med"/>
-                    </a:lnL>
-                    <a:lnR w="9525" cap="flat" cmpd="sng" algn="ctr">
-                      <a:solidFill>
-                        <a:srgbClr val="C9CED6"/>
-                      </a:solidFill>
-                      <a:prstDash val="solid"/>
-                      <a:round/>
-                      <a:headEnd type="none" w="med" len="med"/>
-                      <a:tailEnd type="none" w="med" len="med"/>
-                    </a:lnR>
-                    <a:lnT w="9525" cap="flat" cmpd="sng" algn="ctr">
-                      <a:solidFill>
-                        <a:srgbClr val="C9CED6"/>
-                      </a:solidFill>
-                      <a:prstDash val="solid"/>
-                      <a:round/>
-                      <a:headEnd type="none" w="med" len="med"/>
-                      <a:tailEnd type="none" w="med" len="med"/>
-                    </a:lnT>
-                    <a:lnB w="9525" cap="flat" cmpd="sng" algn="ctr">
-                      <a:solidFill>
-                        <a:srgbClr val="C9CED6"/>
-                      </a:solidFill>
-                      <a:prstDash val="solid"/>
-                      <a:round/>
-                      <a:headEnd type="none" w="med" len="med"/>
-                      <a:tailEnd type="none" w="med" len="med"/>
-                    </a:lnB>
-                  </a:tcPr>
-                </a:tc>
-                <a:tc>
-                  <a:txBody>
-                    <a:bodyPr/>
-                    <a:lstStyle/>
-                    <a:p>
-                      <a:pPr algn="ctr" indent="0" marL="0">
-                        <a:buNone/>
-                      </a:pPr>
-                      <a:r>
-                        <a:rPr lang="en-US" sz="1100" dirty="0">
-                          <a:solidFill>
-                            <a:srgbClr val="222222"/>
-                          </a:solidFill>
-                          <a:latin typeface="맑은 고딕" pitchFamily="34" charset="0"/>
-                          <a:ea typeface="맑은 고딕" pitchFamily="34" charset="-122"/>
-                          <a:cs typeface="맑은 고딕" pitchFamily="34" charset="-120"/>
-                        </a:rPr>
-                        <a:t>2</a:t>
-                      </a:r>
-                      <a:endParaRPr lang="en-US" sz="1100" dirty="0">
-                        <a:latin typeface="맑은 고딕" charset="0"/>
-                        <a:ea typeface="맑은 고딕" charset="0"/>
-                        <a:cs typeface="맑은 고딕" charset="0"/>
-                      </a:endParaRPr>
-                    </a:p>
-                  </a:txBody>
-                  <a:tcPr marL="54864" marR="54864" marT="27432" marB="27432" anchor="ctr">
-                    <a:lnL w="9525" cap="flat" cmpd="sng" algn="ctr">
-                      <a:solidFill>
-                        <a:srgbClr val="C9CED6"/>
-                      </a:solidFill>
-                      <a:prstDash val="solid"/>
-                      <a:round/>
-                      <a:headEnd type="none" w="med" len="med"/>
-                      <a:tailEnd type="none" w="med" len="med"/>
-                    </a:lnL>
-                    <a:lnR w="9525" cap="flat" cmpd="sng" algn="ctr">
-                      <a:solidFill>
-                        <a:srgbClr val="C9CED6"/>
-                      </a:solidFill>
-                      <a:prstDash val="solid"/>
-                      <a:round/>
-                      <a:headEnd type="none" w="med" len="med"/>
-                      <a:tailEnd type="none" w="med" len="med"/>
-                    </a:lnR>
-                    <a:lnT w="9525" cap="flat" cmpd="sng" algn="ctr">
-                      <a:solidFill>
-                        <a:srgbClr val="C9CED6"/>
-                      </a:solidFill>
-                      <a:prstDash val="solid"/>
-                      <a:round/>
-                      <a:headEnd type="none" w="med" len="med"/>
-                      <a:tailEnd type="none" w="med" len="med"/>
-                    </a:lnT>
-                    <a:lnB w="9525" cap="flat" cmpd="sng" algn="ctr">
-                      <a:solidFill>
-                        <a:srgbClr val="C9CED6"/>
-                      </a:solidFill>
-                      <a:prstDash val="solid"/>
-                      <a:round/>
-                      <a:headEnd type="none" w="med" len="med"/>
-                      <a:tailEnd type="none" w="med" len="med"/>
-                    </a:lnB>
-                  </a:tcPr>
-                </a:tc>
-                <a:tc>
-                  <a:txBody>
-                    <a:bodyPr/>
-                    <a:lstStyle/>
-                    <a:p>
-                      <a:pPr algn="ctr" indent="0" marL="0">
-                        <a:buNone/>
-                      </a:pPr>
-                      <a:r>
-                        <a:rPr lang="en-US" sz="1100" dirty="0">
-                          <a:solidFill>
-                            <a:srgbClr val="C0392B"/>
-                          </a:solidFill>
-                          <a:latin typeface="맑은 고딕" pitchFamily="34" charset="0"/>
-                          <a:ea typeface="맑은 고딕" pitchFamily="34" charset="-122"/>
-                          <a:cs typeface="맑은 고딕" pitchFamily="34" charset="-120"/>
-                        </a:rPr>
-                        <a:t>X</a:t>
-                      </a:r>
-                      <a:endParaRPr lang="en-US" sz="1100" dirty="0">
-                        <a:latin typeface="맑은 고딕" charset="0"/>
-                        <a:ea typeface="맑은 고딕" charset="0"/>
-                        <a:cs typeface="맑은 고딕" charset="0"/>
-                      </a:endParaRPr>
-                    </a:p>
-                  </a:txBody>
-                  <a:tcPr marL="54864" marR="54864" marT="27432" marB="27432" anchor="ctr">
-                    <a:lnL w="9525" cap="flat" cmpd="sng" algn="ctr">
-                      <a:solidFill>
-                        <a:srgbClr val="C9CED6"/>
-                      </a:solidFill>
-                      <a:prstDash val="solid"/>
-                      <a:round/>
-                      <a:headEnd type="none" w="med" len="med"/>
-                      <a:tailEnd type="none" w="med" len="med"/>
-                    </a:lnL>
-                    <a:lnR w="9525" cap="flat" cmpd="sng" algn="ctr">
-                      <a:solidFill>
-                        <a:srgbClr val="C9CED6"/>
-                      </a:solidFill>
-                      <a:prstDash val="solid"/>
-                      <a:round/>
-                      <a:headEnd type="none" w="med" len="med"/>
-                      <a:tailEnd type="none" w="med" len="med"/>
-                    </a:lnR>
-                    <a:lnT w="9525" cap="flat" cmpd="sng" algn="ctr">
-                      <a:solidFill>
-                        <a:srgbClr val="C9CED6"/>
-                      </a:solidFill>
-                      <a:prstDash val="solid"/>
-                      <a:round/>
-                      <a:headEnd type="none" w="med" len="med"/>
-                      <a:tailEnd type="none" w="med" len="med"/>
-                    </a:lnT>
-                    <a:lnB w="9525" cap="flat" cmpd="sng" algn="ctr">
-                      <a:solidFill>
-                        <a:srgbClr val="C9CED6"/>
-                      </a:solidFill>
-                      <a:prstDash val="solid"/>
-                      <a:round/>
-                      <a:headEnd type="none" w="med" len="med"/>
-                      <a:tailEnd type="none" w="med" len="med"/>
-                    </a:lnB>
-                  </a:tcPr>
-                </a:tc>
-              </a:tr>
-            </a:tbl>
-          </a:graphicData>
-        </a:graphic>
-      </p:graphicFrame>
-      <p:sp>
-        <p:nvSpPr>
-          <p:cNvPr id="11" name="Text 6"/>
-          <p:cNvSpPr/>
-          <p:nvPr/>
-        </p:nvSpPr>
-        <p:spPr>
-          <a:xfrm>
-            <a:off x="5120640" y="4114800"/>
-            <a:ext cx="6519672" cy="1280160"/>
-          </a:xfrm>
-          <a:prstGeom prst="rect">
-            <a:avLst/>
-          </a:prstGeom>
-          <a:noFill/>
-          <a:ln/>
-        </p:spPr>
-        <p:txBody>
-          <a:bodyPr wrap="square" lIns="0" tIns="0" rIns="0" bIns="0" rtlCol="0" anchor="t"/>
-          <a:lstStyle/>
-          <a:p>
-            <a:pPr marL="342900" indent="-342900">
-              <a:spcAft>
-                <a:spcPts val="600"/>
-              </a:spcAft>
-              <a:buSzPct val="100000"/>
-              <a:buChar char="•"/>
-            </a:pPr>
-            <a:r>
-              <a:rPr lang="en-US" sz="1200" dirty="0">
-                <a:solidFill>
-                  <a:srgbClr val="222222"/>
-                </a:solidFill>
-                <a:latin typeface="맑은 고딕" pitchFamily="34" charset="0"/>
-                <a:ea typeface="맑은 고딕" pitchFamily="34" charset="-122"/>
-                <a:cs typeface="맑은 고딕" pitchFamily="34" charset="-120"/>
-              </a:rPr>
-              <a:t>아우터 박스에 이너 박스를 담고 밴딩·라벨(박스 번호) 작업 후 출고</a:t>
-            </a:r>
-            <a:endParaRPr lang="en-US" sz="1200" dirty="0"/>
-          </a:p>
-          <a:p>
-            <a:pPr marL="342900" indent="-342900">
-              <a:spcAft>
-                <a:spcPts val="600"/>
-              </a:spcAft>
-              <a:buSzPct val="100000"/>
-              <a:buChar char="•"/>
-            </a:pPr>
-            <a:r>
-              <a:rPr lang="en-US" sz="1200" dirty="0">
-                <a:solidFill>
-                  <a:srgbClr val="222222"/>
-                </a:solidFill>
-                <a:latin typeface="맑은 고딕" pitchFamily="34" charset="0"/>
-                <a:ea typeface="맑은 고딕" pitchFamily="34" charset="-122"/>
-                <a:cs typeface="맑은 고딕" pitchFamily="34" charset="-120"/>
-              </a:rPr>
-              <a:t>45cm 5개용은 출고 물량 저조로 포장 자재 미보유</a:t>
-            </a:r>
-            <a:endParaRPr lang="en-US" sz="1200" dirty="0"/>
-          </a:p>
-          <a:p>
-            <a:pPr marL="342900" indent="-342900">
-              <a:spcAft>
-                <a:spcPts val="600"/>
-              </a:spcAft>
-              <a:buSzPct val="100000"/>
-              <a:buChar char="•"/>
-            </a:pPr>
-            <a:r>
-              <a:rPr lang="en-US" sz="1200" dirty="0">
-                <a:solidFill>
-                  <a:srgbClr val="222222"/>
-                </a:solidFill>
-                <a:latin typeface="맑은 고딕" pitchFamily="34" charset="0"/>
-                <a:ea typeface="맑은 고딕" pitchFamily="34" charset="-122"/>
-                <a:cs typeface="맑은 고딕" pitchFamily="34" charset="-120"/>
-              </a:rPr>
-              <a:t>2개용(38cm)은 Transport Validation 미완료 – 비멸균 품목에만 사용</a:t>
-            </a:r>
-            <a:endParaRPr lang="en-US" sz="1200" dirty="0"/>
-          </a:p>
-        </p:txBody>
-      </p:sp>
-    </p:spTree>
-  </p:cSld>
-  <p:clrMapOvr>
-    <a:masterClrMapping/>
-  </p:clrMapOvr>
-</p:sld>
-</file>
-
-<file path=ppt/slides/slide11.xml><?xml version="1.0" encoding="utf-8"?>
-<p:sld xmlns:a="http://schemas.openxmlformats.org/drawingml/2006/main" xmlns:r="http://schemas.openxmlformats.org/officeDocument/2006/relationships" xmlns:p="http://schemas.openxmlformats.org/presentationml/2006/main">
-  <p:cSld name="Slide 11">
-    <p:bg>
-      <p:bgPr>
-        <a:solidFill>
-          <a:srgbClr val="FFFFFF"/>
-        </a:solidFill>
-      </p:bgPr>
-    </p:bg>
-    <p:spTree>
-      <p:nvGrpSpPr>
-        <p:cNvPr id="1" name=""/>
-        <p:cNvGrpSpPr/>
-        <p:nvPr/>
-      </p:nvGrpSpPr>
-      <p:grpSpPr>
-        <a:xfrm>
-          <a:off x="0" y="0"/>
-          <a:ext cx="0" cy="0"/>
-          <a:chOff x="0" y="0"/>
-          <a:chExt cx="0" cy="0"/>
-        </a:xfrm>
-      </p:grpSpPr>
-      <p:sp>
-        <p:nvSpPr>
-          <p:cNvPr id="2" name="Text 0"/>
-          <p:cNvSpPr/>
-          <p:nvPr/>
-        </p:nvSpPr>
-        <p:spPr>
-          <a:xfrm>
-            <a:off x="548640" y="347472"/>
-            <a:ext cx="7315200" cy="274320"/>
-          </a:xfrm>
-          <a:prstGeom prst="rect">
-            <a:avLst/>
-          </a:prstGeom>
-          <a:noFill/>
-          <a:ln/>
-        </p:spPr>
-        <p:txBody>
-          <a:bodyPr wrap="square" lIns="0" tIns="0" rIns="0" bIns="0" rtlCol="0" anchor="ctr"/>
-          <a:lstStyle/>
-          <a:p>
-            <a:pPr indent="0" marL="0">
-              <a:buNone/>
-            </a:pPr>
-            <a:r>
-              <a:rPr lang="en-US" sz="1100" b="1" dirty="0">
-                <a:solidFill>
-                  <a:srgbClr val="5B9BCB"/>
-                </a:solidFill>
-                <a:latin typeface="맑은 고딕" pitchFamily="34" charset="0"/>
-                <a:ea typeface="맑은 고딕" pitchFamily="34" charset="-122"/>
-                <a:cs typeface="맑은 고딕" pitchFamily="34" charset="-120"/>
-              </a:rPr>
-              <a:t>03  Outer Box &amp; Pallet</a:t>
-            </a:r>
-            <a:endParaRPr lang="en-US" sz="1100" dirty="0"/>
-          </a:p>
-        </p:txBody>
-      </p:sp>
-      <p:sp>
-        <p:nvSpPr>
-          <p:cNvPr id="3" name="Text 1"/>
-          <p:cNvSpPr/>
-          <p:nvPr/>
-        </p:nvSpPr>
-        <p:spPr>
-          <a:xfrm>
-            <a:off x="548640" y="621792"/>
-            <a:ext cx="10972800" cy="502920"/>
-          </a:xfrm>
-          <a:prstGeom prst="rect">
-            <a:avLst/>
-          </a:prstGeom>
-          <a:noFill/>
-          <a:ln/>
-        </p:spPr>
-        <p:txBody>
-          <a:bodyPr wrap="square" lIns="0" tIns="0" rIns="0" bIns="0" rtlCol="0" anchor="ctr"/>
-          <a:lstStyle/>
-          <a:p>
-            <a:pPr indent="0" marL="0">
-              <a:buNone/>
-            </a:pPr>
-            <a:r>
-              <a:rPr lang="en-US" sz="2400" b="1" dirty="0">
-                <a:solidFill>
-                  <a:srgbClr val="1B2241"/>
-                </a:solidFill>
-                <a:latin typeface="맑은 고딕" pitchFamily="34" charset="0"/>
-                <a:ea typeface="맑은 고딕" pitchFamily="34" charset="-122"/>
-                <a:cs typeface="맑은 고딕" pitchFamily="34" charset="-120"/>
-              </a:rPr>
-              <a:t>해상 수출 시 – Pallet 포장 형태</a:t>
-            </a:r>
-            <a:endParaRPr lang="en-US" sz="2400" dirty="0"/>
-          </a:p>
-        </p:txBody>
-      </p:sp>
-      <p:sp>
-        <p:nvSpPr>
-          <p:cNvPr id="4" name="Shape 2"/>
-          <p:cNvSpPr/>
-          <p:nvPr/>
-        </p:nvSpPr>
-        <p:spPr>
-          <a:xfrm>
-            <a:off x="548640" y="1261872"/>
-            <a:ext cx="11094415" cy="0"/>
-          </a:xfrm>
-          <a:prstGeom prst="line">
-            <a:avLst/>
-          </a:prstGeom>
-          <a:noFill/>
-          <a:ln w="15875">
-            <a:solidFill>
-              <a:srgbClr val="1B2241"/>
-            </a:solidFill>
-            <a:prstDash val="solid"/>
-          </a:ln>
-        </p:spPr>
-      </p:sp>
-      <p:sp>
-        <p:nvSpPr>
-          <p:cNvPr id="5" name="Text 3"/>
-          <p:cNvSpPr/>
-          <p:nvPr/>
-        </p:nvSpPr>
-        <p:spPr>
-          <a:xfrm>
-            <a:off x="548640" y="6446520"/>
-            <a:ext cx="5486400" cy="228600"/>
-          </a:xfrm>
-          <a:prstGeom prst="rect">
-            <a:avLst/>
-          </a:prstGeom>
-          <a:noFill/>
-          <a:ln/>
-        </p:spPr>
-        <p:txBody>
-          <a:bodyPr wrap="square" lIns="0" tIns="0" rIns="0" bIns="0" rtlCol="0" anchor="ctr"/>
-          <a:lstStyle/>
-          <a:p>
-            <a:pPr indent="0" marL="0">
-              <a:buNone/>
-            </a:pPr>
-            <a:r>
-              <a:rPr lang="en-US" sz="900" dirty="0">
-                <a:solidFill>
-                  <a:srgbClr val="6B7280"/>
-                </a:solidFill>
-                <a:latin typeface="맑은 고딕" pitchFamily="34" charset="0"/>
-                <a:ea typeface="맑은 고딕" pitchFamily="34" charset="-122"/>
-                <a:cs typeface="맑은 고딕" pitchFamily="34" charset="-120"/>
-              </a:rPr>
-              <a:t>해외영업관리팀 OJT  |  Export Packaging</a:t>
-            </a:r>
-            <a:endParaRPr lang="en-US" sz="900" dirty="0"/>
-          </a:p>
-        </p:txBody>
-      </p:sp>
-      <p:sp>
-        <p:nvSpPr>
-          <p:cNvPr id="6" name="Text 4"/>
-          <p:cNvSpPr/>
-          <p:nvPr/>
-        </p:nvSpPr>
-        <p:spPr>
-          <a:xfrm>
-            <a:off x="11277295" y="6446520"/>
-            <a:ext cx="365760" cy="228600"/>
-          </a:xfrm>
-          <a:prstGeom prst="rect">
-            <a:avLst/>
-          </a:prstGeom>
-          <a:noFill/>
-          <a:ln/>
-        </p:spPr>
-        <p:txBody>
-          <a:bodyPr wrap="square" lIns="0" tIns="0" rIns="0" bIns="0" rtlCol="0" anchor="ctr"/>
-          <a:lstStyle/>
-          <a:p>
-            <a:pPr algn="r" indent="0" marL="0">
-              <a:buNone/>
-            </a:pPr>
-            <a:r>
-              <a:rPr lang="en-US" sz="900" dirty="0">
-                <a:solidFill>
-                  <a:srgbClr val="6B7280"/>
-                </a:solidFill>
-                <a:latin typeface="맑은 고딕" pitchFamily="34" charset="0"/>
-                <a:ea typeface="맑은 고딕" pitchFamily="34" charset="-122"/>
-                <a:cs typeface="맑은 고딕" pitchFamily="34" charset="-120"/>
-              </a:rPr>
-              <a:t>11</a:t>
-            </a:r>
-            <a:endParaRPr lang="en-US" sz="900" dirty="0"/>
-          </a:p>
-        </p:txBody>
-      </p:sp>
-      <p:pic>
-        <p:nvPicPr>
-          <p:cNvPr id="7" name="Image 0" descr="C:/Users/cjswl/OneDrive/문서/GitHub/packing-information/리브스메드 로고.png">    </p:cNvPr>
-          <p:cNvPicPr>
-            <a:picLocks noChangeAspect="1"/>
-          </p:cNvPicPr>
-          <p:nvPr/>
-        </p:nvPicPr>
-        <p:blipFill>
-          <a:blip r:embed="rId1"/>
-          <a:stretch>
-            <a:fillRect/>
-          </a:stretch>
-        </p:blipFill>
-        <p:spPr>
-          <a:xfrm>
-            <a:off x="9859975" y="6409149"/>
-            <a:ext cx="1234440" cy="257622"/>
-          </a:xfrm>
-          <a:prstGeom prst="rect">
-            <a:avLst/>
-          </a:prstGeom>
-        </p:spPr>
-      </p:pic>
-      <p:pic>
-        <p:nvPicPr>
           <p:cNvPr id="8" name="Image 1" descr="C:\Users\cjswl\AppData\Local\Temp\claude\c--Users-cjswl-OneDrive----GitHub-packing-information\3ba0e5b9-a872-4a6e-a9b8-bf1f212a4a00\scratchpad\img\image10.jpg">    </p:cNvPr>
           <p:cNvPicPr>
             <a:picLocks noChangeAspect="1"/>
@@ -5413,7 +2470,7 @@
       </p:sp>
       <p:graphicFrame>
         <p:nvGraphicFramePr>
-          <p:cNvPr id="12" name="Table 0"/>
+          <p:cNvPr id="11" name="Table 0"/>
           <p:cNvGraphicFramePr>
             <a:graphicFrameLocks noGrp="1"/>
           </p:cNvGraphicFramePr>
@@ -6740,9 +3797,9 @@
 </p:sld>
 </file>
 
-<file path=ppt/slides/slide12.xml><?xml version="1.0" encoding="utf-8"?>
+<file path=ppt/slides/slide11.xml><?xml version="1.0" encoding="utf-8"?>
 <p:sld xmlns:a="http://schemas.openxmlformats.org/drawingml/2006/main" xmlns:r="http://schemas.openxmlformats.org/officeDocument/2006/relationships" xmlns:p="http://schemas.openxmlformats.org/presentationml/2006/main">
-  <p:cSld name="Slide 12">
+  <p:cSld name="Slide 11">
     <p:bg>
       <p:bgPr>
         <a:solidFill>
@@ -6937,7 +3994,7 @@
                 <a:ea typeface="맑은 고딕" pitchFamily="34" charset="-122"/>
                 <a:cs typeface="맑은 고딕" pitchFamily="34" charset="-120"/>
               </a:rPr>
-              <a:t>12</a:t>
+              <a:t>11</a:t>
             </a:r>
             <a:endParaRPr lang="en-US" sz="900" dirty="0"/>
           </a:p>
@@ -6969,7 +4026,7 @@
       </p:pic>
       <p:graphicFrame>
         <p:nvGraphicFramePr>
-          <p:cNvPr id="13" name="Table 0"/>
+          <p:cNvPr id="12" name="Table 0"/>
           <p:cNvGraphicFramePr>
             <a:graphicFrameLocks noGrp="1"/>
           </p:cNvGraphicFramePr>
@@ -9705,9 +6762,9 @@
 </p:sld>
 </file>
 
-<file path=ppt/slides/slide13.xml><?xml version="1.0" encoding="utf-8"?>
+<file path=ppt/slides/slide12.xml><?xml version="1.0" encoding="utf-8"?>
 <p:sld xmlns:a="http://schemas.openxmlformats.org/drawingml/2006/main" xmlns:r="http://schemas.openxmlformats.org/officeDocument/2006/relationships" xmlns:p="http://schemas.openxmlformats.org/presentationml/2006/main">
-  <p:cSld name="Slide 13">
+  <p:cSld name="Slide 12">
     <p:bg>
       <p:bgPr>
         <a:solidFill>
@@ -9902,7 +6959,7 @@
                 <a:ea typeface="맑은 고딕" pitchFamily="34" charset="-122"/>
                 <a:cs typeface="맑은 고딕" pitchFamily="34" charset="-120"/>
               </a:rPr>
-              <a:t>13</a:t>
+              <a:t>12</a:t>
             </a:r>
             <a:endParaRPr lang="en-US" sz="900" dirty="0"/>
           </a:p>
@@ -10026,7 +7083,7 @@
       </p:sp>
       <p:graphicFrame>
         <p:nvGraphicFramePr>
-          <p:cNvPr id="14" name="Table 0"/>
+          <p:cNvPr id="13" name="Table 0"/>
           <p:cNvGraphicFramePr>
             <a:graphicFrameLocks noGrp="1"/>
           </p:cNvGraphicFramePr>
@@ -11029,9 +8086,9 @@
 </p:sld>
 </file>
 
-<file path=ppt/slides/slide14.xml><?xml version="1.0" encoding="utf-8"?>
+<file path=ppt/slides/slide13.xml><?xml version="1.0" encoding="utf-8"?>
 <p:sld xmlns:a="http://schemas.openxmlformats.org/drawingml/2006/main" xmlns:r="http://schemas.openxmlformats.org/officeDocument/2006/relationships" xmlns:p="http://schemas.openxmlformats.org/presentationml/2006/main">
-  <p:cSld name="Slide 14">
+  <p:cSld name="Slide 13">
     <p:bg>
       <p:bgPr>
         <a:solidFill>
@@ -11226,7 +8283,7 @@
                 <a:ea typeface="맑은 고딕" pitchFamily="34" charset="-122"/>
                 <a:cs typeface="맑은 고딕" pitchFamily="34" charset="-120"/>
               </a:rPr>
-              <a:t>14</a:t>
+              <a:t>13</a:t>
             </a:r>
             <a:endParaRPr lang="en-US" sz="900" dirty="0"/>
           </a:p>
@@ -11297,7 +8354,7 @@
       </p:sp>
       <p:graphicFrame>
         <p:nvGraphicFramePr>
-          <p:cNvPr id="15" name="Table 0"/>
+          <p:cNvPr id="14" name="Table 0"/>
           <p:cNvGraphicFramePr>
             <a:graphicFrameLocks noGrp="1"/>
           </p:cNvGraphicFramePr>
@@ -14006,7 +11063,7 @@
       </p:sp>
       <p:graphicFrame>
         <p:nvGraphicFramePr>
-          <p:cNvPr id="29" name="Table 1"/>
+          <p:cNvPr id="27" name="Table 1"/>
           <p:cNvGraphicFramePr>
             <a:graphicFrameLocks noGrp="1"/>
           </p:cNvGraphicFramePr>
@@ -15935,1951 +12992,9 @@
 </p:sld>
 </file>
 
-<file path=ppt/slides/slide15.xml><?xml version="1.0" encoding="utf-8"?>
-<p:sld xmlns:a="http://schemas.openxmlformats.org/drawingml/2006/main" xmlns:r="http://schemas.openxmlformats.org/officeDocument/2006/relationships" xmlns:p="http://schemas.openxmlformats.org/presentationml/2006/main">
-  <p:cSld name="Slide 15">
-    <p:bg>
-      <p:bgPr>
-        <a:solidFill>
-          <a:srgbClr val="FFFFFF"/>
-        </a:solidFill>
-      </p:bgPr>
-    </p:bg>
-    <p:spTree>
-      <p:nvGrpSpPr>
-        <p:cNvPr id="1" name=""/>
-        <p:cNvGrpSpPr/>
-        <p:nvPr/>
-      </p:nvGrpSpPr>
-      <p:grpSpPr>
-        <a:xfrm>
-          <a:off x="0" y="0"/>
-          <a:ext cx="0" cy="0"/>
-          <a:chOff x="0" y="0"/>
-          <a:chExt cx="0" cy="0"/>
-        </a:xfrm>
-      </p:grpSpPr>
-      <p:sp>
-        <p:nvSpPr>
-          <p:cNvPr id="2" name="Text 0"/>
-          <p:cNvSpPr/>
-          <p:nvPr/>
-        </p:nvSpPr>
-        <p:spPr>
-          <a:xfrm>
-            <a:off x="548640" y="347472"/>
-            <a:ext cx="7315200" cy="274320"/>
-          </a:xfrm>
-          <a:prstGeom prst="rect">
-            <a:avLst/>
-          </a:prstGeom>
-          <a:noFill/>
-          <a:ln/>
-        </p:spPr>
-        <p:txBody>
-          <a:bodyPr wrap="square" lIns="0" tIns="0" rIns="0" bIns="0" rtlCol="0" anchor="ctr"/>
-          <a:lstStyle/>
-          <a:p>
-            <a:pPr indent="0" marL="0">
-              <a:buNone/>
-            </a:pPr>
-            <a:r>
-              <a:rPr lang="en-US" sz="1100" b="1" dirty="0">
-                <a:solidFill>
-                  <a:srgbClr val="5B9BCB"/>
-                </a:solidFill>
-                <a:latin typeface="맑은 고딕" pitchFamily="34" charset="0"/>
-                <a:ea typeface="맑은 고딕" pitchFamily="34" charset="-122"/>
-                <a:cs typeface="맑은 고딕" pitchFamily="34" charset="-120"/>
-              </a:rPr>
-              <a:t>06  포장 시 유의사항</a:t>
-            </a:r>
-            <a:endParaRPr lang="en-US" sz="1100" dirty="0"/>
-          </a:p>
-        </p:txBody>
-      </p:sp>
-      <p:sp>
-        <p:nvSpPr>
-          <p:cNvPr id="3" name="Text 1"/>
-          <p:cNvSpPr/>
-          <p:nvPr/>
-        </p:nvSpPr>
-        <p:spPr>
-          <a:xfrm>
-            <a:off x="548640" y="621792"/>
-            <a:ext cx="10972800" cy="502920"/>
-          </a:xfrm>
-          <a:prstGeom prst="rect">
-            <a:avLst/>
-          </a:prstGeom>
-          <a:noFill/>
-          <a:ln/>
-        </p:spPr>
-        <p:txBody>
-          <a:bodyPr wrap="square" lIns="0" tIns="0" rIns="0" bIns="0" rtlCol="0" anchor="ctr"/>
-          <a:lstStyle/>
-          <a:p>
-            <a:pPr indent="0" marL="0">
-              <a:buNone/>
-            </a:pPr>
-            <a:r>
-              <a:rPr lang="en-US" sz="2400" b="1" dirty="0">
-                <a:solidFill>
-                  <a:srgbClr val="1B2241"/>
-                </a:solidFill>
-                <a:latin typeface="맑은 고딕" pitchFamily="34" charset="0"/>
-                <a:ea typeface="맑은 고딕" pitchFamily="34" charset="-122"/>
-                <a:cs typeface="맑은 고딕" pitchFamily="34" charset="-120"/>
-              </a:rPr>
-              <a:t>국가별 · 자재별 예외 케이스</a:t>
-            </a:r>
-            <a:endParaRPr lang="en-US" sz="2400" dirty="0"/>
-          </a:p>
-        </p:txBody>
-      </p:sp>
-      <p:sp>
-        <p:nvSpPr>
-          <p:cNvPr id="4" name="Shape 2"/>
-          <p:cNvSpPr/>
-          <p:nvPr/>
-        </p:nvSpPr>
-        <p:spPr>
-          <a:xfrm>
-            <a:off x="548640" y="1261872"/>
-            <a:ext cx="11094415" cy="0"/>
-          </a:xfrm>
-          <a:prstGeom prst="line">
-            <a:avLst/>
-          </a:prstGeom>
-          <a:noFill/>
-          <a:ln w="15875">
-            <a:solidFill>
-              <a:srgbClr val="1B2241"/>
-            </a:solidFill>
-            <a:prstDash val="solid"/>
-          </a:ln>
-        </p:spPr>
-      </p:sp>
-      <p:sp>
-        <p:nvSpPr>
-          <p:cNvPr id="5" name="Text 3"/>
-          <p:cNvSpPr/>
-          <p:nvPr/>
-        </p:nvSpPr>
-        <p:spPr>
-          <a:xfrm>
-            <a:off x="548640" y="6446520"/>
-            <a:ext cx="5486400" cy="228600"/>
-          </a:xfrm>
-          <a:prstGeom prst="rect">
-            <a:avLst/>
-          </a:prstGeom>
-          <a:noFill/>
-          <a:ln/>
-        </p:spPr>
-        <p:txBody>
-          <a:bodyPr wrap="square" lIns="0" tIns="0" rIns="0" bIns="0" rtlCol="0" anchor="ctr"/>
-          <a:lstStyle/>
-          <a:p>
-            <a:pPr indent="0" marL="0">
-              <a:buNone/>
-            </a:pPr>
-            <a:r>
-              <a:rPr lang="en-US" sz="900" dirty="0">
-                <a:solidFill>
-                  <a:srgbClr val="6B7280"/>
-                </a:solidFill>
-                <a:latin typeface="맑은 고딕" pitchFamily="34" charset="0"/>
-                <a:ea typeface="맑은 고딕" pitchFamily="34" charset="-122"/>
-                <a:cs typeface="맑은 고딕" pitchFamily="34" charset="-120"/>
-              </a:rPr>
-              <a:t>해외영업관리팀 OJT  |  Export Packaging</a:t>
-            </a:r>
-            <a:endParaRPr lang="en-US" sz="900" dirty="0"/>
-          </a:p>
-        </p:txBody>
-      </p:sp>
-      <p:sp>
-        <p:nvSpPr>
-          <p:cNvPr id="6" name="Text 4"/>
-          <p:cNvSpPr/>
-          <p:nvPr/>
-        </p:nvSpPr>
-        <p:spPr>
-          <a:xfrm>
-            <a:off x="11277295" y="6446520"/>
-            <a:ext cx="365760" cy="228600"/>
-          </a:xfrm>
-          <a:prstGeom prst="rect">
-            <a:avLst/>
-          </a:prstGeom>
-          <a:noFill/>
-          <a:ln/>
-        </p:spPr>
-        <p:txBody>
-          <a:bodyPr wrap="square" lIns="0" tIns="0" rIns="0" bIns="0" rtlCol="0" anchor="ctr"/>
-          <a:lstStyle/>
-          <a:p>
-            <a:pPr algn="r" indent="0" marL="0">
-              <a:buNone/>
-            </a:pPr>
-            <a:r>
-              <a:rPr lang="en-US" sz="900" dirty="0">
-                <a:solidFill>
-                  <a:srgbClr val="6B7280"/>
-                </a:solidFill>
-                <a:latin typeface="맑은 고딕" pitchFamily="34" charset="0"/>
-                <a:ea typeface="맑은 고딕" pitchFamily="34" charset="-122"/>
-                <a:cs typeface="맑은 고딕" pitchFamily="34" charset="-120"/>
-              </a:rPr>
-              <a:t>15</a:t>
-            </a:r>
-            <a:endParaRPr lang="en-US" sz="900" dirty="0"/>
-          </a:p>
-        </p:txBody>
-      </p:sp>
-      <p:pic>
-        <p:nvPicPr>
-          <p:cNvPr id="7" name="Image 0" descr="C:/Users/cjswl/OneDrive/문서/GitHub/packing-information/리브스메드 로고.png">    </p:cNvPr>
-          <p:cNvPicPr>
-            <a:picLocks noChangeAspect="1"/>
-          </p:cNvPicPr>
-          <p:nvPr/>
-        </p:nvPicPr>
-        <p:blipFill>
-          <a:blip r:embed="rId1"/>
-          <a:stretch>
-            <a:fillRect/>
-          </a:stretch>
-        </p:blipFill>
-        <p:spPr>
-          <a:xfrm>
-            <a:off x="9859975" y="6409149"/>
-            <a:ext cx="1234440" cy="257622"/>
-          </a:xfrm>
-          <a:prstGeom prst="rect">
-            <a:avLst/>
-          </a:prstGeom>
-        </p:spPr>
-      </p:pic>
-      <p:graphicFrame>
-        <p:nvGraphicFramePr>
-          <p:cNvPr id="16" name="Table 0"/>
-          <p:cNvGraphicFramePr>
-            <a:graphicFrameLocks noGrp="1"/>
-          </p:cNvGraphicFramePr>
-          <p:nvPr>
-            <p:extLst>
-              <p:ext uri="{D42A27DB-BD31-4B8C-83A1-F6EECF244321}">
-                <p14:modId xmlns:p14="http://schemas.microsoft.com/office/powerpoint/2010/main" val="1579011935"/>
-              </p:ext>
-            </p:extLst>
-          </p:nvPr>
-        </p:nvGraphicFramePr>
-        <p:xfrm>
-          <a:off x="548640" y="1554480"/>
-          <a:ext cx="11091672" cy="914400"/>
-        </p:xfrm>
-        <a:graphic>
-          <a:graphicData uri="http://schemas.openxmlformats.org/drawingml/2006/table">
-            <a:tbl>
-              <a:tblPr/>
-              <a:tblGrid>
-                <a:gridCol w="2743200"/>
-                <a:gridCol w="8348472"/>
-              </a:tblGrid>
-              <a:tr h="530352">
-                <a:tc>
-                  <a:txBody>
-                    <a:bodyPr/>
-                    <a:lstStyle/>
-                    <a:p>
-                      <a:pPr algn="l" indent="0" marL="0">
-                        <a:buNone/>
-                      </a:pPr>
-                      <a:r>
-                        <a:rPr lang="en-US" sz="1200" b="1" dirty="0">
-                          <a:solidFill>
-                            <a:srgbClr val="1B2241"/>
-                          </a:solidFill>
-                          <a:latin typeface="맑은 고딕" pitchFamily="34" charset="0"/>
-                          <a:ea typeface="맑은 고딕" pitchFamily="34" charset="-122"/>
-                          <a:cs typeface="맑은 고딕" pitchFamily="34" charset="-120"/>
-                        </a:rPr>
-                        <a:t>독일 / 유럽 (MDR)</a:t>
-                      </a:r>
-                      <a:endParaRPr lang="en-US" sz="1200" dirty="0">
-                        <a:latin typeface="맑은 고딕" charset="0"/>
-                        <a:ea typeface="맑은 고딕" charset="0"/>
-                        <a:cs typeface="맑은 고딕" charset="0"/>
-                      </a:endParaRPr>
-                    </a:p>
-                  </a:txBody>
-                  <a:tcPr marL="109728" marR="109728" marT="45720" marB="45720" anchor="ctr">
-                    <a:lnL w="9525" cap="flat" cmpd="sng" algn="ctr">
-                      <a:solidFill>
-                        <a:srgbClr val="C9CED6"/>
-                      </a:solidFill>
-                      <a:prstDash val="solid"/>
-                      <a:round/>
-                      <a:headEnd type="none" w="med" len="med"/>
-                      <a:tailEnd type="none" w="med" len="med"/>
-                    </a:lnL>
-                    <a:lnR w="9525" cap="flat" cmpd="sng" algn="ctr">
-                      <a:solidFill>
-                        <a:srgbClr val="C9CED6"/>
-                      </a:solidFill>
-                      <a:prstDash val="solid"/>
-                      <a:round/>
-                      <a:headEnd type="none" w="med" len="med"/>
-                      <a:tailEnd type="none" w="med" len="med"/>
-                    </a:lnR>
-                    <a:lnT w="9525" cap="flat" cmpd="sng" algn="ctr">
-                      <a:solidFill>
-                        <a:srgbClr val="C9CED6"/>
-                      </a:solidFill>
-                      <a:prstDash val="solid"/>
-                      <a:round/>
-                      <a:headEnd type="none" w="med" len="med"/>
-                      <a:tailEnd type="none" w="med" len="med"/>
-                    </a:lnT>
-                    <a:lnB w="9525" cap="flat" cmpd="sng" algn="ctr">
-                      <a:solidFill>
-                        <a:srgbClr val="C9CED6"/>
-                      </a:solidFill>
-                      <a:prstDash val="solid"/>
-                      <a:round/>
-                      <a:headEnd type="none" w="med" len="med"/>
-                      <a:tailEnd type="none" w="med" len="med"/>
-                    </a:lnB>
-                    <a:solidFill>
-                      <a:srgbClr val="EEF3F8"/>
-                    </a:solidFill>
-                  </a:tcPr>
-                </a:tc>
-                <a:tc>
-                  <a:txBody>
-                    <a:bodyPr/>
-                    <a:lstStyle/>
-                    <a:p>
-                      <a:pPr algn="l" indent="0" marL="0">
-                        <a:buNone/>
-                      </a:pPr>
-                      <a:r>
-                        <a:rPr lang="en-US" sz="1200" dirty="0">
-                          <a:solidFill>
-                            <a:srgbClr val="222222"/>
-                          </a:solidFill>
-                          <a:latin typeface="맑은 고딕" pitchFamily="34" charset="0"/>
-                          <a:ea typeface="맑은 고딕" pitchFamily="34" charset="-122"/>
-                          <a:cs typeface="맑은 고딕" pitchFamily="34" charset="-120"/>
-                        </a:rPr>
-                        <a:t>MDR 변경 통보 절차로 기존 이너박스 사용. 이중포장 시 Outer Box는 구형 38 박스 적용 (전 국가 신규 이너박스 적용 시점까지 유지)</a:t>
-                      </a:r>
-                      <a:endParaRPr lang="en-US" sz="1200" dirty="0">
-                        <a:latin typeface="맑은 고딕" charset="0"/>
-                        <a:ea typeface="맑은 고딕" charset="0"/>
-                        <a:cs typeface="맑은 고딕" charset="0"/>
-                      </a:endParaRPr>
-                    </a:p>
-                  </a:txBody>
-                  <a:tcPr marL="109728" marR="109728" marT="45720" marB="45720" anchor="ctr">
-                    <a:lnL w="9525" cap="flat" cmpd="sng" algn="ctr">
-                      <a:solidFill>
-                        <a:srgbClr val="C9CED6"/>
-                      </a:solidFill>
-                      <a:prstDash val="solid"/>
-                      <a:round/>
-                      <a:headEnd type="none" w="med" len="med"/>
-                      <a:tailEnd type="none" w="med" len="med"/>
-                    </a:lnL>
-                    <a:lnR w="9525" cap="flat" cmpd="sng" algn="ctr">
-                      <a:solidFill>
-                        <a:srgbClr val="C9CED6"/>
-                      </a:solidFill>
-                      <a:prstDash val="solid"/>
-                      <a:round/>
-                      <a:headEnd type="none" w="med" len="med"/>
-                      <a:tailEnd type="none" w="med" len="med"/>
-                    </a:lnR>
-                    <a:lnT w="9525" cap="flat" cmpd="sng" algn="ctr">
-                      <a:solidFill>
-                        <a:srgbClr val="C9CED6"/>
-                      </a:solidFill>
-                      <a:prstDash val="solid"/>
-                      <a:round/>
-                      <a:headEnd type="none" w="med" len="med"/>
-                      <a:tailEnd type="none" w="med" len="med"/>
-                    </a:lnT>
-                    <a:lnB w="9525" cap="flat" cmpd="sng" algn="ctr">
-                      <a:solidFill>
-                        <a:srgbClr val="C9CED6"/>
-                      </a:solidFill>
-                      <a:prstDash val="solid"/>
-                      <a:round/>
-                      <a:headEnd type="none" w="med" len="med"/>
-                      <a:tailEnd type="none" w="med" len="med"/>
-                    </a:lnB>
-                  </a:tcPr>
-                </a:tc>
-              </a:tr>
-              <a:tr h="530352">
-                <a:tc>
-                  <a:txBody>
-                    <a:bodyPr/>
-                    <a:lstStyle/>
-                    <a:p>
-                      <a:pPr algn="l" indent="0" marL="0">
-                        <a:buNone/>
-                      </a:pPr>
-                      <a:r>
-                        <a:rPr lang="en-US" sz="1200" b="1" dirty="0">
-                          <a:solidFill>
-                            <a:srgbClr val="1B2241"/>
-                          </a:solidFill>
-                          <a:latin typeface="맑은 고딕" pitchFamily="34" charset="0"/>
-                          <a:ea typeface="맑은 고딕" pitchFamily="34" charset="-122"/>
-                          <a:cs typeface="맑은 고딕" pitchFamily="34" charset="-120"/>
-                        </a:rPr>
-                        <a:t>여객기 적재 높이</a:t>
-                      </a:r>
-                      <a:endParaRPr lang="en-US" sz="1200" dirty="0">
-                        <a:latin typeface="맑은 고딕" charset="0"/>
-                        <a:ea typeface="맑은 고딕" charset="0"/>
-                        <a:cs typeface="맑은 고딕" charset="0"/>
-                      </a:endParaRPr>
-                    </a:p>
-                  </a:txBody>
-                  <a:tcPr marL="109728" marR="109728" marT="45720" marB="45720" anchor="ctr">
-                    <a:lnL w="9525" cap="flat" cmpd="sng" algn="ctr">
-                      <a:solidFill>
-                        <a:srgbClr val="C9CED6"/>
-                      </a:solidFill>
-                      <a:prstDash val="solid"/>
-                      <a:round/>
-                      <a:headEnd type="none" w="med" len="med"/>
-                      <a:tailEnd type="none" w="med" len="med"/>
-                    </a:lnL>
-                    <a:lnR w="9525" cap="flat" cmpd="sng" algn="ctr">
-                      <a:solidFill>
-                        <a:srgbClr val="C9CED6"/>
-                      </a:solidFill>
-                      <a:prstDash val="solid"/>
-                      <a:round/>
-                      <a:headEnd type="none" w="med" len="med"/>
-                      <a:tailEnd type="none" w="med" len="med"/>
-                    </a:lnR>
-                    <a:lnT w="9525" cap="flat" cmpd="sng" algn="ctr">
-                      <a:solidFill>
-                        <a:srgbClr val="C9CED6"/>
-                      </a:solidFill>
-                      <a:prstDash val="solid"/>
-                      <a:round/>
-                      <a:headEnd type="none" w="med" len="med"/>
-                      <a:tailEnd type="none" w="med" len="med"/>
-                    </a:lnT>
-                    <a:lnB w="9525" cap="flat" cmpd="sng" algn="ctr">
-                      <a:solidFill>
-                        <a:srgbClr val="C9CED6"/>
-                      </a:solidFill>
-                      <a:prstDash val="solid"/>
-                      <a:round/>
-                      <a:headEnd type="none" w="med" len="med"/>
-                      <a:tailEnd type="none" w="med" len="med"/>
-                    </a:lnB>
-                    <a:solidFill>
-                      <a:srgbClr val="EEF3F8"/>
-                    </a:solidFill>
-                  </a:tcPr>
-                </a:tc>
-                <a:tc>
-                  <a:txBody>
-                    <a:bodyPr/>
-                    <a:lstStyle/>
-                    <a:p>
-                      <a:pPr algn="l" indent="0" marL="0">
-                        <a:buNone/>
-                      </a:pPr>
-                      <a:r>
-                        <a:rPr lang="en-US" sz="1200" dirty="0">
-                          <a:solidFill>
-                            <a:srgbClr val="222222"/>
-                          </a:solidFill>
-                          <a:latin typeface="맑은 고딕" pitchFamily="34" charset="0"/>
-                          <a:ea typeface="맑은 고딕" pitchFamily="34" charset="-122"/>
-                          <a:cs typeface="맑은 고딕" pitchFamily="34" charset="-120"/>
-                        </a:rPr>
-                        <a:t>Max 160 cm (최대 2단). 5개용 아우터 박스 2단 적재 시 112 cm → 상부 약 48 cm Dead Space 발생</a:t>
-                      </a:r>
-                      <a:endParaRPr lang="en-US" sz="1200" dirty="0">
-                        <a:latin typeface="맑은 고딕" charset="0"/>
-                        <a:ea typeface="맑은 고딕" charset="0"/>
-                        <a:cs typeface="맑은 고딕" charset="0"/>
-                      </a:endParaRPr>
-                    </a:p>
-                  </a:txBody>
-                  <a:tcPr marL="109728" marR="109728" marT="45720" marB="45720" anchor="ctr">
-                    <a:lnL w="9525" cap="flat" cmpd="sng" algn="ctr">
-                      <a:solidFill>
-                        <a:srgbClr val="C9CED6"/>
-                      </a:solidFill>
-                      <a:prstDash val="solid"/>
-                      <a:round/>
-                      <a:headEnd type="none" w="med" len="med"/>
-                      <a:tailEnd type="none" w="med" len="med"/>
-                    </a:lnL>
-                    <a:lnR w="9525" cap="flat" cmpd="sng" algn="ctr">
-                      <a:solidFill>
-                        <a:srgbClr val="C9CED6"/>
-                      </a:solidFill>
-                      <a:prstDash val="solid"/>
-                      <a:round/>
-                      <a:headEnd type="none" w="med" len="med"/>
-                      <a:tailEnd type="none" w="med" len="med"/>
-                    </a:lnR>
-                    <a:lnT w="9525" cap="flat" cmpd="sng" algn="ctr">
-                      <a:solidFill>
-                        <a:srgbClr val="C9CED6"/>
-                      </a:solidFill>
-                      <a:prstDash val="solid"/>
-                      <a:round/>
-                      <a:headEnd type="none" w="med" len="med"/>
-                      <a:tailEnd type="none" w="med" len="med"/>
-                    </a:lnT>
-                    <a:lnB w="9525" cap="flat" cmpd="sng" algn="ctr">
-                      <a:solidFill>
-                        <a:srgbClr val="C9CED6"/>
-                      </a:solidFill>
-                      <a:prstDash val="solid"/>
-                      <a:round/>
-                      <a:headEnd type="none" w="med" len="med"/>
-                      <a:tailEnd type="none" w="med" len="med"/>
-                    </a:lnB>
-                  </a:tcPr>
-                </a:tc>
-              </a:tr>
-              <a:tr h="530352">
-                <a:tc>
-                  <a:txBody>
-                    <a:bodyPr/>
-                    <a:lstStyle/>
-                    <a:p>
-                      <a:pPr algn="l" indent="0" marL="0">
-                        <a:buNone/>
-                      </a:pPr>
-                      <a:r>
-                        <a:rPr lang="en-US" sz="1200" b="1" dirty="0">
-                          <a:solidFill>
-                            <a:srgbClr val="1B2241"/>
-                          </a:solidFill>
-                          <a:latin typeface="맑은 고딕" pitchFamily="34" charset="0"/>
-                          <a:ea typeface="맑은 고딕" pitchFamily="34" charset="-122"/>
-                          <a:cs typeface="맑은 고딕" pitchFamily="34" charset="-120"/>
-                        </a:rPr>
-                        <a:t>ArtiSential 45cm 5개용</a:t>
-                      </a:r>
-                      <a:endParaRPr lang="en-US" sz="1200" dirty="0">
-                        <a:latin typeface="맑은 고딕" charset="0"/>
-                        <a:ea typeface="맑은 고딕" charset="0"/>
-                        <a:cs typeface="맑은 고딕" charset="0"/>
-                      </a:endParaRPr>
-                    </a:p>
-                  </a:txBody>
-                  <a:tcPr marL="109728" marR="109728" marT="45720" marB="45720" anchor="ctr">
-                    <a:lnL w="9525" cap="flat" cmpd="sng" algn="ctr">
-                      <a:solidFill>
-                        <a:srgbClr val="C9CED6"/>
-                      </a:solidFill>
-                      <a:prstDash val="solid"/>
-                      <a:round/>
-                      <a:headEnd type="none" w="med" len="med"/>
-                      <a:tailEnd type="none" w="med" len="med"/>
-                    </a:lnL>
-                    <a:lnR w="9525" cap="flat" cmpd="sng" algn="ctr">
-                      <a:solidFill>
-                        <a:srgbClr val="C9CED6"/>
-                      </a:solidFill>
-                      <a:prstDash val="solid"/>
-                      <a:round/>
-                      <a:headEnd type="none" w="med" len="med"/>
-                      <a:tailEnd type="none" w="med" len="med"/>
-                    </a:lnR>
-                    <a:lnT w="9525" cap="flat" cmpd="sng" algn="ctr">
-                      <a:solidFill>
-                        <a:srgbClr val="C9CED6"/>
-                      </a:solidFill>
-                      <a:prstDash val="solid"/>
-                      <a:round/>
-                      <a:headEnd type="none" w="med" len="med"/>
-                      <a:tailEnd type="none" w="med" len="med"/>
-                    </a:lnT>
-                    <a:lnB w="9525" cap="flat" cmpd="sng" algn="ctr">
-                      <a:solidFill>
-                        <a:srgbClr val="C9CED6"/>
-                      </a:solidFill>
-                      <a:prstDash val="solid"/>
-                      <a:round/>
-                      <a:headEnd type="none" w="med" len="med"/>
-                      <a:tailEnd type="none" w="med" len="med"/>
-                    </a:lnB>
-                    <a:solidFill>
-                      <a:srgbClr val="EEF3F8"/>
-                    </a:solidFill>
-                  </a:tcPr>
-                </a:tc>
-                <a:tc>
-                  <a:txBody>
-                    <a:bodyPr/>
-                    <a:lstStyle/>
-                    <a:p>
-                      <a:pPr algn="l" indent="0" marL="0">
-                        <a:buNone/>
-                      </a:pPr>
-                      <a:r>
-                        <a:rPr lang="en-US" sz="1200" dirty="0">
-                          <a:solidFill>
-                            <a:srgbClr val="222222"/>
-                          </a:solidFill>
-                          <a:latin typeface="맑은 고딕" pitchFamily="34" charset="0"/>
-                          <a:ea typeface="맑은 고딕" pitchFamily="34" charset="-122"/>
-                          <a:cs typeface="맑은 고딕" pitchFamily="34" charset="-120"/>
-                        </a:rPr>
-                        <a:t>허가는 있으나 출고 물량 저조로 포장 자재 미보유</a:t>
-                      </a:r>
-                      <a:endParaRPr lang="en-US" sz="1200" dirty="0">
-                        <a:latin typeface="맑은 고딕" charset="0"/>
-                        <a:ea typeface="맑은 고딕" charset="0"/>
-                        <a:cs typeface="맑은 고딕" charset="0"/>
-                      </a:endParaRPr>
-                    </a:p>
-                  </a:txBody>
-                  <a:tcPr marL="109728" marR="109728" marT="45720" marB="45720" anchor="ctr">
-                    <a:lnL w="9525" cap="flat" cmpd="sng" algn="ctr">
-                      <a:solidFill>
-                        <a:srgbClr val="C9CED6"/>
-                      </a:solidFill>
-                      <a:prstDash val="solid"/>
-                      <a:round/>
-                      <a:headEnd type="none" w="med" len="med"/>
-                      <a:tailEnd type="none" w="med" len="med"/>
-                    </a:lnL>
-                    <a:lnR w="9525" cap="flat" cmpd="sng" algn="ctr">
-                      <a:solidFill>
-                        <a:srgbClr val="C9CED6"/>
-                      </a:solidFill>
-                      <a:prstDash val="solid"/>
-                      <a:round/>
-                      <a:headEnd type="none" w="med" len="med"/>
-                      <a:tailEnd type="none" w="med" len="med"/>
-                    </a:lnR>
-                    <a:lnT w="9525" cap="flat" cmpd="sng" algn="ctr">
-                      <a:solidFill>
-                        <a:srgbClr val="C9CED6"/>
-                      </a:solidFill>
-                      <a:prstDash val="solid"/>
-                      <a:round/>
-                      <a:headEnd type="none" w="med" len="med"/>
-                      <a:tailEnd type="none" w="med" len="med"/>
-                    </a:lnT>
-                    <a:lnB w="9525" cap="flat" cmpd="sng" algn="ctr">
-                      <a:solidFill>
-                        <a:srgbClr val="C9CED6"/>
-                      </a:solidFill>
-                      <a:prstDash val="solid"/>
-                      <a:round/>
-                      <a:headEnd type="none" w="med" len="med"/>
-                      <a:tailEnd type="none" w="med" len="med"/>
-                    </a:lnB>
-                  </a:tcPr>
-                </a:tc>
-              </a:tr>
-              <a:tr h="530352">
-                <a:tc>
-                  <a:txBody>
-                    <a:bodyPr/>
-                    <a:lstStyle/>
-                    <a:p>
-                      <a:pPr algn="l" indent="0" marL="0">
-                        <a:buNone/>
-                      </a:pPr>
-                      <a:r>
-                        <a:rPr lang="en-US" sz="1200" b="1" dirty="0">
-                          <a:solidFill>
-                            <a:srgbClr val="1B2241"/>
-                          </a:solidFill>
-                          <a:latin typeface="맑은 고딕" pitchFamily="34" charset="0"/>
-                          <a:ea typeface="맑은 고딕" pitchFamily="34" charset="-122"/>
-                          <a:cs typeface="맑은 고딕" pitchFamily="34" charset="-120"/>
-                        </a:rPr>
-                        <a:t>ArtiSential 2개용</a:t>
-                      </a:r>
-                      <a:endParaRPr lang="en-US" sz="1200" dirty="0">
-                        <a:latin typeface="맑은 고딕" charset="0"/>
-                        <a:ea typeface="맑은 고딕" charset="0"/>
-                        <a:cs typeface="맑은 고딕" charset="0"/>
-                      </a:endParaRPr>
-                    </a:p>
-                  </a:txBody>
-                  <a:tcPr marL="109728" marR="109728" marT="45720" marB="45720" anchor="ctr">
-                    <a:lnL w="9525" cap="flat" cmpd="sng" algn="ctr">
-                      <a:solidFill>
-                        <a:srgbClr val="C9CED6"/>
-                      </a:solidFill>
-                      <a:prstDash val="solid"/>
-                      <a:round/>
-                      <a:headEnd type="none" w="med" len="med"/>
-                      <a:tailEnd type="none" w="med" len="med"/>
-                    </a:lnL>
-                    <a:lnR w="9525" cap="flat" cmpd="sng" algn="ctr">
-                      <a:solidFill>
-                        <a:srgbClr val="C9CED6"/>
-                      </a:solidFill>
-                      <a:prstDash val="solid"/>
-                      <a:round/>
-                      <a:headEnd type="none" w="med" len="med"/>
-                      <a:tailEnd type="none" w="med" len="med"/>
-                    </a:lnR>
-                    <a:lnT w="9525" cap="flat" cmpd="sng" algn="ctr">
-                      <a:solidFill>
-                        <a:srgbClr val="C9CED6"/>
-                      </a:solidFill>
-                      <a:prstDash val="solid"/>
-                      <a:round/>
-                      <a:headEnd type="none" w="med" len="med"/>
-                      <a:tailEnd type="none" w="med" len="med"/>
-                    </a:lnT>
-                    <a:lnB w="9525" cap="flat" cmpd="sng" algn="ctr">
-                      <a:solidFill>
-                        <a:srgbClr val="C9CED6"/>
-                      </a:solidFill>
-                      <a:prstDash val="solid"/>
-                      <a:round/>
-                      <a:headEnd type="none" w="med" len="med"/>
-                      <a:tailEnd type="none" w="med" len="med"/>
-                    </a:lnB>
-                    <a:solidFill>
-                      <a:srgbClr val="EEF3F8"/>
-                    </a:solidFill>
-                  </a:tcPr>
-                </a:tc>
-                <a:tc>
-                  <a:txBody>
-                    <a:bodyPr/>
-                    <a:lstStyle/>
-                    <a:p>
-                      <a:pPr algn="l" indent="0" marL="0">
-                        <a:buNone/>
-                      </a:pPr>
-                      <a:r>
-                        <a:rPr lang="en-US" sz="1200" dirty="0">
-                          <a:solidFill>
-                            <a:srgbClr val="222222"/>
-                          </a:solidFill>
-                          <a:latin typeface="맑은 고딕" pitchFamily="34" charset="0"/>
-                          <a:ea typeface="맑은 고딕" pitchFamily="34" charset="-122"/>
-                          <a:cs typeface="맑은 고딕" pitchFamily="34" charset="-120"/>
-                        </a:rPr>
-                        <a:t>Transport Validation 미완료 – 비멸균 품목에만 사용</a:t>
-                      </a:r>
-                      <a:endParaRPr lang="en-US" sz="1200" dirty="0">
-                        <a:latin typeface="맑은 고딕" charset="0"/>
-                        <a:ea typeface="맑은 고딕" charset="0"/>
-                        <a:cs typeface="맑은 고딕" charset="0"/>
-                      </a:endParaRPr>
-                    </a:p>
-                  </a:txBody>
-                  <a:tcPr marL="109728" marR="109728" marT="45720" marB="45720" anchor="ctr">
-                    <a:lnL w="9525" cap="flat" cmpd="sng" algn="ctr">
-                      <a:solidFill>
-                        <a:srgbClr val="C9CED6"/>
-                      </a:solidFill>
-                      <a:prstDash val="solid"/>
-                      <a:round/>
-                      <a:headEnd type="none" w="med" len="med"/>
-                      <a:tailEnd type="none" w="med" len="med"/>
-                    </a:lnL>
-                    <a:lnR w="9525" cap="flat" cmpd="sng" algn="ctr">
-                      <a:solidFill>
-                        <a:srgbClr val="C9CED6"/>
-                      </a:solidFill>
-                      <a:prstDash val="solid"/>
-                      <a:round/>
-                      <a:headEnd type="none" w="med" len="med"/>
-                      <a:tailEnd type="none" w="med" len="med"/>
-                    </a:lnR>
-                    <a:lnT w="9525" cap="flat" cmpd="sng" algn="ctr">
-                      <a:solidFill>
-                        <a:srgbClr val="C9CED6"/>
-                      </a:solidFill>
-                      <a:prstDash val="solid"/>
-                      <a:round/>
-                      <a:headEnd type="none" w="med" len="med"/>
-                      <a:tailEnd type="none" w="med" len="med"/>
-                    </a:lnT>
-                    <a:lnB w="9525" cap="flat" cmpd="sng" algn="ctr">
-                      <a:solidFill>
-                        <a:srgbClr val="C9CED6"/>
-                      </a:solidFill>
-                      <a:prstDash val="solid"/>
-                      <a:round/>
-                      <a:headEnd type="none" w="med" len="med"/>
-                      <a:tailEnd type="none" w="med" len="med"/>
-                    </a:lnB>
-                  </a:tcPr>
-                </a:tc>
-              </a:tr>
-              <a:tr h="530352">
-                <a:tc>
-                  <a:txBody>
-                    <a:bodyPr/>
-                    <a:lstStyle/>
-                    <a:p>
-                      <a:pPr algn="l" indent="0" marL="0">
-                        <a:buNone/>
-                      </a:pPr>
-                      <a:r>
-                        <a:rPr lang="en-US" sz="1200" b="1" dirty="0">
-                          <a:solidFill>
-                            <a:srgbClr val="1B2241"/>
-                          </a:solidFill>
-                          <a:latin typeface="맑은 고딕" pitchFamily="34" charset="0"/>
-                          <a:ea typeface="맑은 고딕" pitchFamily="34" charset="-122"/>
-                          <a:cs typeface="맑은 고딕" pitchFamily="34" charset="-120"/>
-                        </a:rPr>
-                        <a:t>ACA03-PG 5개용(L)</a:t>
-                      </a:r>
-                      <a:endParaRPr lang="en-US" sz="1200" dirty="0">
-                        <a:latin typeface="맑은 고딕" charset="0"/>
-                        <a:ea typeface="맑은 고딕" charset="0"/>
-                        <a:cs typeface="맑은 고딕" charset="0"/>
-                      </a:endParaRPr>
-                    </a:p>
-                  </a:txBody>
-                  <a:tcPr marL="109728" marR="109728" marT="45720" marB="45720" anchor="ctr">
-                    <a:lnL w="9525" cap="flat" cmpd="sng" algn="ctr">
-                      <a:solidFill>
-                        <a:srgbClr val="C9CED6"/>
-                      </a:solidFill>
-                      <a:prstDash val="solid"/>
-                      <a:round/>
-                      <a:headEnd type="none" w="med" len="med"/>
-                      <a:tailEnd type="none" w="med" len="med"/>
-                    </a:lnL>
-                    <a:lnR w="9525" cap="flat" cmpd="sng" algn="ctr">
-                      <a:solidFill>
-                        <a:srgbClr val="C9CED6"/>
-                      </a:solidFill>
-                      <a:prstDash val="solid"/>
-                      <a:round/>
-                      <a:headEnd type="none" w="med" len="med"/>
-                      <a:tailEnd type="none" w="med" len="med"/>
-                    </a:lnR>
-                    <a:lnT w="9525" cap="flat" cmpd="sng" algn="ctr">
-                      <a:solidFill>
-                        <a:srgbClr val="C9CED6"/>
-                      </a:solidFill>
-                      <a:prstDash val="solid"/>
-                      <a:round/>
-                      <a:headEnd type="none" w="med" len="med"/>
-                      <a:tailEnd type="none" w="med" len="med"/>
-                    </a:lnT>
-                    <a:lnB w="9525" cap="flat" cmpd="sng" algn="ctr">
-                      <a:solidFill>
-                        <a:srgbClr val="C9CED6"/>
-                      </a:solidFill>
-                      <a:prstDash val="solid"/>
-                      <a:round/>
-                      <a:headEnd type="none" w="med" len="med"/>
-                      <a:tailEnd type="none" w="med" len="med"/>
-                    </a:lnB>
-                    <a:solidFill>
-                      <a:srgbClr val="EEF3F8"/>
-                    </a:solidFill>
-                  </a:tcPr>
-                </a:tc>
-                <a:tc>
-                  <a:txBody>
-                    <a:bodyPr/>
-                    <a:lstStyle/>
-                    <a:p>
-                      <a:pPr algn="l" indent="0" marL="0">
-                        <a:buNone/>
-                      </a:pPr>
-                      <a:r>
-                        <a:rPr lang="en-US" sz="1200" dirty="0">
-                          <a:solidFill>
-                            <a:srgbClr val="222222"/>
-                          </a:solidFill>
-                          <a:latin typeface="맑은 고딕" pitchFamily="34" charset="0"/>
-                          <a:ea typeface="맑은 고딕" pitchFamily="34" charset="-122"/>
-                          <a:cs typeface="맑은 고딕" pitchFamily="34" charset="-120"/>
-                        </a:rPr>
-                        <a:t>미국은 Validation 완료, 타 국가는 확인 필요</a:t>
-                      </a:r>
-                      <a:endParaRPr lang="en-US" sz="1200" dirty="0">
-                        <a:latin typeface="맑은 고딕" charset="0"/>
-                        <a:ea typeface="맑은 고딕" charset="0"/>
-                        <a:cs typeface="맑은 고딕" charset="0"/>
-                      </a:endParaRPr>
-                    </a:p>
-                  </a:txBody>
-                  <a:tcPr marL="109728" marR="109728" marT="45720" marB="45720" anchor="ctr">
-                    <a:lnL w="9525" cap="flat" cmpd="sng" algn="ctr">
-                      <a:solidFill>
-                        <a:srgbClr val="C9CED6"/>
-                      </a:solidFill>
-                      <a:prstDash val="solid"/>
-                      <a:round/>
-                      <a:headEnd type="none" w="med" len="med"/>
-                      <a:tailEnd type="none" w="med" len="med"/>
-                    </a:lnL>
-                    <a:lnR w="9525" cap="flat" cmpd="sng" algn="ctr">
-                      <a:solidFill>
-                        <a:srgbClr val="C9CED6"/>
-                      </a:solidFill>
-                      <a:prstDash val="solid"/>
-                      <a:round/>
-                      <a:headEnd type="none" w="med" len="med"/>
-                      <a:tailEnd type="none" w="med" len="med"/>
-                    </a:lnR>
-                    <a:lnT w="9525" cap="flat" cmpd="sng" algn="ctr">
-                      <a:solidFill>
-                        <a:srgbClr val="C9CED6"/>
-                      </a:solidFill>
-                      <a:prstDash val="solid"/>
-                      <a:round/>
-                      <a:headEnd type="none" w="med" len="med"/>
-                      <a:tailEnd type="none" w="med" len="med"/>
-                    </a:lnT>
-                    <a:lnB w="9525" cap="flat" cmpd="sng" algn="ctr">
-                      <a:solidFill>
-                        <a:srgbClr val="C9CED6"/>
-                      </a:solidFill>
-                      <a:prstDash val="solid"/>
-                      <a:round/>
-                      <a:headEnd type="none" w="med" len="med"/>
-                      <a:tailEnd type="none" w="med" len="med"/>
-                    </a:lnB>
-                  </a:tcPr>
-                </a:tc>
-              </a:tr>
-              <a:tr h="530352">
-                <a:tc>
-                  <a:txBody>
-                    <a:bodyPr/>
-                    <a:lstStyle/>
-                    <a:p>
-                      <a:pPr algn="l" indent="0" marL="0">
-                        <a:buNone/>
-                      </a:pPr>
-                      <a:r>
-                        <a:rPr lang="en-US" sz="1200" b="1" dirty="0">
-                          <a:solidFill>
-                            <a:srgbClr val="1B2241"/>
-                          </a:solidFill>
-                          <a:latin typeface="맑은 고딕" pitchFamily="34" charset="0"/>
-                          <a:ea typeface="맑은 고딕" pitchFamily="34" charset="-122"/>
-                          <a:cs typeface="맑은 고딕" pitchFamily="34" charset="-120"/>
-                        </a:rPr>
-                        <a:t>AT0810_Trocar</a:t>
-                      </a:r>
-                      <a:endParaRPr lang="en-US" sz="1200" dirty="0">
-                        <a:latin typeface="맑은 고딕" charset="0"/>
-                        <a:ea typeface="맑은 고딕" charset="0"/>
-                        <a:cs typeface="맑은 고딕" charset="0"/>
-                      </a:endParaRPr>
-                    </a:p>
-                  </a:txBody>
-                  <a:tcPr marL="109728" marR="109728" marT="45720" marB="45720" anchor="ctr">
-                    <a:lnL w="9525" cap="flat" cmpd="sng" algn="ctr">
-                      <a:solidFill>
-                        <a:srgbClr val="C9CED6"/>
-                      </a:solidFill>
-                      <a:prstDash val="solid"/>
-                      <a:round/>
-                      <a:headEnd type="none" w="med" len="med"/>
-                      <a:tailEnd type="none" w="med" len="med"/>
-                    </a:lnL>
-                    <a:lnR w="9525" cap="flat" cmpd="sng" algn="ctr">
-                      <a:solidFill>
-                        <a:srgbClr val="C9CED6"/>
-                      </a:solidFill>
-                      <a:prstDash val="solid"/>
-                      <a:round/>
-                      <a:headEnd type="none" w="med" len="med"/>
-                      <a:tailEnd type="none" w="med" len="med"/>
-                    </a:lnR>
-                    <a:lnT w="9525" cap="flat" cmpd="sng" algn="ctr">
-                      <a:solidFill>
-                        <a:srgbClr val="C9CED6"/>
-                      </a:solidFill>
-                      <a:prstDash val="solid"/>
-                      <a:round/>
-                      <a:headEnd type="none" w="med" len="med"/>
-                      <a:tailEnd type="none" w="med" len="med"/>
-                    </a:lnT>
-                    <a:lnB w="9525" cap="flat" cmpd="sng" algn="ctr">
-                      <a:solidFill>
-                        <a:srgbClr val="C9CED6"/>
-                      </a:solidFill>
-                      <a:prstDash val="solid"/>
-                      <a:round/>
-                      <a:headEnd type="none" w="med" len="med"/>
-                      <a:tailEnd type="none" w="med" len="med"/>
-                    </a:lnB>
-                    <a:solidFill>
-                      <a:srgbClr val="EEF3F8"/>
-                    </a:solidFill>
-                  </a:tcPr>
-                </a:tc>
-                <a:tc>
-                  <a:txBody>
-                    <a:bodyPr/>
-                    <a:lstStyle/>
-                    <a:p>
-                      <a:pPr algn="l" indent="0" marL="0">
-                        <a:buNone/>
-                      </a:pPr>
-                      <a:r>
-                        <a:rPr lang="en-US" sz="1200" dirty="0">
-                          <a:solidFill>
-                            <a:srgbClr val="222222"/>
-                          </a:solidFill>
-                          <a:latin typeface="맑은 고딕" pitchFamily="34" charset="0"/>
-                          <a:ea typeface="맑은 고딕" pitchFamily="34" charset="-122"/>
-                          <a:cs typeface="맑은 고딕" pitchFamily="34" charset="-120"/>
-                        </a:rPr>
-                        <a:t>이너 박스 5개 단위 → 5배수로 주문 필요, 전용 Outer Box(50개용) 사용</a:t>
-                      </a:r>
-                      <a:endParaRPr lang="en-US" sz="1200" dirty="0">
-                        <a:latin typeface="맑은 고딕" charset="0"/>
-                        <a:ea typeface="맑은 고딕" charset="0"/>
-                        <a:cs typeface="맑은 고딕" charset="0"/>
-                      </a:endParaRPr>
-                    </a:p>
-                  </a:txBody>
-                  <a:tcPr marL="109728" marR="109728" marT="45720" marB="45720" anchor="ctr">
-                    <a:lnL w="9525" cap="flat" cmpd="sng" algn="ctr">
-                      <a:solidFill>
-                        <a:srgbClr val="C9CED6"/>
-                      </a:solidFill>
-                      <a:prstDash val="solid"/>
-                      <a:round/>
-                      <a:headEnd type="none" w="med" len="med"/>
-                      <a:tailEnd type="none" w="med" len="med"/>
-                    </a:lnL>
-                    <a:lnR w="9525" cap="flat" cmpd="sng" algn="ctr">
-                      <a:solidFill>
-                        <a:srgbClr val="C9CED6"/>
-                      </a:solidFill>
-                      <a:prstDash val="solid"/>
-                      <a:round/>
-                      <a:headEnd type="none" w="med" len="med"/>
-                      <a:tailEnd type="none" w="med" len="med"/>
-                    </a:lnR>
-                    <a:lnT w="9525" cap="flat" cmpd="sng" algn="ctr">
-                      <a:solidFill>
-                        <a:srgbClr val="C9CED6"/>
-                      </a:solidFill>
-                      <a:prstDash val="solid"/>
-                      <a:round/>
-                      <a:headEnd type="none" w="med" len="med"/>
-                      <a:tailEnd type="none" w="med" len="med"/>
-                    </a:lnT>
-                    <a:lnB w="9525" cap="flat" cmpd="sng" algn="ctr">
-                      <a:solidFill>
-                        <a:srgbClr val="C9CED6"/>
-                      </a:solidFill>
-                      <a:prstDash val="solid"/>
-                      <a:round/>
-                      <a:headEnd type="none" w="med" len="med"/>
-                      <a:tailEnd type="none" w="med" len="med"/>
-                    </a:lnB>
-                  </a:tcPr>
-                </a:tc>
-              </a:tr>
-              <a:tr h="530352">
-                <a:tc>
-                  <a:txBody>
-                    <a:bodyPr/>
-                    <a:lstStyle/>
-                    <a:p>
-                      <a:pPr algn="l" indent="0" marL="0">
-                        <a:buNone/>
-                      </a:pPr>
-                      <a:r>
-                        <a:rPr lang="en-US" sz="1200" b="1" dirty="0">
-                          <a:solidFill>
-                            <a:srgbClr val="1B2241"/>
-                          </a:solidFill>
-                          <a:latin typeface="맑은 고딕" pitchFamily="34" charset="0"/>
-                          <a:ea typeface="맑은 고딕" pitchFamily="34" charset="-122"/>
-                          <a:cs typeface="맑은 고딕" pitchFamily="34" charset="-120"/>
-                        </a:rPr>
-                        <a:t>TK-04 (Training Kit)</a:t>
-                      </a:r>
-                      <a:endParaRPr lang="en-US" sz="1200" dirty="0">
-                        <a:latin typeface="맑은 고딕" charset="0"/>
-                        <a:ea typeface="맑은 고딕" charset="0"/>
-                        <a:cs typeface="맑은 고딕" charset="0"/>
-                      </a:endParaRPr>
-                    </a:p>
-                  </a:txBody>
-                  <a:tcPr marL="109728" marR="109728" marT="45720" marB="45720" anchor="ctr">
-                    <a:lnL w="9525" cap="flat" cmpd="sng" algn="ctr">
-                      <a:solidFill>
-                        <a:srgbClr val="C9CED6"/>
-                      </a:solidFill>
-                      <a:prstDash val="solid"/>
-                      <a:round/>
-                      <a:headEnd type="none" w="med" len="med"/>
-                      <a:tailEnd type="none" w="med" len="med"/>
-                    </a:lnL>
-                    <a:lnR w="9525" cap="flat" cmpd="sng" algn="ctr">
-                      <a:solidFill>
-                        <a:srgbClr val="C9CED6"/>
-                      </a:solidFill>
-                      <a:prstDash val="solid"/>
-                      <a:round/>
-                      <a:headEnd type="none" w="med" len="med"/>
-                      <a:tailEnd type="none" w="med" len="med"/>
-                    </a:lnR>
-                    <a:lnT w="9525" cap="flat" cmpd="sng" algn="ctr">
-                      <a:solidFill>
-                        <a:srgbClr val="C9CED6"/>
-                      </a:solidFill>
-                      <a:prstDash val="solid"/>
-                      <a:round/>
-                      <a:headEnd type="none" w="med" len="med"/>
-                      <a:tailEnd type="none" w="med" len="med"/>
-                    </a:lnT>
-                    <a:lnB w="9525" cap="flat" cmpd="sng" algn="ctr">
-                      <a:solidFill>
-                        <a:srgbClr val="C9CED6"/>
-                      </a:solidFill>
-                      <a:prstDash val="solid"/>
-                      <a:round/>
-                      <a:headEnd type="none" w="med" len="med"/>
-                      <a:tailEnd type="none" w="med" len="med"/>
-                    </a:lnB>
-                    <a:solidFill>
-                      <a:srgbClr val="EEF3F8"/>
-                    </a:solidFill>
-                  </a:tcPr>
-                </a:tc>
-                <a:tc>
-                  <a:txBody>
-                    <a:bodyPr/>
-                    <a:lstStyle/>
-                    <a:p>
-                      <a:pPr algn="l" indent="0" marL="0">
-                        <a:buNone/>
-                      </a:pPr>
-                      <a:r>
-                        <a:rPr lang="en-US" sz="1200" dirty="0">
-                          <a:solidFill>
-                            <a:srgbClr val="222222"/>
-                          </a:solidFill>
-                          <a:latin typeface="맑은 고딕" pitchFamily="34" charset="0"/>
-                          <a:ea typeface="맑은 고딕" pitchFamily="34" charset="-122"/>
-                          <a:cs typeface="맑은 고딕" pitchFamily="34" charset="-120"/>
-                        </a:rPr>
-                        <a:t>별도 아우터 박스 없이 ArtiSential 5개용(Max 6) / 10개용(Max 12) 박스 사용</a:t>
-                      </a:r>
-                      <a:endParaRPr lang="en-US" sz="1200" dirty="0">
-                        <a:latin typeface="맑은 고딕" charset="0"/>
-                        <a:ea typeface="맑은 고딕" charset="0"/>
-                        <a:cs typeface="맑은 고딕" charset="0"/>
-                      </a:endParaRPr>
-                    </a:p>
-                  </a:txBody>
-                  <a:tcPr marL="109728" marR="109728" marT="45720" marB="45720" anchor="ctr">
-                    <a:lnL w="9525" cap="flat" cmpd="sng" algn="ctr">
-                      <a:solidFill>
-                        <a:srgbClr val="C9CED6"/>
-                      </a:solidFill>
-                      <a:prstDash val="solid"/>
-                      <a:round/>
-                      <a:headEnd type="none" w="med" len="med"/>
-                      <a:tailEnd type="none" w="med" len="med"/>
-                    </a:lnL>
-                    <a:lnR w="9525" cap="flat" cmpd="sng" algn="ctr">
-                      <a:solidFill>
-                        <a:srgbClr val="C9CED6"/>
-                      </a:solidFill>
-                      <a:prstDash val="solid"/>
-                      <a:round/>
-                      <a:headEnd type="none" w="med" len="med"/>
-                      <a:tailEnd type="none" w="med" len="med"/>
-                    </a:lnR>
-                    <a:lnT w="9525" cap="flat" cmpd="sng" algn="ctr">
-                      <a:solidFill>
-                        <a:srgbClr val="C9CED6"/>
-                      </a:solidFill>
-                      <a:prstDash val="solid"/>
-                      <a:round/>
-                      <a:headEnd type="none" w="med" len="med"/>
-                      <a:tailEnd type="none" w="med" len="med"/>
-                    </a:lnT>
-                    <a:lnB w="9525" cap="flat" cmpd="sng" algn="ctr">
-                      <a:solidFill>
-                        <a:srgbClr val="C9CED6"/>
-                      </a:solidFill>
-                      <a:prstDash val="solid"/>
-                      <a:round/>
-                      <a:headEnd type="none" w="med" len="med"/>
-                      <a:tailEnd type="none" w="med" len="med"/>
-                    </a:lnB>
-                  </a:tcPr>
-                </a:tc>
-              </a:tr>
-            </a:tbl>
-          </a:graphicData>
-        </a:graphic>
-      </p:graphicFrame>
-    </p:spTree>
-  </p:cSld>
-  <p:clrMapOvr>
-    <a:masterClrMapping/>
-  </p:clrMapOvr>
-</p:sld>
-</file>
-
 <file path=ppt/slides/slide2.xml><?xml version="1.0" encoding="utf-8"?>
 <p:sld xmlns:a="http://schemas.openxmlformats.org/drawingml/2006/main" xmlns:r="http://schemas.openxmlformats.org/officeDocument/2006/relationships" xmlns:p="http://schemas.openxmlformats.org/presentationml/2006/main">
   <p:cSld name="Slide 2">
-    <p:bg>
-      <p:bgPr>
-        <a:solidFill>
-          <a:srgbClr val="FFFFFF"/>
-        </a:solidFill>
-      </p:bgPr>
-    </p:bg>
-    <p:spTree>
-      <p:nvGrpSpPr>
-        <p:cNvPr id="1" name=""/>
-        <p:cNvGrpSpPr/>
-        <p:nvPr/>
-      </p:nvGrpSpPr>
-      <p:grpSpPr>
-        <a:xfrm>
-          <a:off x="0" y="0"/>
-          <a:ext cx="0" cy="0"/>
-          <a:chOff x="0" y="0"/>
-          <a:chExt cx="0" cy="0"/>
-        </a:xfrm>
-      </p:grpSpPr>
-      <p:sp>
-        <p:nvSpPr>
-          <p:cNvPr id="2" name="Text 0"/>
-          <p:cNvSpPr/>
-          <p:nvPr/>
-        </p:nvSpPr>
-        <p:spPr>
-          <a:xfrm>
-            <a:off x="548640" y="347472"/>
-            <a:ext cx="7315200" cy="274320"/>
-          </a:xfrm>
-          <a:prstGeom prst="rect">
-            <a:avLst/>
-          </a:prstGeom>
-          <a:noFill/>
-          <a:ln/>
-        </p:spPr>
-        <p:txBody>
-          <a:bodyPr wrap="square" lIns="0" tIns="0" rIns="0" bIns="0" rtlCol="0" anchor="ctr"/>
-          <a:lstStyle/>
-          <a:p>
-            <a:pPr indent="0" marL="0">
-              <a:buNone/>
-            </a:pPr>
-            <a:r>
-              <a:rPr lang="en-US" sz="1100" b="1" dirty="0">
-                <a:solidFill>
-                  <a:srgbClr val="5B9BCB"/>
-                </a:solidFill>
-                <a:latin typeface="맑은 고딕" pitchFamily="34" charset="0"/>
-                <a:ea typeface="맑은 고딕" pitchFamily="34" charset="-122"/>
-                <a:cs typeface="맑은 고딕" pitchFamily="34" charset="-120"/>
-              </a:rPr>
-              <a:t>OJT 개요</a:t>
-            </a:r>
-            <a:endParaRPr lang="en-US" sz="1100" dirty="0"/>
-          </a:p>
-        </p:txBody>
-      </p:sp>
-      <p:sp>
-        <p:nvSpPr>
-          <p:cNvPr id="3" name="Text 1"/>
-          <p:cNvSpPr/>
-          <p:nvPr/>
-        </p:nvSpPr>
-        <p:spPr>
-          <a:xfrm>
-            <a:off x="548640" y="621792"/>
-            <a:ext cx="10972800" cy="502920"/>
-          </a:xfrm>
-          <a:prstGeom prst="rect">
-            <a:avLst/>
-          </a:prstGeom>
-          <a:noFill/>
-          <a:ln/>
-        </p:spPr>
-        <p:txBody>
-          <a:bodyPr wrap="square" lIns="0" tIns="0" rIns="0" bIns="0" rtlCol="0" anchor="ctr"/>
-          <a:lstStyle/>
-          <a:p>
-            <a:pPr indent="0" marL="0">
-              <a:buNone/>
-            </a:pPr>
-            <a:r>
-              <a:rPr lang="en-US" sz="2400" b="1" dirty="0">
-                <a:solidFill>
-                  <a:srgbClr val="1B2241"/>
-                </a:solidFill>
-                <a:latin typeface="맑은 고딕" pitchFamily="34" charset="0"/>
-                <a:ea typeface="맑은 고딕" pitchFamily="34" charset="-122"/>
-                <a:cs typeface="맑은 고딕" pitchFamily="34" charset="-120"/>
-              </a:rPr>
-              <a:t>OJT 교육의 목적</a:t>
-            </a:r>
-            <a:endParaRPr lang="en-US" sz="2400" dirty="0"/>
-          </a:p>
-        </p:txBody>
-      </p:sp>
-      <p:sp>
-        <p:nvSpPr>
-          <p:cNvPr id="4" name="Shape 2"/>
-          <p:cNvSpPr/>
-          <p:nvPr/>
-        </p:nvSpPr>
-        <p:spPr>
-          <a:xfrm>
-            <a:off x="548640" y="1261872"/>
-            <a:ext cx="11094415" cy="0"/>
-          </a:xfrm>
-          <a:prstGeom prst="line">
-            <a:avLst/>
-          </a:prstGeom>
-          <a:noFill/>
-          <a:ln w="15875">
-            <a:solidFill>
-              <a:srgbClr val="1B2241"/>
-            </a:solidFill>
-            <a:prstDash val="solid"/>
-          </a:ln>
-        </p:spPr>
-      </p:sp>
-      <p:sp>
-        <p:nvSpPr>
-          <p:cNvPr id="5" name="Text 3"/>
-          <p:cNvSpPr/>
-          <p:nvPr/>
-        </p:nvSpPr>
-        <p:spPr>
-          <a:xfrm>
-            <a:off x="548640" y="6446520"/>
-            <a:ext cx="5486400" cy="228600"/>
-          </a:xfrm>
-          <a:prstGeom prst="rect">
-            <a:avLst/>
-          </a:prstGeom>
-          <a:noFill/>
-          <a:ln/>
-        </p:spPr>
-        <p:txBody>
-          <a:bodyPr wrap="square" lIns="0" tIns="0" rIns="0" bIns="0" rtlCol="0" anchor="ctr"/>
-          <a:lstStyle/>
-          <a:p>
-            <a:pPr indent="0" marL="0">
-              <a:buNone/>
-            </a:pPr>
-            <a:r>
-              <a:rPr lang="en-US" sz="900" dirty="0">
-                <a:solidFill>
-                  <a:srgbClr val="6B7280"/>
-                </a:solidFill>
-                <a:latin typeface="맑은 고딕" pitchFamily="34" charset="0"/>
-                <a:ea typeface="맑은 고딕" pitchFamily="34" charset="-122"/>
-                <a:cs typeface="맑은 고딕" pitchFamily="34" charset="-120"/>
-              </a:rPr>
-              <a:t>해외영업관리팀 OJT  |  Export Packaging</a:t>
-            </a:r>
-            <a:endParaRPr lang="en-US" sz="900" dirty="0"/>
-          </a:p>
-        </p:txBody>
-      </p:sp>
-      <p:sp>
-        <p:nvSpPr>
-          <p:cNvPr id="6" name="Text 4"/>
-          <p:cNvSpPr/>
-          <p:nvPr/>
-        </p:nvSpPr>
-        <p:spPr>
-          <a:xfrm>
-            <a:off x="11277295" y="6446520"/>
-            <a:ext cx="365760" cy="228600"/>
-          </a:xfrm>
-          <a:prstGeom prst="rect">
-            <a:avLst/>
-          </a:prstGeom>
-          <a:noFill/>
-          <a:ln/>
-        </p:spPr>
-        <p:txBody>
-          <a:bodyPr wrap="square" lIns="0" tIns="0" rIns="0" bIns="0" rtlCol="0" anchor="ctr"/>
-          <a:lstStyle/>
-          <a:p>
-            <a:pPr algn="r" indent="0" marL="0">
-              <a:buNone/>
-            </a:pPr>
-            <a:r>
-              <a:rPr lang="en-US" sz="900" dirty="0">
-                <a:solidFill>
-                  <a:srgbClr val="6B7280"/>
-                </a:solidFill>
-                <a:latin typeface="맑은 고딕" pitchFamily="34" charset="0"/>
-                <a:ea typeface="맑은 고딕" pitchFamily="34" charset="-122"/>
-                <a:cs typeface="맑은 고딕" pitchFamily="34" charset="-120"/>
-              </a:rPr>
-              <a:t>2</a:t>
-            </a:r>
-            <a:endParaRPr lang="en-US" sz="900" dirty="0"/>
-          </a:p>
-        </p:txBody>
-      </p:sp>
-      <p:pic>
-        <p:nvPicPr>
-          <p:cNvPr id="7" name="Image 0" descr="C:/Users/cjswl/OneDrive/문서/GitHub/packing-information/리브스메드 로고.png">    </p:cNvPr>
-          <p:cNvPicPr>
-            <a:picLocks noChangeAspect="1"/>
-          </p:cNvPicPr>
-          <p:nvPr/>
-        </p:nvPicPr>
-        <p:blipFill>
-          <a:blip r:embed="rId1"/>
-          <a:stretch>
-            <a:fillRect/>
-          </a:stretch>
-        </p:blipFill>
-        <p:spPr>
-          <a:xfrm>
-            <a:off x="9859975" y="6409149"/>
-            <a:ext cx="1234440" cy="257622"/>
-          </a:xfrm>
-          <a:prstGeom prst="rect">
-            <a:avLst/>
-          </a:prstGeom>
-        </p:spPr>
-      </p:pic>
-      <p:sp>
-        <p:nvSpPr>
-          <p:cNvPr id="8" name="Text 5"/>
-          <p:cNvSpPr/>
-          <p:nvPr/>
-        </p:nvSpPr>
-        <p:spPr>
-          <a:xfrm>
-            <a:off x="548640" y="1600200"/>
-            <a:ext cx="5303520" cy="365760"/>
-          </a:xfrm>
-          <a:prstGeom prst="rect">
-            <a:avLst/>
-          </a:prstGeom>
-          <a:noFill/>
-          <a:ln/>
-        </p:spPr>
-        <p:txBody>
-          <a:bodyPr wrap="square" lIns="0" tIns="0" rIns="0" bIns="0" rtlCol="0" anchor="ctr"/>
-          <a:lstStyle/>
-          <a:p>
-            <a:pPr indent="0" marL="0">
-              <a:buNone/>
-            </a:pPr>
-            <a:r>
-              <a:rPr lang="en-US" sz="1600" b="1" dirty="0">
-                <a:solidFill>
-                  <a:srgbClr val="1B2241"/>
-                </a:solidFill>
-                <a:latin typeface="맑은 고딕" pitchFamily="34" charset="0"/>
-                <a:ea typeface="맑은 고딕" pitchFamily="34" charset="-122"/>
-                <a:cs typeface="맑은 고딕" pitchFamily="34" charset="-120"/>
-              </a:rPr>
-              <a:t>교육의 필요성</a:t>
-            </a:r>
-            <a:endParaRPr lang="en-US" sz="1600" dirty="0"/>
-          </a:p>
-        </p:txBody>
-      </p:sp>
-      <p:sp>
-        <p:nvSpPr>
-          <p:cNvPr id="9" name="Text 6"/>
-          <p:cNvSpPr/>
-          <p:nvPr/>
-        </p:nvSpPr>
-        <p:spPr>
-          <a:xfrm>
-            <a:off x="548640" y="2057400"/>
-            <a:ext cx="5303520" cy="2011680"/>
-          </a:xfrm>
-          <a:prstGeom prst="rect">
-            <a:avLst/>
-          </a:prstGeom>
-          <a:noFill/>
-          <a:ln/>
-        </p:spPr>
-        <p:txBody>
-          <a:bodyPr wrap="square" lIns="0" tIns="0" rIns="0" bIns="0" rtlCol="0" anchor="t"/>
-          <a:lstStyle/>
-          <a:p>
-            <a:pPr indent="0" marL="0">
-              <a:lnSpc>
-                <a:spcPct val="135000"/>
-              </a:lnSpc>
-              <a:buNone/>
-            </a:pPr>
-            <a:r>
-              <a:rPr lang="en-US" sz="1400" dirty="0">
-                <a:solidFill>
-                  <a:srgbClr val="222222"/>
-                </a:solidFill>
-                <a:latin typeface="맑은 고딕" pitchFamily="34" charset="0"/>
-                <a:ea typeface="맑은 고딕" pitchFamily="34" charset="-122"/>
-                <a:cs typeface="맑은 고딕" pitchFamily="34" charset="-120"/>
-              </a:rPr>
-              <a:t>당사 의료기기 제품군은 중량 대비 부피가 큰 </a:t>
-            </a:r>
-            <a:pPr indent="0" marL="0">
-              <a:lnSpc>
-                <a:spcPct val="135000"/>
-              </a:lnSpc>
-              <a:buNone/>
-            </a:pPr>
-            <a:r>
-              <a:rPr lang="en-US" sz="1400" b="1" dirty="0">
-                <a:solidFill>
-                  <a:srgbClr val="1B2241"/>
-                </a:solidFill>
-                <a:latin typeface="맑은 고딕" pitchFamily="34" charset="0"/>
-                <a:ea typeface="맑은 고딕" pitchFamily="34" charset="-122"/>
-                <a:cs typeface="맑은 고딕" pitchFamily="34" charset="-120"/>
-              </a:rPr>
-              <a:t>부피화물(Volume Cargo)</a:t>
-            </a:r>
-            <a:pPr indent="0" marL="0">
-              <a:lnSpc>
-                <a:spcPct val="135000"/>
-              </a:lnSpc>
-              <a:buNone/>
-            </a:pPr>
-            <a:r>
-              <a:rPr lang="en-US" sz="1400" dirty="0">
-                <a:solidFill>
-                  <a:srgbClr val="222222"/>
-                </a:solidFill>
-                <a:latin typeface="맑은 고딕" pitchFamily="34" charset="0"/>
-                <a:ea typeface="맑은 고딕" pitchFamily="34" charset="-122"/>
-                <a:cs typeface="맑은 고딕" pitchFamily="34" charset="-120"/>
-              </a:rPr>
-              <a:t>입니다.</a:t>
-            </a:r>
-            <a:endParaRPr lang="en-US" sz="1400" dirty="0"/>
-          </a:p>
-          <a:p>
-            <a:pPr indent="0" marL="0">
-              <a:lnSpc>
-                <a:spcPct val="135000"/>
-              </a:lnSpc>
-              <a:buNone/>
-            </a:pPr>
-            <a:r>
-              <a:rPr lang="en-US" sz="800" dirty="0">
-                <a:solidFill>
-                  <a:srgbClr val="222222"/>
-                </a:solidFill>
-                <a:latin typeface="맑은 고딕" pitchFamily="34" charset="0"/>
-                <a:ea typeface="맑은 고딕" pitchFamily="34" charset="-122"/>
-                <a:cs typeface="맑은 고딕" pitchFamily="34" charset="-120"/>
-              </a:rPr>
-              <a:t> </a:t>
-            </a:r>
-            <a:endParaRPr lang="en-US" sz="1400" dirty="0"/>
-          </a:p>
-          <a:p>
-            <a:pPr indent="0" marL="0">
-              <a:lnSpc>
-                <a:spcPct val="135000"/>
-              </a:lnSpc>
-              <a:buNone/>
-            </a:pPr>
-            <a:r>
-              <a:rPr lang="en-US" sz="1400" dirty="0">
-                <a:solidFill>
-                  <a:srgbClr val="222222"/>
-                </a:solidFill>
-                <a:latin typeface="맑은 고딕" pitchFamily="34" charset="0"/>
-                <a:ea typeface="맑은 고딕" pitchFamily="34" charset="-122"/>
-                <a:cs typeface="맑은 고딕" pitchFamily="34" charset="-120"/>
-              </a:rPr>
-              <a:t>제품 무게만으로 운송을 안내하면 고객사·포워더 견적에서 운임 오차가 크게 발생합니다. 박스 규격, CBM, 적재 스펙을 정확히 알고 있어야 PI 단계에서 물류비를 맞게 안내할 수 있습니다.</a:t>
-            </a:r>
-            <a:endParaRPr lang="en-US" sz="1400" dirty="0"/>
-          </a:p>
-        </p:txBody>
-      </p:sp>
-      <p:sp>
-        <p:nvSpPr>
-          <p:cNvPr id="10" name="Shape 7"/>
-          <p:cNvSpPr/>
-          <p:nvPr/>
-        </p:nvSpPr>
-        <p:spPr>
-          <a:xfrm>
-            <a:off x="6263640" y="1645920"/>
-            <a:ext cx="0" cy="4206240"/>
-          </a:xfrm>
-          <a:prstGeom prst="line">
-            <a:avLst/>
-          </a:prstGeom>
-          <a:noFill/>
-          <a:ln w="12700">
-            <a:solidFill>
-              <a:srgbClr val="C9CED6"/>
-            </a:solidFill>
-            <a:prstDash val="solid"/>
-          </a:ln>
-        </p:spPr>
-      </p:sp>
-      <p:sp>
-        <p:nvSpPr>
-          <p:cNvPr id="11" name="Text 8"/>
-          <p:cNvSpPr/>
-          <p:nvPr/>
-        </p:nvSpPr>
-        <p:spPr>
-          <a:xfrm>
-            <a:off x="6675120" y="1600200"/>
-            <a:ext cx="4937760" cy="365760"/>
-          </a:xfrm>
-          <a:prstGeom prst="rect">
-            <a:avLst/>
-          </a:prstGeom>
-          <a:noFill/>
-          <a:ln/>
-        </p:spPr>
-        <p:txBody>
-          <a:bodyPr wrap="square" lIns="0" tIns="0" rIns="0" bIns="0" rtlCol="0" anchor="ctr"/>
-          <a:lstStyle/>
-          <a:p>
-            <a:pPr indent="0" marL="0">
-              <a:buNone/>
-            </a:pPr>
-            <a:r>
-              <a:rPr lang="en-US" sz="1600" b="1" dirty="0">
-                <a:solidFill>
-                  <a:srgbClr val="1B2241"/>
-                </a:solidFill>
-                <a:latin typeface="맑은 고딕" pitchFamily="34" charset="0"/>
-                <a:ea typeface="맑은 고딕" pitchFamily="34" charset="-122"/>
-                <a:cs typeface="맑은 고딕" pitchFamily="34" charset="-120"/>
-              </a:rPr>
-              <a:t>핵심 학습 목표</a:t>
-            </a:r>
-            <a:endParaRPr lang="en-US" sz="1600" dirty="0"/>
-          </a:p>
-        </p:txBody>
-      </p:sp>
-      <p:sp>
-        <p:nvSpPr>
-          <p:cNvPr id="12" name="Text 9"/>
-          <p:cNvSpPr/>
-          <p:nvPr/>
-        </p:nvSpPr>
-        <p:spPr>
-          <a:xfrm>
-            <a:off x="6675120" y="2103120"/>
-            <a:ext cx="640080" cy="548640"/>
-          </a:xfrm>
-          <a:prstGeom prst="rect">
-            <a:avLst/>
-          </a:prstGeom>
-          <a:noFill/>
-          <a:ln/>
-        </p:spPr>
-        <p:txBody>
-          <a:bodyPr wrap="square" lIns="0" tIns="0" rIns="0" bIns="0" rtlCol="0" anchor="ctr"/>
-          <a:lstStyle/>
-          <a:p>
-            <a:pPr indent="0" marL="0">
-              <a:buNone/>
-            </a:pPr>
-            <a:r>
-              <a:rPr lang="en-US" sz="2200" b="1" dirty="0">
-                <a:solidFill>
-                  <a:srgbClr val="5B9BCB"/>
-                </a:solidFill>
-                <a:latin typeface="맑은 고딕" pitchFamily="34" charset="0"/>
-                <a:ea typeface="맑은 고딕" pitchFamily="34" charset="-122"/>
-                <a:cs typeface="맑은 고딕" pitchFamily="34" charset="-120"/>
-              </a:rPr>
-              <a:t>01</a:t>
-            </a:r>
-            <a:endParaRPr lang="en-US" sz="2200" dirty="0"/>
-          </a:p>
-        </p:txBody>
-      </p:sp>
-      <p:sp>
-        <p:nvSpPr>
-          <p:cNvPr id="13" name="Text 10"/>
-          <p:cNvSpPr/>
-          <p:nvPr/>
-        </p:nvSpPr>
-        <p:spPr>
-          <a:xfrm>
-            <a:off x="7360920" y="2103120"/>
-            <a:ext cx="4297680" cy="548640"/>
-          </a:xfrm>
-          <a:prstGeom prst="rect">
-            <a:avLst/>
-          </a:prstGeom>
-          <a:noFill/>
-          <a:ln/>
-        </p:spPr>
-        <p:txBody>
-          <a:bodyPr wrap="square" lIns="0" tIns="0" rIns="0" bIns="0" rtlCol="0" anchor="ctr"/>
-          <a:lstStyle/>
-          <a:p>
-            <a:pPr indent="0" marL="0">
-              <a:buNone/>
-            </a:pPr>
-            <a:r>
-              <a:rPr lang="en-US" sz="1500" b="1" dirty="0">
-                <a:solidFill>
-                  <a:srgbClr val="222222"/>
-                </a:solidFill>
-                <a:latin typeface="맑은 고딕" pitchFamily="34" charset="0"/>
-                <a:ea typeface="맑은 고딕" pitchFamily="34" charset="-122"/>
-                <a:cs typeface="맑은 고딕" pitchFamily="34" charset="-120"/>
-              </a:rPr>
-              <a:t>당사 패킹 관련 기초 정보 숙지</a:t>
-            </a:r>
-            <a:endParaRPr lang="en-US" sz="1500" dirty="0"/>
-          </a:p>
-        </p:txBody>
-      </p:sp>
-      <p:sp>
-        <p:nvSpPr>
-          <p:cNvPr id="14" name="Shape 11"/>
-          <p:cNvSpPr/>
-          <p:nvPr/>
-        </p:nvSpPr>
-        <p:spPr>
-          <a:xfrm>
-            <a:off x="6675120" y="2880360"/>
-            <a:ext cx="4937760" cy="0"/>
-          </a:xfrm>
-          <a:prstGeom prst="line">
-            <a:avLst/>
-          </a:prstGeom>
-          <a:noFill/>
-          <a:ln w="9525">
-            <a:solidFill>
-              <a:srgbClr val="C9CED6"/>
-            </a:solidFill>
-            <a:prstDash val="dash"/>
-          </a:ln>
-        </p:spPr>
-      </p:sp>
-      <p:sp>
-        <p:nvSpPr>
-          <p:cNvPr id="15" name="Text 12"/>
-          <p:cNvSpPr/>
-          <p:nvPr/>
-        </p:nvSpPr>
-        <p:spPr>
-          <a:xfrm>
-            <a:off x="6675120" y="3063240"/>
-            <a:ext cx="640080" cy="548640"/>
-          </a:xfrm>
-          <a:prstGeom prst="rect">
-            <a:avLst/>
-          </a:prstGeom>
-          <a:noFill/>
-          <a:ln/>
-        </p:spPr>
-        <p:txBody>
-          <a:bodyPr wrap="square" lIns="0" tIns="0" rIns="0" bIns="0" rtlCol="0" anchor="ctr"/>
-          <a:lstStyle/>
-          <a:p>
-            <a:pPr indent="0" marL="0">
-              <a:buNone/>
-            </a:pPr>
-            <a:r>
-              <a:rPr lang="en-US" sz="2200" b="1" dirty="0">
-                <a:solidFill>
-                  <a:srgbClr val="5B9BCB"/>
-                </a:solidFill>
-                <a:latin typeface="맑은 고딕" pitchFamily="34" charset="0"/>
-                <a:ea typeface="맑은 고딕" pitchFamily="34" charset="-122"/>
-                <a:cs typeface="맑은 고딕" pitchFamily="34" charset="-120"/>
-              </a:rPr>
-              <a:t>02</a:t>
-            </a:r>
-            <a:endParaRPr lang="en-US" sz="2200" dirty="0"/>
-          </a:p>
-        </p:txBody>
-      </p:sp>
-      <p:sp>
-        <p:nvSpPr>
-          <p:cNvPr id="16" name="Text 13"/>
-          <p:cNvSpPr/>
-          <p:nvPr/>
-        </p:nvSpPr>
-        <p:spPr>
-          <a:xfrm>
-            <a:off x="7360920" y="3063240"/>
-            <a:ext cx="4297680" cy="548640"/>
-          </a:xfrm>
-          <a:prstGeom prst="rect">
-            <a:avLst/>
-          </a:prstGeom>
-          <a:noFill/>
-          <a:ln/>
-        </p:spPr>
-        <p:txBody>
-          <a:bodyPr wrap="square" lIns="0" tIns="0" rIns="0" bIns="0" rtlCol="0" anchor="ctr"/>
-          <a:lstStyle/>
-          <a:p>
-            <a:pPr indent="0" marL="0">
-              <a:buNone/>
-            </a:pPr>
-            <a:r>
-              <a:rPr lang="en-US" sz="1500" b="1" dirty="0">
-                <a:solidFill>
-                  <a:srgbClr val="222222"/>
-                </a:solidFill>
-                <a:latin typeface="맑은 고딕" pitchFamily="34" charset="0"/>
-                <a:ea typeface="맑은 고딕" pitchFamily="34" charset="-122"/>
-                <a:cs typeface="맑은 고딕" pitchFamily="34" charset="-120"/>
-              </a:rPr>
-              <a:t>PI 단계의 수주 효율화 및 바이어 물류비 최적화</a:t>
-            </a:r>
-            <a:endParaRPr lang="en-US" sz="1500" dirty="0"/>
-          </a:p>
-        </p:txBody>
-      </p:sp>
-      <p:sp>
-        <p:nvSpPr>
-          <p:cNvPr id="17" name="Shape 14"/>
-          <p:cNvSpPr/>
-          <p:nvPr/>
-        </p:nvSpPr>
-        <p:spPr>
-          <a:xfrm>
-            <a:off x="6675120" y="3840480"/>
-            <a:ext cx="4937760" cy="0"/>
-          </a:xfrm>
-          <a:prstGeom prst="line">
-            <a:avLst/>
-          </a:prstGeom>
-          <a:noFill/>
-          <a:ln w="9525">
-            <a:solidFill>
-              <a:srgbClr val="C9CED6"/>
-            </a:solidFill>
-            <a:prstDash val="dash"/>
-          </a:ln>
-        </p:spPr>
-      </p:sp>
-      <p:sp>
-        <p:nvSpPr>
-          <p:cNvPr id="18" name="Text 15"/>
-          <p:cNvSpPr/>
-          <p:nvPr/>
-        </p:nvSpPr>
-        <p:spPr>
-          <a:xfrm>
-            <a:off x="6675120" y="4023360"/>
-            <a:ext cx="640080" cy="548640"/>
-          </a:xfrm>
-          <a:prstGeom prst="rect">
-            <a:avLst/>
-          </a:prstGeom>
-          <a:noFill/>
-          <a:ln/>
-        </p:spPr>
-        <p:txBody>
-          <a:bodyPr wrap="square" lIns="0" tIns="0" rIns="0" bIns="0" rtlCol="0" anchor="ctr"/>
-          <a:lstStyle/>
-          <a:p>
-            <a:pPr indent="0" marL="0">
-              <a:buNone/>
-            </a:pPr>
-            <a:r>
-              <a:rPr lang="en-US" sz="2200" b="1" dirty="0">
-                <a:solidFill>
-                  <a:srgbClr val="5B9BCB"/>
-                </a:solidFill>
-                <a:latin typeface="맑은 고딕" pitchFamily="34" charset="0"/>
-                <a:ea typeface="맑은 고딕" pitchFamily="34" charset="-122"/>
-                <a:cs typeface="맑은 고딕" pitchFamily="34" charset="-120"/>
-              </a:rPr>
-              <a:t>03</a:t>
-            </a:r>
-            <a:endParaRPr lang="en-US" sz="2200" dirty="0"/>
-          </a:p>
-        </p:txBody>
-      </p:sp>
-      <p:sp>
-        <p:nvSpPr>
-          <p:cNvPr id="19" name="Text 16"/>
-          <p:cNvSpPr/>
-          <p:nvPr/>
-        </p:nvSpPr>
-        <p:spPr>
-          <a:xfrm>
-            <a:off x="7360920" y="4023360"/>
-            <a:ext cx="4297680" cy="548640"/>
-          </a:xfrm>
-          <a:prstGeom prst="rect">
-            <a:avLst/>
-          </a:prstGeom>
-          <a:noFill/>
-          <a:ln/>
-        </p:spPr>
-        <p:txBody>
-          <a:bodyPr wrap="square" lIns="0" tIns="0" rIns="0" bIns="0" rtlCol="0" anchor="ctr"/>
-          <a:lstStyle/>
-          <a:p>
-            <a:pPr indent="0" marL="0">
-              <a:buNone/>
-            </a:pPr>
-            <a:r>
-              <a:rPr lang="en-US" sz="1500" b="1" dirty="0">
-                <a:solidFill>
-                  <a:srgbClr val="222222"/>
-                </a:solidFill>
-                <a:latin typeface="맑은 고딕" pitchFamily="34" charset="0"/>
-                <a:ea typeface="맑은 고딕" pitchFamily="34" charset="-122"/>
-                <a:cs typeface="맑은 고딕" pitchFamily="34" charset="-120"/>
-              </a:rPr>
-              <a:t>부피화물(Volume Cargo) 청구중량 구조 이해</a:t>
-            </a:r>
-            <a:endParaRPr lang="en-US" sz="1500" dirty="0"/>
-          </a:p>
-        </p:txBody>
-      </p:sp>
-    </p:spTree>
-  </p:cSld>
-  <p:clrMapOvr>
-    <a:masterClrMapping/>
-  </p:clrMapOvr>
-</p:sld>
-</file>
-
-<file path=ppt/slides/slide3.xml><?xml version="1.0" encoding="utf-8"?>
-<p:sld xmlns:a="http://schemas.openxmlformats.org/drawingml/2006/main" xmlns:r="http://schemas.openxmlformats.org/officeDocument/2006/relationships" xmlns:p="http://schemas.openxmlformats.org/presentationml/2006/main">
-  <p:cSld name="Slide 3">
     <p:bg>
       <p:bgPr>
         <a:solidFill>
@@ -18074,7 +13189,7 @@
                 <a:ea typeface="맑은 고딕" pitchFamily="34" charset="-122"/>
                 <a:cs typeface="맑은 고딕" pitchFamily="34" charset="-120"/>
               </a:rPr>
-              <a:t>3</a:t>
+              <a:t>2</a:t>
             </a:r>
             <a:endParaRPr lang="en-US" sz="900" dirty="0"/>
           </a:p>
@@ -18689,123 +13804,6 @@
           </a:p>
         </p:txBody>
       </p:sp>
-      <p:sp>
-        <p:nvSpPr>
-          <p:cNvPr id="23" name="Text 20"/>
-          <p:cNvSpPr/>
-          <p:nvPr/>
-        </p:nvSpPr>
-        <p:spPr>
-          <a:xfrm>
-            <a:off x="6217920" y="4617720"/>
-            <a:ext cx="822960" cy="640080"/>
-          </a:xfrm>
-          <a:prstGeom prst="rect">
-            <a:avLst/>
-          </a:prstGeom>
-          <a:noFill/>
-          <a:ln/>
-        </p:spPr>
-        <p:txBody>
-          <a:bodyPr wrap="square" lIns="0" tIns="0" rIns="0" bIns="0" rtlCol="0" anchor="t"/>
-          <a:lstStyle/>
-          <a:p>
-            <a:pPr indent="0" marL="0">
-              <a:buNone/>
-            </a:pPr>
-            <a:r>
-              <a:rPr lang="en-US" sz="3000" b="1" dirty="0">
-                <a:solidFill>
-                  <a:srgbClr val="5B9BCB"/>
-                </a:solidFill>
-                <a:latin typeface="맑은 고딕" pitchFamily="34" charset="0"/>
-                <a:ea typeface="맑은 고딕" pitchFamily="34" charset="-122"/>
-                <a:cs typeface="맑은 고딕" pitchFamily="34" charset="-120"/>
-              </a:rPr>
-              <a:t>06</a:t>
-            </a:r>
-            <a:endParaRPr lang="en-US" sz="3000" dirty="0"/>
-          </a:p>
-        </p:txBody>
-      </p:sp>
-      <p:sp>
-        <p:nvSpPr>
-          <p:cNvPr id="24" name="Text 21"/>
-          <p:cNvSpPr/>
-          <p:nvPr/>
-        </p:nvSpPr>
-        <p:spPr>
-          <a:xfrm>
-            <a:off x="7132320" y="4617720"/>
-            <a:ext cx="4480560" cy="411480"/>
-          </a:xfrm>
-          <a:prstGeom prst="rect">
-            <a:avLst/>
-          </a:prstGeom>
-          <a:noFill/>
-          <a:ln/>
-        </p:spPr>
-        <p:txBody>
-          <a:bodyPr wrap="square" lIns="0" tIns="0" rIns="0" bIns="0" rtlCol="0" anchor="ctr"/>
-          <a:lstStyle/>
-          <a:p>
-            <a:pPr indent="0" marL="0">
-              <a:buNone/>
-            </a:pPr>
-            <a:r>
-              <a:rPr lang="en-US" sz="1700" b="1" dirty="0">
-                <a:solidFill>
-                  <a:srgbClr val="1B2241"/>
-                </a:solidFill>
-                <a:latin typeface="맑은 고딕" pitchFamily="34" charset="0"/>
-                <a:ea typeface="맑은 고딕" pitchFamily="34" charset="-122"/>
-                <a:cs typeface="맑은 고딕" pitchFamily="34" charset="-120"/>
-              </a:rPr>
-              <a:t>포장 시 유의사항</a:t>
-            </a:r>
-            <a:endParaRPr lang="en-US" sz="1700" dirty="0"/>
-          </a:p>
-        </p:txBody>
-      </p:sp>
-      <p:sp>
-        <p:nvSpPr>
-          <p:cNvPr id="25" name="Text 22"/>
-          <p:cNvSpPr/>
-          <p:nvPr/>
-        </p:nvSpPr>
-        <p:spPr>
-          <a:xfrm>
-            <a:off x="7132320" y="5029200"/>
-            <a:ext cx="4480560" cy="320040"/>
-          </a:xfrm>
-          <a:prstGeom prst="rect">
-            <a:avLst/>
-          </a:prstGeom>
-          <a:noFill/>
-          <a:ln/>
-        </p:spPr>
-        <p:txBody>
-          <a:bodyPr wrap="square" lIns="0" tIns="0" rIns="0" bIns="0" rtlCol="0" anchor="ctr"/>
-          <a:lstStyle/>
-          <a:p>
-            <a:pPr indent="0" marL="0">
-              <a:buNone/>
-            </a:pPr>
-            <a:r>
-              <a:rPr lang="en-US" sz="1200" dirty="0">
-                <a:solidFill>
-                  <a:srgbClr val="6B7280"/>
-                </a:solidFill>
-                <a:latin typeface="맑은 고딕" pitchFamily="34" charset="0"/>
-                <a:ea typeface="맑은 고딕" pitchFamily="34" charset="-122"/>
-                <a:cs typeface="맑은 고딕" pitchFamily="34" charset="-120"/>
-              </a:rPr>
-              <a:t>국가별·자재별 예외 케이스</a:t>
-            </a:r>
-            <a:endParaRPr lang="en-US" sz="1200" dirty="0"/>
-          </a:p>
-        </p:txBody>
-      </p:sp>
     </p:spTree>
   </p:cSld>
   <p:clrMapOvr>
@@ -18814,9 +13812,9 @@
 </p:sld>
 </file>
 
-<file path=ppt/slides/slide4.xml><?xml version="1.0" encoding="utf-8"?>
+<file path=ppt/slides/slide3.xml><?xml version="1.0" encoding="utf-8"?>
 <p:sld xmlns:a="http://schemas.openxmlformats.org/drawingml/2006/main" xmlns:r="http://schemas.openxmlformats.org/officeDocument/2006/relationships" xmlns:p="http://schemas.openxmlformats.org/presentationml/2006/main">
-  <p:cSld name="Slide 4">
+  <p:cSld name="Slide 3">
     <p:bg>
       <p:bgPr>
         <a:solidFill>
@@ -19011,7 +14009,7 @@
                 <a:ea typeface="맑은 고딕" pitchFamily="34" charset="-122"/>
                 <a:cs typeface="맑은 고딕" pitchFamily="34" charset="-120"/>
               </a:rPr>
-              <a:t>4</a:t>
+              <a:t>3</a:t>
             </a:r>
             <a:endParaRPr lang="en-US" sz="900" dirty="0"/>
           </a:p>
@@ -19043,7 +14041,7 @@
       </p:pic>
       <p:graphicFrame>
         <p:nvGraphicFramePr>
-          <p:cNvPr id="5" name="Table 0"/>
+          <p:cNvPr id="4" name="Table 0"/>
           <p:cNvGraphicFramePr>
             <a:graphicFrameLocks noGrp="1"/>
           </p:cNvGraphicFramePr>
@@ -27928,9 +22926,9 @@
 </p:sld>
 </file>
 
-<file path=ppt/slides/slide5.xml><?xml version="1.0" encoding="utf-8"?>
+<file path=ppt/slides/slide4.xml><?xml version="1.0" encoding="utf-8"?>
 <p:sld xmlns:a="http://schemas.openxmlformats.org/drawingml/2006/main" xmlns:r="http://schemas.openxmlformats.org/officeDocument/2006/relationships" xmlns:p="http://schemas.openxmlformats.org/presentationml/2006/main">
-  <p:cSld name="Slide 5">
+  <p:cSld name="Slide 4">
     <p:bg>
       <p:bgPr>
         <a:solidFill>
@@ -28125,7 +23123,7 @@
                 <a:ea typeface="맑은 고딕" pitchFamily="34" charset="-122"/>
                 <a:cs typeface="맑은 고딕" pitchFamily="34" charset="-120"/>
               </a:rPr>
-              <a:t>5</a:t>
+              <a:t>4</a:t>
             </a:r>
             <a:endParaRPr lang="en-US" sz="900" dirty="0"/>
           </a:p>
@@ -28157,7 +23155,7 @@
       </p:pic>
       <p:graphicFrame>
         <p:nvGraphicFramePr>
-          <p:cNvPr id="6" name="Table 0"/>
+          <p:cNvPr id="5" name="Table 0"/>
           <p:cNvGraphicFramePr>
             <a:graphicFrameLocks noGrp="1"/>
           </p:cNvGraphicFramePr>
@@ -37490,9 +32488,9 @@
 </p:sld>
 </file>
 
-<file path=ppt/slides/slide6.xml><?xml version="1.0" encoding="utf-8"?>
+<file path=ppt/slides/slide5.xml><?xml version="1.0" encoding="utf-8"?>
 <p:sld xmlns:a="http://schemas.openxmlformats.org/drawingml/2006/main" xmlns:r="http://schemas.openxmlformats.org/officeDocument/2006/relationships" xmlns:p="http://schemas.openxmlformats.org/presentationml/2006/main">
-  <p:cSld name="Slide 6">
+  <p:cSld name="Slide 5">
     <p:bg>
       <p:bgPr>
         <a:solidFill>
@@ -37687,7 +32685,7 @@
                 <a:ea typeface="맑은 고딕" pitchFamily="34" charset="-122"/>
                 <a:cs typeface="맑은 고딕" pitchFamily="34" charset="-120"/>
               </a:rPr>
-              <a:t>6</a:t>
+              <a:t>5</a:t>
             </a:r>
             <a:endParaRPr lang="en-US" sz="900" dirty="0"/>
           </a:p>
@@ -37845,7 +32843,7 @@
       </p:sp>
       <p:graphicFrame>
         <p:nvGraphicFramePr>
-          <p:cNvPr id="7" name="Table 0"/>
+          <p:cNvPr id="6" name="Table 0"/>
           <p:cNvGraphicFramePr>
             <a:graphicFrameLocks noGrp="1"/>
           </p:cNvGraphicFramePr>
@@ -38013,9 +33011,9 @@
 </p:sld>
 </file>
 
-<file path=ppt/slides/slide7.xml><?xml version="1.0" encoding="utf-8"?>
+<file path=ppt/slides/slide6.xml><?xml version="1.0" encoding="utf-8"?>
 <p:sld xmlns:a="http://schemas.openxmlformats.org/drawingml/2006/main" xmlns:r="http://schemas.openxmlformats.org/officeDocument/2006/relationships" xmlns:p="http://schemas.openxmlformats.org/presentationml/2006/main">
-  <p:cSld name="Slide 7">
+  <p:cSld name="Slide 6">
     <p:bg>
       <p:bgPr>
         <a:solidFill>
@@ -38210,7 +33208,7 @@
                 <a:ea typeface="맑은 고딕" pitchFamily="34" charset="-122"/>
                 <a:cs typeface="맑은 고딕" pitchFamily="34" charset="-120"/>
               </a:rPr>
-              <a:t>7</a:t>
+              <a:t>6</a:t>
             </a:r>
             <a:endParaRPr lang="en-US" sz="900" dirty="0"/>
           </a:p>
@@ -38368,7 +33366,7 @@
       </p:sp>
       <p:graphicFrame>
         <p:nvGraphicFramePr>
-          <p:cNvPr id="8" name="Table 0"/>
+          <p:cNvPr id="7" name="Table 0"/>
           <p:cNvGraphicFramePr>
             <a:graphicFrameLocks noGrp="1"/>
           </p:cNvGraphicFramePr>
@@ -38536,9 +33534,9 @@
 </p:sld>
 </file>
 
-<file path=ppt/slides/slide8.xml><?xml version="1.0" encoding="utf-8"?>
+<file path=ppt/slides/slide7.xml><?xml version="1.0" encoding="utf-8"?>
 <p:sld xmlns:a="http://schemas.openxmlformats.org/drawingml/2006/main" xmlns:r="http://schemas.openxmlformats.org/officeDocument/2006/relationships" xmlns:p="http://schemas.openxmlformats.org/presentationml/2006/main">
-  <p:cSld name="Slide 8">
+  <p:cSld name="Slide 7">
     <p:bg>
       <p:bgPr>
         <a:solidFill>
@@ -38733,7 +33731,7 @@
                 <a:ea typeface="맑은 고딕" pitchFamily="34" charset="-122"/>
                 <a:cs typeface="맑은 고딕" pitchFamily="34" charset="-120"/>
               </a:rPr>
-              <a:t>8</a:t>
+              <a:t>7</a:t>
             </a:r>
             <a:endParaRPr lang="en-US" sz="900" dirty="0"/>
           </a:p>
@@ -38891,7 +33889,7 @@
       </p:sp>
       <p:graphicFrame>
         <p:nvGraphicFramePr>
-          <p:cNvPr id="9" name="Table 0"/>
+          <p:cNvPr id="8" name="Table 0"/>
           <p:cNvGraphicFramePr>
             <a:graphicFrameLocks noGrp="1"/>
           </p:cNvGraphicFramePr>
@@ -39059,9 +34057,9 @@
 </p:sld>
 </file>
 
-<file path=ppt/slides/slide9.xml><?xml version="1.0" encoding="utf-8"?>
+<file path=ppt/slides/slide8.xml><?xml version="1.0" encoding="utf-8"?>
 <p:sld xmlns:a="http://schemas.openxmlformats.org/drawingml/2006/main" xmlns:r="http://schemas.openxmlformats.org/officeDocument/2006/relationships" xmlns:p="http://schemas.openxmlformats.org/presentationml/2006/main">
-  <p:cSld name="Slide 9">
+  <p:cSld name="Slide 8">
     <p:bg>
       <p:bgPr>
         <a:solidFill>
@@ -39256,7 +34254,7 @@
                 <a:ea typeface="맑은 고딕" pitchFamily="34" charset="-122"/>
                 <a:cs typeface="맑은 고딕" pitchFamily="34" charset="-120"/>
               </a:rPr>
-              <a:t>9</a:t>
+              <a:t>8</a:t>
             </a:r>
             <a:endParaRPr lang="en-US" sz="900" dirty="0"/>
           </a:p>
@@ -39414,7 +34412,7 @@
       </p:sp>
       <p:graphicFrame>
         <p:nvGraphicFramePr>
-          <p:cNvPr id="10" name="Table 0"/>
+          <p:cNvPr id="9" name="Table 0"/>
           <p:cNvGraphicFramePr>
             <a:graphicFrameLocks noGrp="1"/>
           </p:cNvGraphicFramePr>
@@ -39706,6 +34704,2771 @@
           </a:graphicData>
         </a:graphic>
       </p:graphicFrame>
+    </p:spTree>
+  </p:cSld>
+  <p:clrMapOvr>
+    <a:masterClrMapping/>
+  </p:clrMapOvr>
+</p:sld>
+</file>
+
+<file path=ppt/slides/slide9.xml><?xml version="1.0" encoding="utf-8"?>
+<p:sld xmlns:a="http://schemas.openxmlformats.org/drawingml/2006/main" xmlns:r="http://schemas.openxmlformats.org/officeDocument/2006/relationships" xmlns:p="http://schemas.openxmlformats.org/presentationml/2006/main">
+  <p:cSld name="Slide 9">
+    <p:bg>
+      <p:bgPr>
+        <a:solidFill>
+          <a:srgbClr val="FFFFFF"/>
+        </a:solidFill>
+      </p:bgPr>
+    </p:bg>
+    <p:spTree>
+      <p:nvGrpSpPr>
+        <p:cNvPr id="1" name=""/>
+        <p:cNvGrpSpPr/>
+        <p:nvPr/>
+      </p:nvGrpSpPr>
+      <p:grpSpPr>
+        <a:xfrm>
+          <a:off x="0" y="0"/>
+          <a:ext cx="0" cy="0"/>
+          <a:chOff x="0" y="0"/>
+          <a:chExt cx="0" cy="0"/>
+        </a:xfrm>
+      </p:grpSpPr>
+      <p:sp>
+        <p:nvSpPr>
+          <p:cNvPr id="2" name="Text 0"/>
+          <p:cNvSpPr/>
+          <p:nvPr/>
+        </p:nvSpPr>
+        <p:spPr>
+          <a:xfrm>
+            <a:off x="548640" y="347472"/>
+            <a:ext cx="7315200" cy="274320"/>
+          </a:xfrm>
+          <a:prstGeom prst="rect">
+            <a:avLst/>
+          </a:prstGeom>
+          <a:noFill/>
+          <a:ln/>
+        </p:spPr>
+        <p:txBody>
+          <a:bodyPr wrap="square" lIns="0" tIns="0" rIns="0" bIns="0" rtlCol="0" anchor="ctr"/>
+          <a:lstStyle/>
+          <a:p>
+            <a:pPr indent="0" marL="0">
+              <a:buNone/>
+            </a:pPr>
+            <a:r>
+              <a:rPr lang="en-US" sz="1100" b="1" dirty="0">
+                <a:solidFill>
+                  <a:srgbClr val="5B9BCB"/>
+                </a:solidFill>
+                <a:latin typeface="맑은 고딕" pitchFamily="34" charset="0"/>
+                <a:ea typeface="맑은 고딕" pitchFamily="34" charset="-122"/>
+                <a:cs typeface="맑은 고딕" pitchFamily="34" charset="-120"/>
+              </a:rPr>
+              <a:t>03  Outer Box &amp; Pallet</a:t>
+            </a:r>
+            <a:endParaRPr lang="en-US" sz="1100" dirty="0"/>
+          </a:p>
+        </p:txBody>
+      </p:sp>
+      <p:sp>
+        <p:nvSpPr>
+          <p:cNvPr id="3" name="Text 1"/>
+          <p:cNvSpPr/>
+          <p:nvPr/>
+        </p:nvSpPr>
+        <p:spPr>
+          <a:xfrm>
+            <a:off x="548640" y="621792"/>
+            <a:ext cx="10972800" cy="502920"/>
+          </a:xfrm>
+          <a:prstGeom prst="rect">
+            <a:avLst/>
+          </a:prstGeom>
+          <a:noFill/>
+          <a:ln/>
+        </p:spPr>
+        <p:txBody>
+          <a:bodyPr wrap="square" lIns="0" tIns="0" rIns="0" bIns="0" rtlCol="0" anchor="ctr"/>
+          <a:lstStyle/>
+          <a:p>
+            <a:pPr indent="0" marL="0">
+              <a:buNone/>
+            </a:pPr>
+            <a:r>
+              <a:rPr lang="en-US" sz="2400" b="1" dirty="0">
+                <a:solidFill>
+                  <a:srgbClr val="1B2241"/>
+                </a:solidFill>
+                <a:latin typeface="맑은 고딕" pitchFamily="34" charset="0"/>
+                <a:ea typeface="맑은 고딕" pitchFamily="34" charset="-122"/>
+                <a:cs typeface="맑은 고딕" pitchFamily="34" charset="-120"/>
+              </a:rPr>
+              <a:t>항공 수출 시 – 아우터 박스 포장 형태</a:t>
+            </a:r>
+            <a:endParaRPr lang="en-US" sz="2400" dirty="0"/>
+          </a:p>
+        </p:txBody>
+      </p:sp>
+      <p:sp>
+        <p:nvSpPr>
+          <p:cNvPr id="4" name="Shape 2"/>
+          <p:cNvSpPr/>
+          <p:nvPr/>
+        </p:nvSpPr>
+        <p:spPr>
+          <a:xfrm>
+            <a:off x="548640" y="1261872"/>
+            <a:ext cx="11094415" cy="0"/>
+          </a:xfrm>
+          <a:prstGeom prst="line">
+            <a:avLst/>
+          </a:prstGeom>
+          <a:noFill/>
+          <a:ln w="15875">
+            <a:solidFill>
+              <a:srgbClr val="1B2241"/>
+            </a:solidFill>
+            <a:prstDash val="solid"/>
+          </a:ln>
+        </p:spPr>
+      </p:sp>
+      <p:sp>
+        <p:nvSpPr>
+          <p:cNvPr id="5" name="Text 3"/>
+          <p:cNvSpPr/>
+          <p:nvPr/>
+        </p:nvSpPr>
+        <p:spPr>
+          <a:xfrm>
+            <a:off x="548640" y="6446520"/>
+            <a:ext cx="5486400" cy="228600"/>
+          </a:xfrm>
+          <a:prstGeom prst="rect">
+            <a:avLst/>
+          </a:prstGeom>
+          <a:noFill/>
+          <a:ln/>
+        </p:spPr>
+        <p:txBody>
+          <a:bodyPr wrap="square" lIns="0" tIns="0" rIns="0" bIns="0" rtlCol="0" anchor="ctr"/>
+          <a:lstStyle/>
+          <a:p>
+            <a:pPr indent="0" marL="0">
+              <a:buNone/>
+            </a:pPr>
+            <a:r>
+              <a:rPr lang="en-US" sz="900" dirty="0">
+                <a:solidFill>
+                  <a:srgbClr val="6B7280"/>
+                </a:solidFill>
+                <a:latin typeface="맑은 고딕" pitchFamily="34" charset="0"/>
+                <a:ea typeface="맑은 고딕" pitchFamily="34" charset="-122"/>
+                <a:cs typeface="맑은 고딕" pitchFamily="34" charset="-120"/>
+              </a:rPr>
+              <a:t>해외영업관리팀 OJT  |  Export Packaging</a:t>
+            </a:r>
+            <a:endParaRPr lang="en-US" sz="900" dirty="0"/>
+          </a:p>
+        </p:txBody>
+      </p:sp>
+      <p:sp>
+        <p:nvSpPr>
+          <p:cNvPr id="6" name="Text 4"/>
+          <p:cNvSpPr/>
+          <p:nvPr/>
+        </p:nvSpPr>
+        <p:spPr>
+          <a:xfrm>
+            <a:off x="11277295" y="6446520"/>
+            <a:ext cx="365760" cy="228600"/>
+          </a:xfrm>
+          <a:prstGeom prst="rect">
+            <a:avLst/>
+          </a:prstGeom>
+          <a:noFill/>
+          <a:ln/>
+        </p:spPr>
+        <p:txBody>
+          <a:bodyPr wrap="square" lIns="0" tIns="0" rIns="0" bIns="0" rtlCol="0" anchor="ctr"/>
+          <a:lstStyle/>
+          <a:p>
+            <a:pPr algn="r" indent="0" marL="0">
+              <a:buNone/>
+            </a:pPr>
+            <a:r>
+              <a:rPr lang="en-US" sz="900" dirty="0">
+                <a:solidFill>
+                  <a:srgbClr val="6B7280"/>
+                </a:solidFill>
+                <a:latin typeface="맑은 고딕" pitchFamily="34" charset="0"/>
+                <a:ea typeface="맑은 고딕" pitchFamily="34" charset="-122"/>
+                <a:cs typeface="맑은 고딕" pitchFamily="34" charset="-120"/>
+              </a:rPr>
+              <a:t>9</a:t>
+            </a:r>
+            <a:endParaRPr lang="en-US" sz="900" dirty="0"/>
+          </a:p>
+        </p:txBody>
+      </p:sp>
+      <p:pic>
+        <p:nvPicPr>
+          <p:cNvPr id="7" name="Image 0" descr="C:/Users/cjswl/OneDrive/문서/GitHub/packing-information/리브스메드 로고.png">    </p:cNvPr>
+          <p:cNvPicPr>
+            <a:picLocks noChangeAspect="1"/>
+          </p:cNvPicPr>
+          <p:nvPr/>
+        </p:nvPicPr>
+        <p:blipFill>
+          <a:blip r:embed="rId1"/>
+          <a:stretch>
+            <a:fillRect/>
+          </a:stretch>
+        </p:blipFill>
+        <p:spPr>
+          <a:xfrm>
+            <a:off x="9859975" y="6409149"/>
+            <a:ext cx="1234440" cy="257622"/>
+          </a:xfrm>
+          <a:prstGeom prst="rect">
+            <a:avLst/>
+          </a:prstGeom>
+        </p:spPr>
+      </p:pic>
+      <p:pic>
+        <p:nvPicPr>
+          <p:cNvPr id="8" name="Image 1" descr="C:\Users\cjswl\AppData\Local\Temp\claude\c--Users-cjswl-OneDrive----GitHub-packing-information\3ba0e5b9-a872-4a6e-a9b8-bf1f212a4a00\scratchpad\img\image9.jpg">    </p:cNvPr>
+          <p:cNvPicPr>
+            <a:picLocks noChangeAspect="1"/>
+          </p:cNvPicPr>
+          <p:nvPr/>
+        </p:nvPicPr>
+        <p:blipFill>
+          <a:blip r:embed="rId2"/>
+          <a:stretch>
+            <a:fillRect/>
+          </a:stretch>
+        </p:blipFill>
+        <p:spPr>
+          <a:xfrm>
+            <a:off x="548640" y="1551595"/>
+            <a:ext cx="4206240" cy="4577769"/>
+          </a:xfrm>
+          <a:prstGeom prst="rect">
+            <a:avLst/>
+          </a:prstGeom>
+        </p:spPr>
+      </p:pic>
+      <p:sp>
+        <p:nvSpPr>
+          <p:cNvPr id="9" name="Text 5"/>
+          <p:cNvSpPr/>
+          <p:nvPr/>
+        </p:nvSpPr>
+        <p:spPr>
+          <a:xfrm>
+            <a:off x="5120640" y="1508760"/>
+            <a:ext cx="6400800" cy="320040"/>
+          </a:xfrm>
+          <a:prstGeom prst="rect">
+            <a:avLst/>
+          </a:prstGeom>
+          <a:noFill/>
+          <a:ln/>
+        </p:spPr>
+        <p:txBody>
+          <a:bodyPr wrap="square" lIns="0" tIns="0" rIns="0" bIns="0" rtlCol="0" anchor="ctr"/>
+          <a:lstStyle/>
+          <a:p>
+            <a:pPr indent="0" marL="0">
+              <a:buNone/>
+            </a:pPr>
+            <a:r>
+              <a:rPr lang="en-US" sz="1400" b="1" dirty="0">
+                <a:solidFill>
+                  <a:srgbClr val="1B2241"/>
+                </a:solidFill>
+                <a:latin typeface="맑은 고딕" pitchFamily="34" charset="0"/>
+                <a:ea typeface="맑은 고딕" pitchFamily="34" charset="-122"/>
+                <a:cs typeface="맑은 고딕" pitchFamily="34" charset="-120"/>
+              </a:rPr>
+              <a:t>ArtiSential 아우터 박스 (B 골지)</a:t>
+            </a:r>
+            <a:endParaRPr lang="en-US" sz="1400" dirty="0"/>
+          </a:p>
+        </p:txBody>
+      </p:sp>
+      <p:graphicFrame>
+        <p:nvGraphicFramePr>
+          <p:cNvPr id="10" name="Table 0"/>
+          <p:cNvGraphicFramePr>
+            <a:graphicFrameLocks noGrp="1"/>
+          </p:cNvGraphicFramePr>
+          <p:nvPr>
+            <p:extLst>
+              <p:ext uri="{D42A27DB-BD31-4B8C-83A1-F6EECF244321}">
+                <p14:modId xmlns:p14="http://schemas.microsoft.com/office/powerpoint/2010/main" val="1579011935"/>
+              </p:ext>
+            </p:extLst>
+          </p:nvPr>
+        </p:nvGraphicFramePr>
+        <p:xfrm>
+          <a:off x="5120640" y="1920240"/>
+          <a:ext cx="6519672" cy="914400"/>
+        </p:xfrm>
+        <a:graphic>
+          <a:graphicData uri="http://schemas.openxmlformats.org/drawingml/2006/table">
+            <a:tbl>
+              <a:tblPr/>
+              <a:tblGrid>
+                <a:gridCol w="1325880"/>
+                <a:gridCol w="1463040"/>
+                <a:gridCol w="822960"/>
+                <a:gridCol w="822960"/>
+                <a:gridCol w="822960"/>
+                <a:gridCol w="1261872"/>
+              </a:tblGrid>
+              <a:tr h="329184">
+                <a:tc>
+                  <a:txBody>
+                    <a:bodyPr/>
+                    <a:lstStyle/>
+                    <a:p>
+                      <a:pPr algn="ctr" indent="0" marL="0">
+                        <a:buNone/>
+                      </a:pPr>
+                      <a:r>
+                        <a:rPr lang="en-US" sz="1100" b="1" dirty="0">
+                          <a:solidFill>
+                            <a:srgbClr val="FFFFFF"/>
+                          </a:solidFill>
+                          <a:latin typeface="맑은 고딕" pitchFamily="34" charset="0"/>
+                          <a:ea typeface="맑은 고딕" pitchFamily="34" charset="-122"/>
+                          <a:cs typeface="맑은 고딕" pitchFamily="34" charset="-120"/>
+                        </a:rPr>
+                        <a:t>규격</a:t>
+                      </a:r>
+                      <a:endParaRPr lang="en-US" sz="1100" dirty="0">
+                        <a:latin typeface="맑은 고딕" charset="0"/>
+                        <a:ea typeface="맑은 고딕" charset="0"/>
+                        <a:cs typeface="맑은 고딕" charset="0"/>
+                      </a:endParaRPr>
+                    </a:p>
+                  </a:txBody>
+                  <a:tcPr marL="54864" marR="54864" marT="27432" marB="27432" anchor="ctr">
+                    <a:lnL w="9525" cap="flat" cmpd="sng" algn="ctr">
+                      <a:solidFill>
+                        <a:srgbClr val="C9CED6"/>
+                      </a:solidFill>
+                      <a:prstDash val="solid"/>
+                      <a:round/>
+                      <a:headEnd type="none" w="med" len="med"/>
+                      <a:tailEnd type="none" w="med" len="med"/>
+                    </a:lnL>
+                    <a:lnR w="9525" cap="flat" cmpd="sng" algn="ctr">
+                      <a:solidFill>
+                        <a:srgbClr val="C9CED6"/>
+                      </a:solidFill>
+                      <a:prstDash val="solid"/>
+                      <a:round/>
+                      <a:headEnd type="none" w="med" len="med"/>
+                      <a:tailEnd type="none" w="med" len="med"/>
+                    </a:lnR>
+                    <a:lnT w="9525" cap="flat" cmpd="sng" algn="ctr">
+                      <a:solidFill>
+                        <a:srgbClr val="C9CED6"/>
+                      </a:solidFill>
+                      <a:prstDash val="solid"/>
+                      <a:round/>
+                      <a:headEnd type="none" w="med" len="med"/>
+                      <a:tailEnd type="none" w="med" len="med"/>
+                    </a:lnT>
+                    <a:lnB w="9525" cap="flat" cmpd="sng" algn="ctr">
+                      <a:solidFill>
+                        <a:srgbClr val="C9CED6"/>
+                      </a:solidFill>
+                      <a:prstDash val="solid"/>
+                      <a:round/>
+                      <a:headEnd type="none" w="med" len="med"/>
+                      <a:tailEnd type="none" w="med" len="med"/>
+                    </a:lnB>
+                    <a:solidFill>
+                      <a:srgbClr val="1B2241"/>
+                    </a:solidFill>
+                  </a:tcPr>
+                </a:tc>
+                <a:tc>
+                  <a:txBody>
+                    <a:bodyPr/>
+                    <a:lstStyle/>
+                    <a:p>
+                      <a:pPr algn="ctr" indent="0" marL="0">
+                        <a:buNone/>
+                      </a:pPr>
+                      <a:r>
+                        <a:rPr lang="en-US" sz="1100" b="1" dirty="0">
+                          <a:solidFill>
+                            <a:srgbClr val="FFFFFF"/>
+                          </a:solidFill>
+                          <a:latin typeface="맑은 고딕" pitchFamily="34" charset="0"/>
+                          <a:ea typeface="맑은 고딕" pitchFamily="34" charset="-122"/>
+                          <a:cs typeface="맑은 고딕" pitchFamily="34" charset="-120"/>
+                        </a:rPr>
+                        <a:t>W × L × H (cm)</a:t>
+                      </a:r>
+                      <a:endParaRPr lang="en-US" sz="1100" dirty="0">
+                        <a:latin typeface="맑은 고딕" charset="0"/>
+                        <a:ea typeface="맑은 고딕" charset="0"/>
+                        <a:cs typeface="맑은 고딕" charset="0"/>
+                      </a:endParaRPr>
+                    </a:p>
+                  </a:txBody>
+                  <a:tcPr marL="54864" marR="54864" marT="27432" marB="27432" anchor="ctr">
+                    <a:lnL w="9525" cap="flat" cmpd="sng" algn="ctr">
+                      <a:solidFill>
+                        <a:srgbClr val="C9CED6"/>
+                      </a:solidFill>
+                      <a:prstDash val="solid"/>
+                      <a:round/>
+                      <a:headEnd type="none" w="med" len="med"/>
+                      <a:tailEnd type="none" w="med" len="med"/>
+                    </a:lnL>
+                    <a:lnR w="9525" cap="flat" cmpd="sng" algn="ctr">
+                      <a:solidFill>
+                        <a:srgbClr val="C9CED6"/>
+                      </a:solidFill>
+                      <a:prstDash val="solid"/>
+                      <a:round/>
+                      <a:headEnd type="none" w="med" len="med"/>
+                      <a:tailEnd type="none" w="med" len="med"/>
+                    </a:lnR>
+                    <a:lnT w="9525" cap="flat" cmpd="sng" algn="ctr">
+                      <a:solidFill>
+                        <a:srgbClr val="C9CED6"/>
+                      </a:solidFill>
+                      <a:prstDash val="solid"/>
+                      <a:round/>
+                      <a:headEnd type="none" w="med" len="med"/>
+                      <a:tailEnd type="none" w="med" len="med"/>
+                    </a:lnT>
+                    <a:lnB w="9525" cap="flat" cmpd="sng" algn="ctr">
+                      <a:solidFill>
+                        <a:srgbClr val="C9CED6"/>
+                      </a:solidFill>
+                      <a:prstDash val="solid"/>
+                      <a:round/>
+                      <a:headEnd type="none" w="med" len="med"/>
+                      <a:tailEnd type="none" w="med" len="med"/>
+                    </a:lnB>
+                    <a:solidFill>
+                      <a:srgbClr val="1B2241"/>
+                    </a:solidFill>
+                  </a:tcPr>
+                </a:tc>
+                <a:tc>
+                  <a:txBody>
+                    <a:bodyPr/>
+                    <a:lstStyle/>
+                    <a:p>
+                      <a:pPr algn="ctr" indent="0" marL="0">
+                        <a:buNone/>
+                      </a:pPr>
+                      <a:r>
+                        <a:rPr lang="en-US" sz="1100" b="1" dirty="0">
+                          <a:solidFill>
+                            <a:srgbClr val="FFFFFF"/>
+                          </a:solidFill>
+                          <a:latin typeface="맑은 고딕" pitchFamily="34" charset="0"/>
+                          <a:ea typeface="맑은 고딕" pitchFamily="34" charset="-122"/>
+                          <a:cs typeface="맑은 고딕" pitchFamily="34" charset="-120"/>
+                        </a:rPr>
+                        <a:t>Net</a:t>
+                      </a:r>
+                      <a:endParaRPr lang="en-US" sz="1100" dirty="0">
+                        <a:latin typeface="맑은 고딕" charset="0"/>
+                        <a:ea typeface="맑은 고딕" charset="0"/>
+                        <a:cs typeface="맑은 고딕" charset="0"/>
+                      </a:endParaRPr>
+                    </a:p>
+                  </a:txBody>
+                  <a:tcPr marL="54864" marR="54864" marT="27432" marB="27432" anchor="ctr">
+                    <a:lnL w="9525" cap="flat" cmpd="sng" algn="ctr">
+                      <a:solidFill>
+                        <a:srgbClr val="C9CED6"/>
+                      </a:solidFill>
+                      <a:prstDash val="solid"/>
+                      <a:round/>
+                      <a:headEnd type="none" w="med" len="med"/>
+                      <a:tailEnd type="none" w="med" len="med"/>
+                    </a:lnL>
+                    <a:lnR w="9525" cap="flat" cmpd="sng" algn="ctr">
+                      <a:solidFill>
+                        <a:srgbClr val="C9CED6"/>
+                      </a:solidFill>
+                      <a:prstDash val="solid"/>
+                      <a:round/>
+                      <a:headEnd type="none" w="med" len="med"/>
+                      <a:tailEnd type="none" w="med" len="med"/>
+                    </a:lnR>
+                    <a:lnT w="9525" cap="flat" cmpd="sng" algn="ctr">
+                      <a:solidFill>
+                        <a:srgbClr val="C9CED6"/>
+                      </a:solidFill>
+                      <a:prstDash val="solid"/>
+                      <a:round/>
+                      <a:headEnd type="none" w="med" len="med"/>
+                      <a:tailEnd type="none" w="med" len="med"/>
+                    </a:lnT>
+                    <a:lnB w="9525" cap="flat" cmpd="sng" algn="ctr">
+                      <a:solidFill>
+                        <a:srgbClr val="C9CED6"/>
+                      </a:solidFill>
+                      <a:prstDash val="solid"/>
+                      <a:round/>
+                      <a:headEnd type="none" w="med" len="med"/>
+                      <a:tailEnd type="none" w="med" len="med"/>
+                    </a:lnB>
+                    <a:solidFill>
+                      <a:srgbClr val="1B2241"/>
+                    </a:solidFill>
+                  </a:tcPr>
+                </a:tc>
+                <a:tc>
+                  <a:txBody>
+                    <a:bodyPr/>
+                    <a:lstStyle/>
+                    <a:p>
+                      <a:pPr algn="ctr" indent="0" marL="0">
+                        <a:buNone/>
+                      </a:pPr>
+                      <a:r>
+                        <a:rPr lang="en-US" sz="1100" b="1" dirty="0">
+                          <a:solidFill>
+                            <a:srgbClr val="FFFFFF"/>
+                          </a:solidFill>
+                          <a:latin typeface="맑은 고딕" pitchFamily="34" charset="0"/>
+                          <a:ea typeface="맑은 고딕" pitchFamily="34" charset="-122"/>
+                          <a:cs typeface="맑은 고딕" pitchFamily="34" charset="-120"/>
+                        </a:rPr>
+                        <a:t>Gross</a:t>
+                      </a:r>
+                      <a:endParaRPr lang="en-US" sz="1100" dirty="0">
+                        <a:latin typeface="맑은 고딕" charset="0"/>
+                        <a:ea typeface="맑은 고딕" charset="0"/>
+                        <a:cs typeface="맑은 고딕" charset="0"/>
+                      </a:endParaRPr>
+                    </a:p>
+                  </a:txBody>
+                  <a:tcPr marL="54864" marR="54864" marT="27432" marB="27432" anchor="ctr">
+                    <a:lnL w="9525" cap="flat" cmpd="sng" algn="ctr">
+                      <a:solidFill>
+                        <a:srgbClr val="C9CED6"/>
+                      </a:solidFill>
+                      <a:prstDash val="solid"/>
+                      <a:round/>
+                      <a:headEnd type="none" w="med" len="med"/>
+                      <a:tailEnd type="none" w="med" len="med"/>
+                    </a:lnL>
+                    <a:lnR w="9525" cap="flat" cmpd="sng" algn="ctr">
+                      <a:solidFill>
+                        <a:srgbClr val="C9CED6"/>
+                      </a:solidFill>
+                      <a:prstDash val="solid"/>
+                      <a:round/>
+                      <a:headEnd type="none" w="med" len="med"/>
+                      <a:tailEnd type="none" w="med" len="med"/>
+                    </a:lnR>
+                    <a:lnT w="9525" cap="flat" cmpd="sng" algn="ctr">
+                      <a:solidFill>
+                        <a:srgbClr val="C9CED6"/>
+                      </a:solidFill>
+                      <a:prstDash val="solid"/>
+                      <a:round/>
+                      <a:headEnd type="none" w="med" len="med"/>
+                      <a:tailEnd type="none" w="med" len="med"/>
+                    </a:lnT>
+                    <a:lnB w="9525" cap="flat" cmpd="sng" algn="ctr">
+                      <a:solidFill>
+                        <a:srgbClr val="C9CED6"/>
+                      </a:solidFill>
+                      <a:prstDash val="solid"/>
+                      <a:round/>
+                      <a:headEnd type="none" w="med" len="med"/>
+                      <a:tailEnd type="none" w="med" len="med"/>
+                    </a:lnB>
+                    <a:solidFill>
+                      <a:srgbClr val="1B2241"/>
+                    </a:solidFill>
+                  </a:tcPr>
+                </a:tc>
+                <a:tc>
+                  <a:txBody>
+                    <a:bodyPr/>
+                    <a:lstStyle/>
+                    <a:p>
+                      <a:pPr algn="ctr" indent="0" marL="0">
+                        <a:buNone/>
+                      </a:pPr>
+                      <a:r>
+                        <a:rPr lang="en-US" sz="1100" b="1" dirty="0">
+                          <a:solidFill>
+                            <a:srgbClr val="FFFFFF"/>
+                          </a:solidFill>
+                          <a:latin typeface="맑은 고딕" pitchFamily="34" charset="0"/>
+                          <a:ea typeface="맑은 고딕" pitchFamily="34" charset="-122"/>
+                          <a:cs typeface="맑은 고딕" pitchFamily="34" charset="-120"/>
+                        </a:rPr>
+                        <a:t>수량</a:t>
+                      </a:r>
+                      <a:endParaRPr lang="en-US" sz="1100" dirty="0">
+                        <a:latin typeface="맑은 고딕" charset="0"/>
+                        <a:ea typeface="맑은 고딕" charset="0"/>
+                        <a:cs typeface="맑은 고딕" charset="0"/>
+                      </a:endParaRPr>
+                    </a:p>
+                  </a:txBody>
+                  <a:tcPr marL="54864" marR="54864" marT="27432" marB="27432" anchor="ctr">
+                    <a:lnL w="9525" cap="flat" cmpd="sng" algn="ctr">
+                      <a:solidFill>
+                        <a:srgbClr val="C9CED6"/>
+                      </a:solidFill>
+                      <a:prstDash val="solid"/>
+                      <a:round/>
+                      <a:headEnd type="none" w="med" len="med"/>
+                      <a:tailEnd type="none" w="med" len="med"/>
+                    </a:lnL>
+                    <a:lnR w="9525" cap="flat" cmpd="sng" algn="ctr">
+                      <a:solidFill>
+                        <a:srgbClr val="C9CED6"/>
+                      </a:solidFill>
+                      <a:prstDash val="solid"/>
+                      <a:round/>
+                      <a:headEnd type="none" w="med" len="med"/>
+                      <a:tailEnd type="none" w="med" len="med"/>
+                    </a:lnR>
+                    <a:lnT w="9525" cap="flat" cmpd="sng" algn="ctr">
+                      <a:solidFill>
+                        <a:srgbClr val="C9CED6"/>
+                      </a:solidFill>
+                      <a:prstDash val="solid"/>
+                      <a:round/>
+                      <a:headEnd type="none" w="med" len="med"/>
+                      <a:tailEnd type="none" w="med" len="med"/>
+                    </a:lnT>
+                    <a:lnB w="9525" cap="flat" cmpd="sng" algn="ctr">
+                      <a:solidFill>
+                        <a:srgbClr val="C9CED6"/>
+                      </a:solidFill>
+                      <a:prstDash val="solid"/>
+                      <a:round/>
+                      <a:headEnd type="none" w="med" len="med"/>
+                      <a:tailEnd type="none" w="med" len="med"/>
+                    </a:lnB>
+                    <a:solidFill>
+                      <a:srgbClr val="1B2241"/>
+                    </a:solidFill>
+                  </a:tcPr>
+                </a:tc>
+                <a:tc>
+                  <a:txBody>
+                    <a:bodyPr/>
+                    <a:lstStyle/>
+                    <a:p>
+                      <a:pPr algn="ctr" indent="0" marL="0">
+                        <a:buNone/>
+                      </a:pPr>
+                      <a:r>
+                        <a:rPr lang="en-US" sz="1100" b="1" dirty="0">
+                          <a:solidFill>
+                            <a:srgbClr val="FFFFFF"/>
+                          </a:solidFill>
+                          <a:latin typeface="맑은 고딕" pitchFamily="34" charset="0"/>
+                          <a:ea typeface="맑은 고딕" pitchFamily="34" charset="-122"/>
+                          <a:cs typeface="맑은 고딕" pitchFamily="34" charset="-120"/>
+                        </a:rPr>
+                        <a:t>Validation</a:t>
+                      </a:r>
+                      <a:endParaRPr lang="en-US" sz="1100" dirty="0">
+                        <a:latin typeface="맑은 고딕" charset="0"/>
+                        <a:ea typeface="맑은 고딕" charset="0"/>
+                        <a:cs typeface="맑은 고딕" charset="0"/>
+                      </a:endParaRPr>
+                    </a:p>
+                  </a:txBody>
+                  <a:tcPr marL="54864" marR="54864" marT="27432" marB="27432" anchor="ctr">
+                    <a:lnL w="9525" cap="flat" cmpd="sng" algn="ctr">
+                      <a:solidFill>
+                        <a:srgbClr val="C9CED6"/>
+                      </a:solidFill>
+                      <a:prstDash val="solid"/>
+                      <a:round/>
+                      <a:headEnd type="none" w="med" len="med"/>
+                      <a:tailEnd type="none" w="med" len="med"/>
+                    </a:lnL>
+                    <a:lnR w="9525" cap="flat" cmpd="sng" algn="ctr">
+                      <a:solidFill>
+                        <a:srgbClr val="C9CED6"/>
+                      </a:solidFill>
+                      <a:prstDash val="solid"/>
+                      <a:round/>
+                      <a:headEnd type="none" w="med" len="med"/>
+                      <a:tailEnd type="none" w="med" len="med"/>
+                    </a:lnR>
+                    <a:lnT w="9525" cap="flat" cmpd="sng" algn="ctr">
+                      <a:solidFill>
+                        <a:srgbClr val="C9CED6"/>
+                      </a:solidFill>
+                      <a:prstDash val="solid"/>
+                      <a:round/>
+                      <a:headEnd type="none" w="med" len="med"/>
+                      <a:tailEnd type="none" w="med" len="med"/>
+                    </a:lnT>
+                    <a:lnB w="9525" cap="flat" cmpd="sng" algn="ctr">
+                      <a:solidFill>
+                        <a:srgbClr val="C9CED6"/>
+                      </a:solidFill>
+                      <a:prstDash val="solid"/>
+                      <a:round/>
+                      <a:headEnd type="none" w="med" len="med"/>
+                      <a:tailEnd type="none" w="med" len="med"/>
+                    </a:lnB>
+                    <a:solidFill>
+                      <a:srgbClr val="1B2241"/>
+                    </a:solidFill>
+                  </a:tcPr>
+                </a:tc>
+              </a:tr>
+              <a:tr h="329184">
+                <a:tc>
+                  <a:txBody>
+                    <a:bodyPr/>
+                    <a:lstStyle/>
+                    <a:p>
+                      <a:pPr algn="ctr" indent="0" marL="0">
+                        <a:buNone/>
+                      </a:pPr>
+                      <a:r>
+                        <a:rPr lang="en-US" sz="1100" dirty="0">
+                          <a:solidFill>
+                            <a:srgbClr val="222222"/>
+                          </a:solidFill>
+                          <a:latin typeface="맑은 고딕" pitchFamily="34" charset="0"/>
+                          <a:ea typeface="맑은 고딕" pitchFamily="34" charset="-122"/>
+                          <a:cs typeface="맑은 고딕" pitchFamily="34" charset="-120"/>
+                        </a:rPr>
+                        <a:t>10개용(38cm)</a:t>
+                      </a:r>
+                      <a:endParaRPr lang="en-US" sz="1100" dirty="0">
+                        <a:latin typeface="맑은 고딕" charset="0"/>
+                        <a:ea typeface="맑은 고딕" charset="0"/>
+                        <a:cs typeface="맑은 고딕" charset="0"/>
+                      </a:endParaRPr>
+                    </a:p>
+                  </a:txBody>
+                  <a:tcPr marL="54864" marR="54864" marT="27432" marB="27432" anchor="ctr">
+                    <a:lnL w="9525" cap="flat" cmpd="sng" algn="ctr">
+                      <a:solidFill>
+                        <a:srgbClr val="C9CED6"/>
+                      </a:solidFill>
+                      <a:prstDash val="solid"/>
+                      <a:round/>
+                      <a:headEnd type="none" w="med" len="med"/>
+                      <a:tailEnd type="none" w="med" len="med"/>
+                    </a:lnL>
+                    <a:lnR w="9525" cap="flat" cmpd="sng" algn="ctr">
+                      <a:solidFill>
+                        <a:srgbClr val="C9CED6"/>
+                      </a:solidFill>
+                      <a:prstDash val="solid"/>
+                      <a:round/>
+                      <a:headEnd type="none" w="med" len="med"/>
+                      <a:tailEnd type="none" w="med" len="med"/>
+                    </a:lnR>
+                    <a:lnT w="9525" cap="flat" cmpd="sng" algn="ctr">
+                      <a:solidFill>
+                        <a:srgbClr val="C9CED6"/>
+                      </a:solidFill>
+                      <a:prstDash val="solid"/>
+                      <a:round/>
+                      <a:headEnd type="none" w="med" len="med"/>
+                      <a:tailEnd type="none" w="med" len="med"/>
+                    </a:lnT>
+                    <a:lnB w="9525" cap="flat" cmpd="sng" algn="ctr">
+                      <a:solidFill>
+                        <a:srgbClr val="C9CED6"/>
+                      </a:solidFill>
+                      <a:prstDash val="solid"/>
+                      <a:round/>
+                      <a:headEnd type="none" w="med" len="med"/>
+                      <a:tailEnd type="none" w="med" len="med"/>
+                    </a:lnB>
+                  </a:tcPr>
+                </a:tc>
+                <a:tc>
+                  <a:txBody>
+                    <a:bodyPr/>
+                    <a:lstStyle/>
+                    <a:p>
+                      <a:pPr algn="ctr" indent="0" marL="0">
+                        <a:buNone/>
+                      </a:pPr>
+                      <a:r>
+                        <a:rPr lang="en-US" sz="1100" dirty="0">
+                          <a:solidFill>
+                            <a:srgbClr val="222222"/>
+                          </a:solidFill>
+                          <a:latin typeface="맑은 고딕" pitchFamily="34" charset="0"/>
+                          <a:ea typeface="맑은 고딕" pitchFamily="34" charset="-122"/>
+                          <a:cs typeface="맑은 고딕" pitchFamily="34" charset="-120"/>
+                        </a:rPr>
+                        <a:t>77 × 66 × 56</a:t>
+                      </a:r>
+                      <a:endParaRPr lang="en-US" sz="1100" dirty="0">
+                        <a:latin typeface="맑은 고딕" charset="0"/>
+                        <a:ea typeface="맑은 고딕" charset="0"/>
+                        <a:cs typeface="맑은 고딕" charset="0"/>
+                      </a:endParaRPr>
+                    </a:p>
+                  </a:txBody>
+                  <a:tcPr marL="54864" marR="54864" marT="27432" marB="27432" anchor="ctr">
+                    <a:lnL w="9525" cap="flat" cmpd="sng" algn="ctr">
+                      <a:solidFill>
+                        <a:srgbClr val="C9CED6"/>
+                      </a:solidFill>
+                      <a:prstDash val="solid"/>
+                      <a:round/>
+                      <a:headEnd type="none" w="med" len="med"/>
+                      <a:tailEnd type="none" w="med" len="med"/>
+                    </a:lnL>
+                    <a:lnR w="9525" cap="flat" cmpd="sng" algn="ctr">
+                      <a:solidFill>
+                        <a:srgbClr val="C9CED6"/>
+                      </a:solidFill>
+                      <a:prstDash val="solid"/>
+                      <a:round/>
+                      <a:headEnd type="none" w="med" len="med"/>
+                      <a:tailEnd type="none" w="med" len="med"/>
+                    </a:lnR>
+                    <a:lnT w="9525" cap="flat" cmpd="sng" algn="ctr">
+                      <a:solidFill>
+                        <a:srgbClr val="C9CED6"/>
+                      </a:solidFill>
+                      <a:prstDash val="solid"/>
+                      <a:round/>
+                      <a:headEnd type="none" w="med" len="med"/>
+                      <a:tailEnd type="none" w="med" len="med"/>
+                    </a:lnT>
+                    <a:lnB w="9525" cap="flat" cmpd="sng" algn="ctr">
+                      <a:solidFill>
+                        <a:srgbClr val="C9CED6"/>
+                      </a:solidFill>
+                      <a:prstDash val="solid"/>
+                      <a:round/>
+                      <a:headEnd type="none" w="med" len="med"/>
+                      <a:tailEnd type="none" w="med" len="med"/>
+                    </a:lnB>
+                  </a:tcPr>
+                </a:tc>
+                <a:tc>
+                  <a:txBody>
+                    <a:bodyPr/>
+                    <a:lstStyle/>
+                    <a:p>
+                      <a:pPr algn="ctr" indent="0" marL="0">
+                        <a:buNone/>
+                      </a:pPr>
+                      <a:r>
+                        <a:rPr lang="en-US" sz="1100" dirty="0">
+                          <a:solidFill>
+                            <a:srgbClr val="222222"/>
+                          </a:solidFill>
+                          <a:latin typeface="맑은 고딕" pitchFamily="34" charset="0"/>
+                          <a:ea typeface="맑은 고딕" pitchFamily="34" charset="-122"/>
+                          <a:cs typeface="맑은 고딕" pitchFamily="34" charset="-120"/>
+                        </a:rPr>
+                        <a:t>15</a:t>
+                      </a:r>
+                      <a:endParaRPr lang="en-US" sz="1100" dirty="0">
+                        <a:latin typeface="맑은 고딕" charset="0"/>
+                        <a:ea typeface="맑은 고딕" charset="0"/>
+                        <a:cs typeface="맑은 고딕" charset="0"/>
+                      </a:endParaRPr>
+                    </a:p>
+                  </a:txBody>
+                  <a:tcPr marL="54864" marR="54864" marT="27432" marB="27432" anchor="ctr">
+                    <a:lnL w="9525" cap="flat" cmpd="sng" algn="ctr">
+                      <a:solidFill>
+                        <a:srgbClr val="C9CED6"/>
+                      </a:solidFill>
+                      <a:prstDash val="solid"/>
+                      <a:round/>
+                      <a:headEnd type="none" w="med" len="med"/>
+                      <a:tailEnd type="none" w="med" len="med"/>
+                    </a:lnL>
+                    <a:lnR w="9525" cap="flat" cmpd="sng" algn="ctr">
+                      <a:solidFill>
+                        <a:srgbClr val="C9CED6"/>
+                      </a:solidFill>
+                      <a:prstDash val="solid"/>
+                      <a:round/>
+                      <a:headEnd type="none" w="med" len="med"/>
+                      <a:tailEnd type="none" w="med" len="med"/>
+                    </a:lnR>
+                    <a:lnT w="9525" cap="flat" cmpd="sng" algn="ctr">
+                      <a:solidFill>
+                        <a:srgbClr val="C9CED6"/>
+                      </a:solidFill>
+                      <a:prstDash val="solid"/>
+                      <a:round/>
+                      <a:headEnd type="none" w="med" len="med"/>
+                      <a:tailEnd type="none" w="med" len="med"/>
+                    </a:lnT>
+                    <a:lnB w="9525" cap="flat" cmpd="sng" algn="ctr">
+                      <a:solidFill>
+                        <a:srgbClr val="C9CED6"/>
+                      </a:solidFill>
+                      <a:prstDash val="solid"/>
+                      <a:round/>
+                      <a:headEnd type="none" w="med" len="med"/>
+                      <a:tailEnd type="none" w="med" len="med"/>
+                    </a:lnB>
+                  </a:tcPr>
+                </a:tc>
+                <a:tc>
+                  <a:txBody>
+                    <a:bodyPr/>
+                    <a:lstStyle/>
+                    <a:p>
+                      <a:pPr algn="ctr" indent="0" marL="0">
+                        <a:buNone/>
+                      </a:pPr>
+                      <a:r>
+                        <a:rPr lang="en-US" sz="1100" dirty="0">
+                          <a:solidFill>
+                            <a:srgbClr val="222222"/>
+                          </a:solidFill>
+                          <a:latin typeface="맑은 고딕" pitchFamily="34" charset="0"/>
+                          <a:ea typeface="맑은 고딕" pitchFamily="34" charset="-122"/>
+                          <a:cs typeface="맑은 고딕" pitchFamily="34" charset="-120"/>
+                        </a:rPr>
+                        <a:t>18.5</a:t>
+                      </a:r>
+                      <a:endParaRPr lang="en-US" sz="1100" dirty="0">
+                        <a:latin typeface="맑은 고딕" charset="0"/>
+                        <a:ea typeface="맑은 고딕" charset="0"/>
+                        <a:cs typeface="맑은 고딕" charset="0"/>
+                      </a:endParaRPr>
+                    </a:p>
+                  </a:txBody>
+                  <a:tcPr marL="54864" marR="54864" marT="27432" marB="27432" anchor="ctr">
+                    <a:lnL w="9525" cap="flat" cmpd="sng" algn="ctr">
+                      <a:solidFill>
+                        <a:srgbClr val="C9CED6"/>
+                      </a:solidFill>
+                      <a:prstDash val="solid"/>
+                      <a:round/>
+                      <a:headEnd type="none" w="med" len="med"/>
+                      <a:tailEnd type="none" w="med" len="med"/>
+                    </a:lnL>
+                    <a:lnR w="9525" cap="flat" cmpd="sng" algn="ctr">
+                      <a:solidFill>
+                        <a:srgbClr val="C9CED6"/>
+                      </a:solidFill>
+                      <a:prstDash val="solid"/>
+                      <a:round/>
+                      <a:headEnd type="none" w="med" len="med"/>
+                      <a:tailEnd type="none" w="med" len="med"/>
+                    </a:lnR>
+                    <a:lnT w="9525" cap="flat" cmpd="sng" algn="ctr">
+                      <a:solidFill>
+                        <a:srgbClr val="C9CED6"/>
+                      </a:solidFill>
+                      <a:prstDash val="solid"/>
+                      <a:round/>
+                      <a:headEnd type="none" w="med" len="med"/>
+                      <a:tailEnd type="none" w="med" len="med"/>
+                    </a:lnT>
+                    <a:lnB w="9525" cap="flat" cmpd="sng" algn="ctr">
+                      <a:solidFill>
+                        <a:srgbClr val="C9CED6"/>
+                      </a:solidFill>
+                      <a:prstDash val="solid"/>
+                      <a:round/>
+                      <a:headEnd type="none" w="med" len="med"/>
+                      <a:tailEnd type="none" w="med" len="med"/>
+                    </a:lnB>
+                  </a:tcPr>
+                </a:tc>
+                <a:tc>
+                  <a:txBody>
+                    <a:bodyPr/>
+                    <a:lstStyle/>
+                    <a:p>
+                      <a:pPr algn="ctr" indent="0" marL="0">
+                        <a:buNone/>
+                      </a:pPr>
+                      <a:r>
+                        <a:rPr lang="en-US" sz="1100" dirty="0">
+                          <a:solidFill>
+                            <a:srgbClr val="222222"/>
+                          </a:solidFill>
+                          <a:latin typeface="맑은 고딕" pitchFamily="34" charset="0"/>
+                          <a:ea typeface="맑은 고딕" pitchFamily="34" charset="-122"/>
+                          <a:cs typeface="맑은 고딕" pitchFamily="34" charset="-120"/>
+                        </a:rPr>
+                        <a:t>10</a:t>
+                      </a:r>
+                      <a:endParaRPr lang="en-US" sz="1100" dirty="0">
+                        <a:latin typeface="맑은 고딕" charset="0"/>
+                        <a:ea typeface="맑은 고딕" charset="0"/>
+                        <a:cs typeface="맑은 고딕" charset="0"/>
+                      </a:endParaRPr>
+                    </a:p>
+                  </a:txBody>
+                  <a:tcPr marL="54864" marR="54864" marT="27432" marB="27432" anchor="ctr">
+                    <a:lnL w="9525" cap="flat" cmpd="sng" algn="ctr">
+                      <a:solidFill>
+                        <a:srgbClr val="C9CED6"/>
+                      </a:solidFill>
+                      <a:prstDash val="solid"/>
+                      <a:round/>
+                      <a:headEnd type="none" w="med" len="med"/>
+                      <a:tailEnd type="none" w="med" len="med"/>
+                    </a:lnL>
+                    <a:lnR w="9525" cap="flat" cmpd="sng" algn="ctr">
+                      <a:solidFill>
+                        <a:srgbClr val="C9CED6"/>
+                      </a:solidFill>
+                      <a:prstDash val="solid"/>
+                      <a:round/>
+                      <a:headEnd type="none" w="med" len="med"/>
+                      <a:tailEnd type="none" w="med" len="med"/>
+                    </a:lnR>
+                    <a:lnT w="9525" cap="flat" cmpd="sng" algn="ctr">
+                      <a:solidFill>
+                        <a:srgbClr val="C9CED6"/>
+                      </a:solidFill>
+                      <a:prstDash val="solid"/>
+                      <a:round/>
+                      <a:headEnd type="none" w="med" len="med"/>
+                      <a:tailEnd type="none" w="med" len="med"/>
+                    </a:lnT>
+                    <a:lnB w="9525" cap="flat" cmpd="sng" algn="ctr">
+                      <a:solidFill>
+                        <a:srgbClr val="C9CED6"/>
+                      </a:solidFill>
+                      <a:prstDash val="solid"/>
+                      <a:round/>
+                      <a:headEnd type="none" w="med" len="med"/>
+                      <a:tailEnd type="none" w="med" len="med"/>
+                    </a:lnB>
+                  </a:tcPr>
+                </a:tc>
+                <a:tc>
+                  <a:txBody>
+                    <a:bodyPr/>
+                    <a:lstStyle/>
+                    <a:p>
+                      <a:pPr algn="ctr" indent="0" marL="0">
+                        <a:buNone/>
+                      </a:pPr>
+                      <a:r>
+                        <a:rPr lang="en-US" sz="1100" dirty="0">
+                          <a:solidFill>
+                            <a:srgbClr val="222222"/>
+                          </a:solidFill>
+                          <a:latin typeface="맑은 고딕" pitchFamily="34" charset="0"/>
+                          <a:ea typeface="맑은 고딕" pitchFamily="34" charset="-122"/>
+                          <a:cs typeface="맑은 고딕" pitchFamily="34" charset="-120"/>
+                        </a:rPr>
+                        <a:t>O</a:t>
+                      </a:r>
+                      <a:endParaRPr lang="en-US" sz="1100" dirty="0">
+                        <a:latin typeface="맑은 고딕" charset="0"/>
+                        <a:ea typeface="맑은 고딕" charset="0"/>
+                        <a:cs typeface="맑은 고딕" charset="0"/>
+                      </a:endParaRPr>
+                    </a:p>
+                  </a:txBody>
+                  <a:tcPr marL="54864" marR="54864" marT="27432" marB="27432" anchor="ctr">
+                    <a:lnL w="9525" cap="flat" cmpd="sng" algn="ctr">
+                      <a:solidFill>
+                        <a:srgbClr val="C9CED6"/>
+                      </a:solidFill>
+                      <a:prstDash val="solid"/>
+                      <a:round/>
+                      <a:headEnd type="none" w="med" len="med"/>
+                      <a:tailEnd type="none" w="med" len="med"/>
+                    </a:lnL>
+                    <a:lnR w="9525" cap="flat" cmpd="sng" algn="ctr">
+                      <a:solidFill>
+                        <a:srgbClr val="C9CED6"/>
+                      </a:solidFill>
+                      <a:prstDash val="solid"/>
+                      <a:round/>
+                      <a:headEnd type="none" w="med" len="med"/>
+                      <a:tailEnd type="none" w="med" len="med"/>
+                    </a:lnR>
+                    <a:lnT w="9525" cap="flat" cmpd="sng" algn="ctr">
+                      <a:solidFill>
+                        <a:srgbClr val="C9CED6"/>
+                      </a:solidFill>
+                      <a:prstDash val="solid"/>
+                      <a:round/>
+                      <a:headEnd type="none" w="med" len="med"/>
+                      <a:tailEnd type="none" w="med" len="med"/>
+                    </a:lnT>
+                    <a:lnB w="9525" cap="flat" cmpd="sng" algn="ctr">
+                      <a:solidFill>
+                        <a:srgbClr val="C9CED6"/>
+                      </a:solidFill>
+                      <a:prstDash val="solid"/>
+                      <a:round/>
+                      <a:headEnd type="none" w="med" len="med"/>
+                      <a:tailEnd type="none" w="med" len="med"/>
+                    </a:lnB>
+                  </a:tcPr>
+                </a:tc>
+              </a:tr>
+              <a:tr h="329184">
+                <a:tc>
+                  <a:txBody>
+                    <a:bodyPr/>
+                    <a:lstStyle/>
+                    <a:p>
+                      <a:pPr algn="ctr" indent="0" marL="0">
+                        <a:buNone/>
+                      </a:pPr>
+                      <a:r>
+                        <a:rPr lang="en-US" sz="1100" dirty="0">
+                          <a:solidFill>
+                            <a:srgbClr val="222222"/>
+                          </a:solidFill>
+                          <a:latin typeface="맑은 고딕" pitchFamily="34" charset="0"/>
+                          <a:ea typeface="맑은 고딕" pitchFamily="34" charset="-122"/>
+                          <a:cs typeface="맑은 고딕" pitchFamily="34" charset="-120"/>
+                        </a:rPr>
+                        <a:t>10개용(45cm)</a:t>
+                      </a:r>
+                      <a:endParaRPr lang="en-US" sz="1100" dirty="0">
+                        <a:latin typeface="맑은 고딕" charset="0"/>
+                        <a:ea typeface="맑은 고딕" charset="0"/>
+                        <a:cs typeface="맑은 고딕" charset="0"/>
+                      </a:endParaRPr>
+                    </a:p>
+                  </a:txBody>
+                  <a:tcPr marL="54864" marR="54864" marT="27432" marB="27432" anchor="ctr">
+                    <a:lnL w="9525" cap="flat" cmpd="sng" algn="ctr">
+                      <a:solidFill>
+                        <a:srgbClr val="C9CED6"/>
+                      </a:solidFill>
+                      <a:prstDash val="solid"/>
+                      <a:round/>
+                      <a:headEnd type="none" w="med" len="med"/>
+                      <a:tailEnd type="none" w="med" len="med"/>
+                    </a:lnL>
+                    <a:lnR w="9525" cap="flat" cmpd="sng" algn="ctr">
+                      <a:solidFill>
+                        <a:srgbClr val="C9CED6"/>
+                      </a:solidFill>
+                      <a:prstDash val="solid"/>
+                      <a:round/>
+                      <a:headEnd type="none" w="med" len="med"/>
+                      <a:tailEnd type="none" w="med" len="med"/>
+                    </a:lnR>
+                    <a:lnT w="9525" cap="flat" cmpd="sng" algn="ctr">
+                      <a:solidFill>
+                        <a:srgbClr val="C9CED6"/>
+                      </a:solidFill>
+                      <a:prstDash val="solid"/>
+                      <a:round/>
+                      <a:headEnd type="none" w="med" len="med"/>
+                      <a:tailEnd type="none" w="med" len="med"/>
+                    </a:lnT>
+                    <a:lnB w="9525" cap="flat" cmpd="sng" algn="ctr">
+                      <a:solidFill>
+                        <a:srgbClr val="C9CED6"/>
+                      </a:solidFill>
+                      <a:prstDash val="solid"/>
+                      <a:round/>
+                      <a:headEnd type="none" w="med" len="med"/>
+                      <a:tailEnd type="none" w="med" len="med"/>
+                    </a:lnB>
+                  </a:tcPr>
+                </a:tc>
+                <a:tc>
+                  <a:txBody>
+                    <a:bodyPr/>
+                    <a:lstStyle/>
+                    <a:p>
+                      <a:pPr algn="ctr" indent="0" marL="0">
+                        <a:buNone/>
+                      </a:pPr>
+                      <a:r>
+                        <a:rPr lang="en-US" sz="1100" dirty="0">
+                          <a:solidFill>
+                            <a:srgbClr val="222222"/>
+                          </a:solidFill>
+                          <a:latin typeface="맑은 고딕" pitchFamily="34" charset="0"/>
+                          <a:ea typeface="맑은 고딕" pitchFamily="34" charset="-122"/>
+                          <a:cs typeface="맑은 고딕" pitchFamily="34" charset="-120"/>
+                        </a:rPr>
+                        <a:t>85 × 66 × 56</a:t>
+                      </a:r>
+                      <a:endParaRPr lang="en-US" sz="1100" dirty="0">
+                        <a:latin typeface="맑은 고딕" charset="0"/>
+                        <a:ea typeface="맑은 고딕" charset="0"/>
+                        <a:cs typeface="맑은 고딕" charset="0"/>
+                      </a:endParaRPr>
+                    </a:p>
+                  </a:txBody>
+                  <a:tcPr marL="54864" marR="54864" marT="27432" marB="27432" anchor="ctr">
+                    <a:lnL w="9525" cap="flat" cmpd="sng" algn="ctr">
+                      <a:solidFill>
+                        <a:srgbClr val="C9CED6"/>
+                      </a:solidFill>
+                      <a:prstDash val="solid"/>
+                      <a:round/>
+                      <a:headEnd type="none" w="med" len="med"/>
+                      <a:tailEnd type="none" w="med" len="med"/>
+                    </a:lnL>
+                    <a:lnR w="9525" cap="flat" cmpd="sng" algn="ctr">
+                      <a:solidFill>
+                        <a:srgbClr val="C9CED6"/>
+                      </a:solidFill>
+                      <a:prstDash val="solid"/>
+                      <a:round/>
+                      <a:headEnd type="none" w="med" len="med"/>
+                      <a:tailEnd type="none" w="med" len="med"/>
+                    </a:lnR>
+                    <a:lnT w="9525" cap="flat" cmpd="sng" algn="ctr">
+                      <a:solidFill>
+                        <a:srgbClr val="C9CED6"/>
+                      </a:solidFill>
+                      <a:prstDash val="solid"/>
+                      <a:round/>
+                      <a:headEnd type="none" w="med" len="med"/>
+                      <a:tailEnd type="none" w="med" len="med"/>
+                    </a:lnT>
+                    <a:lnB w="9525" cap="flat" cmpd="sng" algn="ctr">
+                      <a:solidFill>
+                        <a:srgbClr val="C9CED6"/>
+                      </a:solidFill>
+                      <a:prstDash val="solid"/>
+                      <a:round/>
+                      <a:headEnd type="none" w="med" len="med"/>
+                      <a:tailEnd type="none" w="med" len="med"/>
+                    </a:lnB>
+                  </a:tcPr>
+                </a:tc>
+                <a:tc>
+                  <a:txBody>
+                    <a:bodyPr/>
+                    <a:lstStyle/>
+                    <a:p>
+                      <a:pPr algn="ctr" indent="0" marL="0">
+                        <a:buNone/>
+                      </a:pPr>
+                      <a:r>
+                        <a:rPr lang="en-US" sz="1100" dirty="0">
+                          <a:solidFill>
+                            <a:srgbClr val="222222"/>
+                          </a:solidFill>
+                          <a:latin typeface="맑은 고딕" pitchFamily="34" charset="0"/>
+                          <a:ea typeface="맑은 고딕" pitchFamily="34" charset="-122"/>
+                          <a:cs typeface="맑은 고딕" pitchFamily="34" charset="-120"/>
+                        </a:rPr>
+                        <a:t>15</a:t>
+                      </a:r>
+                      <a:endParaRPr lang="en-US" sz="1100" dirty="0">
+                        <a:latin typeface="맑은 고딕" charset="0"/>
+                        <a:ea typeface="맑은 고딕" charset="0"/>
+                        <a:cs typeface="맑은 고딕" charset="0"/>
+                      </a:endParaRPr>
+                    </a:p>
+                  </a:txBody>
+                  <a:tcPr marL="54864" marR="54864" marT="27432" marB="27432" anchor="ctr">
+                    <a:lnL w="9525" cap="flat" cmpd="sng" algn="ctr">
+                      <a:solidFill>
+                        <a:srgbClr val="C9CED6"/>
+                      </a:solidFill>
+                      <a:prstDash val="solid"/>
+                      <a:round/>
+                      <a:headEnd type="none" w="med" len="med"/>
+                      <a:tailEnd type="none" w="med" len="med"/>
+                    </a:lnL>
+                    <a:lnR w="9525" cap="flat" cmpd="sng" algn="ctr">
+                      <a:solidFill>
+                        <a:srgbClr val="C9CED6"/>
+                      </a:solidFill>
+                      <a:prstDash val="solid"/>
+                      <a:round/>
+                      <a:headEnd type="none" w="med" len="med"/>
+                      <a:tailEnd type="none" w="med" len="med"/>
+                    </a:lnR>
+                    <a:lnT w="9525" cap="flat" cmpd="sng" algn="ctr">
+                      <a:solidFill>
+                        <a:srgbClr val="C9CED6"/>
+                      </a:solidFill>
+                      <a:prstDash val="solid"/>
+                      <a:round/>
+                      <a:headEnd type="none" w="med" len="med"/>
+                      <a:tailEnd type="none" w="med" len="med"/>
+                    </a:lnT>
+                    <a:lnB w="9525" cap="flat" cmpd="sng" algn="ctr">
+                      <a:solidFill>
+                        <a:srgbClr val="C9CED6"/>
+                      </a:solidFill>
+                      <a:prstDash val="solid"/>
+                      <a:round/>
+                      <a:headEnd type="none" w="med" len="med"/>
+                      <a:tailEnd type="none" w="med" len="med"/>
+                    </a:lnB>
+                  </a:tcPr>
+                </a:tc>
+                <a:tc>
+                  <a:txBody>
+                    <a:bodyPr/>
+                    <a:lstStyle/>
+                    <a:p>
+                      <a:pPr algn="ctr" indent="0" marL="0">
+                        <a:buNone/>
+                      </a:pPr>
+                      <a:r>
+                        <a:rPr lang="en-US" sz="1100" dirty="0">
+                          <a:solidFill>
+                            <a:srgbClr val="222222"/>
+                          </a:solidFill>
+                          <a:latin typeface="맑은 고딕" pitchFamily="34" charset="0"/>
+                          <a:ea typeface="맑은 고딕" pitchFamily="34" charset="-122"/>
+                          <a:cs typeface="맑은 고딕" pitchFamily="34" charset="-120"/>
+                        </a:rPr>
+                        <a:t>18.5</a:t>
+                      </a:r>
+                      <a:endParaRPr lang="en-US" sz="1100" dirty="0">
+                        <a:latin typeface="맑은 고딕" charset="0"/>
+                        <a:ea typeface="맑은 고딕" charset="0"/>
+                        <a:cs typeface="맑은 고딕" charset="0"/>
+                      </a:endParaRPr>
+                    </a:p>
+                  </a:txBody>
+                  <a:tcPr marL="54864" marR="54864" marT="27432" marB="27432" anchor="ctr">
+                    <a:lnL w="9525" cap="flat" cmpd="sng" algn="ctr">
+                      <a:solidFill>
+                        <a:srgbClr val="C9CED6"/>
+                      </a:solidFill>
+                      <a:prstDash val="solid"/>
+                      <a:round/>
+                      <a:headEnd type="none" w="med" len="med"/>
+                      <a:tailEnd type="none" w="med" len="med"/>
+                    </a:lnL>
+                    <a:lnR w="9525" cap="flat" cmpd="sng" algn="ctr">
+                      <a:solidFill>
+                        <a:srgbClr val="C9CED6"/>
+                      </a:solidFill>
+                      <a:prstDash val="solid"/>
+                      <a:round/>
+                      <a:headEnd type="none" w="med" len="med"/>
+                      <a:tailEnd type="none" w="med" len="med"/>
+                    </a:lnR>
+                    <a:lnT w="9525" cap="flat" cmpd="sng" algn="ctr">
+                      <a:solidFill>
+                        <a:srgbClr val="C9CED6"/>
+                      </a:solidFill>
+                      <a:prstDash val="solid"/>
+                      <a:round/>
+                      <a:headEnd type="none" w="med" len="med"/>
+                      <a:tailEnd type="none" w="med" len="med"/>
+                    </a:lnT>
+                    <a:lnB w="9525" cap="flat" cmpd="sng" algn="ctr">
+                      <a:solidFill>
+                        <a:srgbClr val="C9CED6"/>
+                      </a:solidFill>
+                      <a:prstDash val="solid"/>
+                      <a:round/>
+                      <a:headEnd type="none" w="med" len="med"/>
+                      <a:tailEnd type="none" w="med" len="med"/>
+                    </a:lnB>
+                  </a:tcPr>
+                </a:tc>
+                <a:tc>
+                  <a:txBody>
+                    <a:bodyPr/>
+                    <a:lstStyle/>
+                    <a:p>
+                      <a:pPr algn="ctr" indent="0" marL="0">
+                        <a:buNone/>
+                      </a:pPr>
+                      <a:r>
+                        <a:rPr lang="en-US" sz="1100" dirty="0">
+                          <a:solidFill>
+                            <a:srgbClr val="222222"/>
+                          </a:solidFill>
+                          <a:latin typeface="맑은 고딕" pitchFamily="34" charset="0"/>
+                          <a:ea typeface="맑은 고딕" pitchFamily="34" charset="-122"/>
+                          <a:cs typeface="맑은 고딕" pitchFamily="34" charset="-120"/>
+                        </a:rPr>
+                        <a:t>10</a:t>
+                      </a:r>
+                      <a:endParaRPr lang="en-US" sz="1100" dirty="0">
+                        <a:latin typeface="맑은 고딕" charset="0"/>
+                        <a:ea typeface="맑은 고딕" charset="0"/>
+                        <a:cs typeface="맑은 고딕" charset="0"/>
+                      </a:endParaRPr>
+                    </a:p>
+                  </a:txBody>
+                  <a:tcPr marL="54864" marR="54864" marT="27432" marB="27432" anchor="ctr">
+                    <a:lnL w="9525" cap="flat" cmpd="sng" algn="ctr">
+                      <a:solidFill>
+                        <a:srgbClr val="C9CED6"/>
+                      </a:solidFill>
+                      <a:prstDash val="solid"/>
+                      <a:round/>
+                      <a:headEnd type="none" w="med" len="med"/>
+                      <a:tailEnd type="none" w="med" len="med"/>
+                    </a:lnL>
+                    <a:lnR w="9525" cap="flat" cmpd="sng" algn="ctr">
+                      <a:solidFill>
+                        <a:srgbClr val="C9CED6"/>
+                      </a:solidFill>
+                      <a:prstDash val="solid"/>
+                      <a:round/>
+                      <a:headEnd type="none" w="med" len="med"/>
+                      <a:tailEnd type="none" w="med" len="med"/>
+                    </a:lnR>
+                    <a:lnT w="9525" cap="flat" cmpd="sng" algn="ctr">
+                      <a:solidFill>
+                        <a:srgbClr val="C9CED6"/>
+                      </a:solidFill>
+                      <a:prstDash val="solid"/>
+                      <a:round/>
+                      <a:headEnd type="none" w="med" len="med"/>
+                      <a:tailEnd type="none" w="med" len="med"/>
+                    </a:lnT>
+                    <a:lnB w="9525" cap="flat" cmpd="sng" algn="ctr">
+                      <a:solidFill>
+                        <a:srgbClr val="C9CED6"/>
+                      </a:solidFill>
+                      <a:prstDash val="solid"/>
+                      <a:round/>
+                      <a:headEnd type="none" w="med" len="med"/>
+                      <a:tailEnd type="none" w="med" len="med"/>
+                    </a:lnB>
+                  </a:tcPr>
+                </a:tc>
+                <a:tc>
+                  <a:txBody>
+                    <a:bodyPr/>
+                    <a:lstStyle/>
+                    <a:p>
+                      <a:pPr algn="ctr" indent="0" marL="0">
+                        <a:buNone/>
+                      </a:pPr>
+                      <a:r>
+                        <a:rPr lang="en-US" sz="1100" dirty="0">
+                          <a:solidFill>
+                            <a:srgbClr val="222222"/>
+                          </a:solidFill>
+                          <a:latin typeface="맑은 고딕" pitchFamily="34" charset="0"/>
+                          <a:ea typeface="맑은 고딕" pitchFamily="34" charset="-122"/>
+                          <a:cs typeface="맑은 고딕" pitchFamily="34" charset="-120"/>
+                        </a:rPr>
+                        <a:t>O</a:t>
+                      </a:r>
+                      <a:endParaRPr lang="en-US" sz="1100" dirty="0">
+                        <a:latin typeface="맑은 고딕" charset="0"/>
+                        <a:ea typeface="맑은 고딕" charset="0"/>
+                        <a:cs typeface="맑은 고딕" charset="0"/>
+                      </a:endParaRPr>
+                    </a:p>
+                  </a:txBody>
+                  <a:tcPr marL="54864" marR="54864" marT="27432" marB="27432" anchor="ctr">
+                    <a:lnL w="9525" cap="flat" cmpd="sng" algn="ctr">
+                      <a:solidFill>
+                        <a:srgbClr val="C9CED6"/>
+                      </a:solidFill>
+                      <a:prstDash val="solid"/>
+                      <a:round/>
+                      <a:headEnd type="none" w="med" len="med"/>
+                      <a:tailEnd type="none" w="med" len="med"/>
+                    </a:lnL>
+                    <a:lnR w="9525" cap="flat" cmpd="sng" algn="ctr">
+                      <a:solidFill>
+                        <a:srgbClr val="C9CED6"/>
+                      </a:solidFill>
+                      <a:prstDash val="solid"/>
+                      <a:round/>
+                      <a:headEnd type="none" w="med" len="med"/>
+                      <a:tailEnd type="none" w="med" len="med"/>
+                    </a:lnR>
+                    <a:lnT w="9525" cap="flat" cmpd="sng" algn="ctr">
+                      <a:solidFill>
+                        <a:srgbClr val="C9CED6"/>
+                      </a:solidFill>
+                      <a:prstDash val="solid"/>
+                      <a:round/>
+                      <a:headEnd type="none" w="med" len="med"/>
+                      <a:tailEnd type="none" w="med" len="med"/>
+                    </a:lnT>
+                    <a:lnB w="9525" cap="flat" cmpd="sng" algn="ctr">
+                      <a:solidFill>
+                        <a:srgbClr val="C9CED6"/>
+                      </a:solidFill>
+                      <a:prstDash val="solid"/>
+                      <a:round/>
+                      <a:headEnd type="none" w="med" len="med"/>
+                      <a:tailEnd type="none" w="med" len="med"/>
+                    </a:lnB>
+                  </a:tcPr>
+                </a:tc>
+              </a:tr>
+              <a:tr h="329184">
+                <a:tc>
+                  <a:txBody>
+                    <a:bodyPr/>
+                    <a:lstStyle/>
+                    <a:p>
+                      <a:pPr algn="ctr" indent="0" marL="0">
+                        <a:buNone/>
+                      </a:pPr>
+                      <a:r>
+                        <a:rPr lang="en-US" sz="1100" dirty="0">
+                          <a:solidFill>
+                            <a:srgbClr val="222222"/>
+                          </a:solidFill>
+                          <a:latin typeface="맑은 고딕" pitchFamily="34" charset="0"/>
+                          <a:ea typeface="맑은 고딕" pitchFamily="34" charset="-122"/>
+                          <a:cs typeface="맑은 고딕" pitchFamily="34" charset="-120"/>
+                        </a:rPr>
+                        <a:t>5개용(38cm)</a:t>
+                      </a:r>
+                      <a:endParaRPr lang="en-US" sz="1100" dirty="0">
+                        <a:latin typeface="맑은 고딕" charset="0"/>
+                        <a:ea typeface="맑은 고딕" charset="0"/>
+                        <a:cs typeface="맑은 고딕" charset="0"/>
+                      </a:endParaRPr>
+                    </a:p>
+                  </a:txBody>
+                  <a:tcPr marL="54864" marR="54864" marT="27432" marB="27432" anchor="ctr">
+                    <a:lnL w="9525" cap="flat" cmpd="sng" algn="ctr">
+                      <a:solidFill>
+                        <a:srgbClr val="C9CED6"/>
+                      </a:solidFill>
+                      <a:prstDash val="solid"/>
+                      <a:round/>
+                      <a:headEnd type="none" w="med" len="med"/>
+                      <a:tailEnd type="none" w="med" len="med"/>
+                    </a:lnL>
+                    <a:lnR w="9525" cap="flat" cmpd="sng" algn="ctr">
+                      <a:solidFill>
+                        <a:srgbClr val="C9CED6"/>
+                      </a:solidFill>
+                      <a:prstDash val="solid"/>
+                      <a:round/>
+                      <a:headEnd type="none" w="med" len="med"/>
+                      <a:tailEnd type="none" w="med" len="med"/>
+                    </a:lnR>
+                    <a:lnT w="9525" cap="flat" cmpd="sng" algn="ctr">
+                      <a:solidFill>
+                        <a:srgbClr val="C9CED6"/>
+                      </a:solidFill>
+                      <a:prstDash val="solid"/>
+                      <a:round/>
+                      <a:headEnd type="none" w="med" len="med"/>
+                      <a:tailEnd type="none" w="med" len="med"/>
+                    </a:lnT>
+                    <a:lnB w="9525" cap="flat" cmpd="sng" algn="ctr">
+                      <a:solidFill>
+                        <a:srgbClr val="C9CED6"/>
+                      </a:solidFill>
+                      <a:prstDash val="solid"/>
+                      <a:round/>
+                      <a:headEnd type="none" w="med" len="med"/>
+                      <a:tailEnd type="none" w="med" len="med"/>
+                    </a:lnB>
+                  </a:tcPr>
+                </a:tc>
+                <a:tc>
+                  <a:txBody>
+                    <a:bodyPr/>
+                    <a:lstStyle/>
+                    <a:p>
+                      <a:pPr algn="ctr" indent="0" marL="0">
+                        <a:buNone/>
+                      </a:pPr>
+                      <a:r>
+                        <a:rPr lang="en-US" sz="1100" dirty="0">
+                          <a:solidFill>
+                            <a:srgbClr val="222222"/>
+                          </a:solidFill>
+                          <a:latin typeface="맑은 고딕" pitchFamily="34" charset="0"/>
+                          <a:ea typeface="맑은 고딕" pitchFamily="34" charset="-122"/>
+                          <a:cs typeface="맑은 고딕" pitchFamily="34" charset="-120"/>
+                        </a:rPr>
+                        <a:t>77 × 35 × 56</a:t>
+                      </a:r>
+                      <a:endParaRPr lang="en-US" sz="1100" dirty="0">
+                        <a:latin typeface="맑은 고딕" charset="0"/>
+                        <a:ea typeface="맑은 고딕" charset="0"/>
+                        <a:cs typeface="맑은 고딕" charset="0"/>
+                      </a:endParaRPr>
+                    </a:p>
+                  </a:txBody>
+                  <a:tcPr marL="54864" marR="54864" marT="27432" marB="27432" anchor="ctr">
+                    <a:lnL w="9525" cap="flat" cmpd="sng" algn="ctr">
+                      <a:solidFill>
+                        <a:srgbClr val="C9CED6"/>
+                      </a:solidFill>
+                      <a:prstDash val="solid"/>
+                      <a:round/>
+                      <a:headEnd type="none" w="med" len="med"/>
+                      <a:tailEnd type="none" w="med" len="med"/>
+                    </a:lnL>
+                    <a:lnR w="9525" cap="flat" cmpd="sng" algn="ctr">
+                      <a:solidFill>
+                        <a:srgbClr val="C9CED6"/>
+                      </a:solidFill>
+                      <a:prstDash val="solid"/>
+                      <a:round/>
+                      <a:headEnd type="none" w="med" len="med"/>
+                      <a:tailEnd type="none" w="med" len="med"/>
+                    </a:lnR>
+                    <a:lnT w="9525" cap="flat" cmpd="sng" algn="ctr">
+                      <a:solidFill>
+                        <a:srgbClr val="C9CED6"/>
+                      </a:solidFill>
+                      <a:prstDash val="solid"/>
+                      <a:round/>
+                      <a:headEnd type="none" w="med" len="med"/>
+                      <a:tailEnd type="none" w="med" len="med"/>
+                    </a:lnT>
+                    <a:lnB w="9525" cap="flat" cmpd="sng" algn="ctr">
+                      <a:solidFill>
+                        <a:srgbClr val="C9CED6"/>
+                      </a:solidFill>
+                      <a:prstDash val="solid"/>
+                      <a:round/>
+                      <a:headEnd type="none" w="med" len="med"/>
+                      <a:tailEnd type="none" w="med" len="med"/>
+                    </a:lnB>
+                  </a:tcPr>
+                </a:tc>
+                <a:tc>
+                  <a:txBody>
+                    <a:bodyPr/>
+                    <a:lstStyle/>
+                    <a:p>
+                      <a:pPr algn="ctr" indent="0" marL="0">
+                        <a:buNone/>
+                      </a:pPr>
+                      <a:r>
+                        <a:rPr lang="en-US" sz="1100" dirty="0">
+                          <a:solidFill>
+                            <a:srgbClr val="222222"/>
+                          </a:solidFill>
+                          <a:latin typeface="맑은 고딕" pitchFamily="34" charset="0"/>
+                          <a:ea typeface="맑은 고딕" pitchFamily="34" charset="-122"/>
+                          <a:cs typeface="맑은 고딕" pitchFamily="34" charset="-120"/>
+                        </a:rPr>
+                        <a:t>6.5</a:t>
+                      </a:r>
+                      <a:endParaRPr lang="en-US" sz="1100" dirty="0">
+                        <a:latin typeface="맑은 고딕" charset="0"/>
+                        <a:ea typeface="맑은 고딕" charset="0"/>
+                        <a:cs typeface="맑은 고딕" charset="0"/>
+                      </a:endParaRPr>
+                    </a:p>
+                  </a:txBody>
+                  <a:tcPr marL="54864" marR="54864" marT="27432" marB="27432" anchor="ctr">
+                    <a:lnL w="9525" cap="flat" cmpd="sng" algn="ctr">
+                      <a:solidFill>
+                        <a:srgbClr val="C9CED6"/>
+                      </a:solidFill>
+                      <a:prstDash val="solid"/>
+                      <a:round/>
+                      <a:headEnd type="none" w="med" len="med"/>
+                      <a:tailEnd type="none" w="med" len="med"/>
+                    </a:lnL>
+                    <a:lnR w="9525" cap="flat" cmpd="sng" algn="ctr">
+                      <a:solidFill>
+                        <a:srgbClr val="C9CED6"/>
+                      </a:solidFill>
+                      <a:prstDash val="solid"/>
+                      <a:round/>
+                      <a:headEnd type="none" w="med" len="med"/>
+                      <a:tailEnd type="none" w="med" len="med"/>
+                    </a:lnR>
+                    <a:lnT w="9525" cap="flat" cmpd="sng" algn="ctr">
+                      <a:solidFill>
+                        <a:srgbClr val="C9CED6"/>
+                      </a:solidFill>
+                      <a:prstDash val="solid"/>
+                      <a:round/>
+                      <a:headEnd type="none" w="med" len="med"/>
+                      <a:tailEnd type="none" w="med" len="med"/>
+                    </a:lnT>
+                    <a:lnB w="9525" cap="flat" cmpd="sng" algn="ctr">
+                      <a:solidFill>
+                        <a:srgbClr val="C9CED6"/>
+                      </a:solidFill>
+                      <a:prstDash val="solid"/>
+                      <a:round/>
+                      <a:headEnd type="none" w="med" len="med"/>
+                      <a:tailEnd type="none" w="med" len="med"/>
+                    </a:lnB>
+                  </a:tcPr>
+                </a:tc>
+                <a:tc>
+                  <a:txBody>
+                    <a:bodyPr/>
+                    <a:lstStyle/>
+                    <a:p>
+                      <a:pPr algn="ctr" indent="0" marL="0">
+                        <a:buNone/>
+                      </a:pPr>
+                      <a:r>
+                        <a:rPr lang="en-US" sz="1100" dirty="0">
+                          <a:solidFill>
+                            <a:srgbClr val="222222"/>
+                          </a:solidFill>
+                          <a:latin typeface="맑은 고딕" pitchFamily="34" charset="0"/>
+                          <a:ea typeface="맑은 고딕" pitchFamily="34" charset="-122"/>
+                          <a:cs typeface="맑은 고딕" pitchFamily="34" charset="-120"/>
+                        </a:rPr>
+                        <a:t>10</a:t>
+                      </a:r>
+                      <a:endParaRPr lang="en-US" sz="1100" dirty="0">
+                        <a:latin typeface="맑은 고딕" charset="0"/>
+                        <a:ea typeface="맑은 고딕" charset="0"/>
+                        <a:cs typeface="맑은 고딕" charset="0"/>
+                      </a:endParaRPr>
+                    </a:p>
+                  </a:txBody>
+                  <a:tcPr marL="54864" marR="54864" marT="27432" marB="27432" anchor="ctr">
+                    <a:lnL w="9525" cap="flat" cmpd="sng" algn="ctr">
+                      <a:solidFill>
+                        <a:srgbClr val="C9CED6"/>
+                      </a:solidFill>
+                      <a:prstDash val="solid"/>
+                      <a:round/>
+                      <a:headEnd type="none" w="med" len="med"/>
+                      <a:tailEnd type="none" w="med" len="med"/>
+                    </a:lnL>
+                    <a:lnR w="9525" cap="flat" cmpd="sng" algn="ctr">
+                      <a:solidFill>
+                        <a:srgbClr val="C9CED6"/>
+                      </a:solidFill>
+                      <a:prstDash val="solid"/>
+                      <a:round/>
+                      <a:headEnd type="none" w="med" len="med"/>
+                      <a:tailEnd type="none" w="med" len="med"/>
+                    </a:lnR>
+                    <a:lnT w="9525" cap="flat" cmpd="sng" algn="ctr">
+                      <a:solidFill>
+                        <a:srgbClr val="C9CED6"/>
+                      </a:solidFill>
+                      <a:prstDash val="solid"/>
+                      <a:round/>
+                      <a:headEnd type="none" w="med" len="med"/>
+                      <a:tailEnd type="none" w="med" len="med"/>
+                    </a:lnT>
+                    <a:lnB w="9525" cap="flat" cmpd="sng" algn="ctr">
+                      <a:solidFill>
+                        <a:srgbClr val="C9CED6"/>
+                      </a:solidFill>
+                      <a:prstDash val="solid"/>
+                      <a:round/>
+                      <a:headEnd type="none" w="med" len="med"/>
+                      <a:tailEnd type="none" w="med" len="med"/>
+                    </a:lnB>
+                  </a:tcPr>
+                </a:tc>
+                <a:tc>
+                  <a:txBody>
+                    <a:bodyPr/>
+                    <a:lstStyle/>
+                    <a:p>
+                      <a:pPr algn="ctr" indent="0" marL="0">
+                        <a:buNone/>
+                      </a:pPr>
+                      <a:r>
+                        <a:rPr lang="en-US" sz="1100" dirty="0">
+                          <a:solidFill>
+                            <a:srgbClr val="222222"/>
+                          </a:solidFill>
+                          <a:latin typeface="맑은 고딕" pitchFamily="34" charset="0"/>
+                          <a:ea typeface="맑은 고딕" pitchFamily="34" charset="-122"/>
+                          <a:cs typeface="맑은 고딕" pitchFamily="34" charset="-120"/>
+                        </a:rPr>
+                        <a:t>5</a:t>
+                      </a:r>
+                      <a:endParaRPr lang="en-US" sz="1100" dirty="0">
+                        <a:latin typeface="맑은 고딕" charset="0"/>
+                        <a:ea typeface="맑은 고딕" charset="0"/>
+                        <a:cs typeface="맑은 고딕" charset="0"/>
+                      </a:endParaRPr>
+                    </a:p>
+                  </a:txBody>
+                  <a:tcPr marL="54864" marR="54864" marT="27432" marB="27432" anchor="ctr">
+                    <a:lnL w="9525" cap="flat" cmpd="sng" algn="ctr">
+                      <a:solidFill>
+                        <a:srgbClr val="C9CED6"/>
+                      </a:solidFill>
+                      <a:prstDash val="solid"/>
+                      <a:round/>
+                      <a:headEnd type="none" w="med" len="med"/>
+                      <a:tailEnd type="none" w="med" len="med"/>
+                    </a:lnL>
+                    <a:lnR w="9525" cap="flat" cmpd="sng" algn="ctr">
+                      <a:solidFill>
+                        <a:srgbClr val="C9CED6"/>
+                      </a:solidFill>
+                      <a:prstDash val="solid"/>
+                      <a:round/>
+                      <a:headEnd type="none" w="med" len="med"/>
+                      <a:tailEnd type="none" w="med" len="med"/>
+                    </a:lnR>
+                    <a:lnT w="9525" cap="flat" cmpd="sng" algn="ctr">
+                      <a:solidFill>
+                        <a:srgbClr val="C9CED6"/>
+                      </a:solidFill>
+                      <a:prstDash val="solid"/>
+                      <a:round/>
+                      <a:headEnd type="none" w="med" len="med"/>
+                      <a:tailEnd type="none" w="med" len="med"/>
+                    </a:lnT>
+                    <a:lnB w="9525" cap="flat" cmpd="sng" algn="ctr">
+                      <a:solidFill>
+                        <a:srgbClr val="C9CED6"/>
+                      </a:solidFill>
+                      <a:prstDash val="solid"/>
+                      <a:round/>
+                      <a:headEnd type="none" w="med" len="med"/>
+                      <a:tailEnd type="none" w="med" len="med"/>
+                    </a:lnB>
+                  </a:tcPr>
+                </a:tc>
+                <a:tc>
+                  <a:txBody>
+                    <a:bodyPr/>
+                    <a:lstStyle/>
+                    <a:p>
+                      <a:pPr algn="ctr" indent="0" marL="0">
+                        <a:buNone/>
+                      </a:pPr>
+                      <a:r>
+                        <a:rPr lang="en-US" sz="1100" dirty="0">
+                          <a:solidFill>
+                            <a:srgbClr val="222222"/>
+                          </a:solidFill>
+                          <a:latin typeface="맑은 고딕" pitchFamily="34" charset="0"/>
+                          <a:ea typeface="맑은 고딕" pitchFamily="34" charset="-122"/>
+                          <a:cs typeface="맑은 고딕" pitchFamily="34" charset="-120"/>
+                        </a:rPr>
+                        <a:t>O</a:t>
+                      </a:r>
+                      <a:endParaRPr lang="en-US" sz="1100" dirty="0">
+                        <a:latin typeface="맑은 고딕" charset="0"/>
+                        <a:ea typeface="맑은 고딕" charset="0"/>
+                        <a:cs typeface="맑은 고딕" charset="0"/>
+                      </a:endParaRPr>
+                    </a:p>
+                  </a:txBody>
+                  <a:tcPr marL="54864" marR="54864" marT="27432" marB="27432" anchor="ctr">
+                    <a:lnL w="9525" cap="flat" cmpd="sng" algn="ctr">
+                      <a:solidFill>
+                        <a:srgbClr val="C9CED6"/>
+                      </a:solidFill>
+                      <a:prstDash val="solid"/>
+                      <a:round/>
+                      <a:headEnd type="none" w="med" len="med"/>
+                      <a:tailEnd type="none" w="med" len="med"/>
+                    </a:lnL>
+                    <a:lnR w="9525" cap="flat" cmpd="sng" algn="ctr">
+                      <a:solidFill>
+                        <a:srgbClr val="C9CED6"/>
+                      </a:solidFill>
+                      <a:prstDash val="solid"/>
+                      <a:round/>
+                      <a:headEnd type="none" w="med" len="med"/>
+                      <a:tailEnd type="none" w="med" len="med"/>
+                    </a:lnR>
+                    <a:lnT w="9525" cap="flat" cmpd="sng" algn="ctr">
+                      <a:solidFill>
+                        <a:srgbClr val="C9CED6"/>
+                      </a:solidFill>
+                      <a:prstDash val="solid"/>
+                      <a:round/>
+                      <a:headEnd type="none" w="med" len="med"/>
+                      <a:tailEnd type="none" w="med" len="med"/>
+                    </a:lnT>
+                    <a:lnB w="9525" cap="flat" cmpd="sng" algn="ctr">
+                      <a:solidFill>
+                        <a:srgbClr val="C9CED6"/>
+                      </a:solidFill>
+                      <a:prstDash val="solid"/>
+                      <a:round/>
+                      <a:headEnd type="none" w="med" len="med"/>
+                      <a:tailEnd type="none" w="med" len="med"/>
+                    </a:lnB>
+                  </a:tcPr>
+                </a:tc>
+              </a:tr>
+              <a:tr h="329184">
+                <a:tc>
+                  <a:txBody>
+                    <a:bodyPr/>
+                    <a:lstStyle/>
+                    <a:p>
+                      <a:pPr algn="ctr" indent="0" marL="0">
+                        <a:buNone/>
+                      </a:pPr>
+                      <a:r>
+                        <a:rPr lang="en-US" sz="1100" dirty="0">
+                          <a:solidFill>
+                            <a:srgbClr val="222222"/>
+                          </a:solidFill>
+                          <a:latin typeface="맑은 고딕" pitchFamily="34" charset="0"/>
+                          <a:ea typeface="맑은 고딕" pitchFamily="34" charset="-122"/>
+                          <a:cs typeface="맑은 고딕" pitchFamily="34" charset="-120"/>
+                        </a:rPr>
+                        <a:t>5개용(45cm)</a:t>
+                      </a:r>
+                      <a:endParaRPr lang="en-US" sz="1100" dirty="0">
+                        <a:latin typeface="맑은 고딕" charset="0"/>
+                        <a:ea typeface="맑은 고딕" charset="0"/>
+                        <a:cs typeface="맑은 고딕" charset="0"/>
+                      </a:endParaRPr>
+                    </a:p>
+                  </a:txBody>
+                  <a:tcPr marL="54864" marR="54864" marT="27432" marB="27432" anchor="ctr">
+                    <a:lnL w="9525" cap="flat" cmpd="sng" algn="ctr">
+                      <a:solidFill>
+                        <a:srgbClr val="C9CED6"/>
+                      </a:solidFill>
+                      <a:prstDash val="solid"/>
+                      <a:round/>
+                      <a:headEnd type="none" w="med" len="med"/>
+                      <a:tailEnd type="none" w="med" len="med"/>
+                    </a:lnL>
+                    <a:lnR w="9525" cap="flat" cmpd="sng" algn="ctr">
+                      <a:solidFill>
+                        <a:srgbClr val="C9CED6"/>
+                      </a:solidFill>
+                      <a:prstDash val="solid"/>
+                      <a:round/>
+                      <a:headEnd type="none" w="med" len="med"/>
+                      <a:tailEnd type="none" w="med" len="med"/>
+                    </a:lnR>
+                    <a:lnT w="9525" cap="flat" cmpd="sng" algn="ctr">
+                      <a:solidFill>
+                        <a:srgbClr val="C9CED6"/>
+                      </a:solidFill>
+                      <a:prstDash val="solid"/>
+                      <a:round/>
+                      <a:headEnd type="none" w="med" len="med"/>
+                      <a:tailEnd type="none" w="med" len="med"/>
+                    </a:lnT>
+                    <a:lnB w="9525" cap="flat" cmpd="sng" algn="ctr">
+                      <a:solidFill>
+                        <a:srgbClr val="C9CED6"/>
+                      </a:solidFill>
+                      <a:prstDash val="solid"/>
+                      <a:round/>
+                      <a:headEnd type="none" w="med" len="med"/>
+                      <a:tailEnd type="none" w="med" len="med"/>
+                    </a:lnB>
+                  </a:tcPr>
+                </a:tc>
+                <a:tc>
+                  <a:txBody>
+                    <a:bodyPr/>
+                    <a:lstStyle/>
+                    <a:p>
+                      <a:pPr algn="ctr" indent="0" marL="0">
+                        <a:buNone/>
+                      </a:pPr>
+                      <a:r>
+                        <a:rPr lang="en-US" sz="1100" dirty="0">
+                          <a:solidFill>
+                            <a:srgbClr val="222222"/>
+                          </a:solidFill>
+                          <a:latin typeface="맑은 고딕" pitchFamily="34" charset="0"/>
+                          <a:ea typeface="맑은 고딕" pitchFamily="34" charset="-122"/>
+                          <a:cs typeface="맑은 고딕" pitchFamily="34" charset="-120"/>
+                        </a:rPr>
+                        <a:t>85 × 35 × 56</a:t>
+                      </a:r>
+                      <a:endParaRPr lang="en-US" sz="1100" dirty="0">
+                        <a:latin typeface="맑은 고딕" charset="0"/>
+                        <a:ea typeface="맑은 고딕" charset="0"/>
+                        <a:cs typeface="맑은 고딕" charset="0"/>
+                      </a:endParaRPr>
+                    </a:p>
+                  </a:txBody>
+                  <a:tcPr marL="54864" marR="54864" marT="27432" marB="27432" anchor="ctr">
+                    <a:lnL w="9525" cap="flat" cmpd="sng" algn="ctr">
+                      <a:solidFill>
+                        <a:srgbClr val="C9CED6"/>
+                      </a:solidFill>
+                      <a:prstDash val="solid"/>
+                      <a:round/>
+                      <a:headEnd type="none" w="med" len="med"/>
+                      <a:tailEnd type="none" w="med" len="med"/>
+                    </a:lnL>
+                    <a:lnR w="9525" cap="flat" cmpd="sng" algn="ctr">
+                      <a:solidFill>
+                        <a:srgbClr val="C9CED6"/>
+                      </a:solidFill>
+                      <a:prstDash val="solid"/>
+                      <a:round/>
+                      <a:headEnd type="none" w="med" len="med"/>
+                      <a:tailEnd type="none" w="med" len="med"/>
+                    </a:lnR>
+                    <a:lnT w="9525" cap="flat" cmpd="sng" algn="ctr">
+                      <a:solidFill>
+                        <a:srgbClr val="C9CED6"/>
+                      </a:solidFill>
+                      <a:prstDash val="solid"/>
+                      <a:round/>
+                      <a:headEnd type="none" w="med" len="med"/>
+                      <a:tailEnd type="none" w="med" len="med"/>
+                    </a:lnT>
+                    <a:lnB w="9525" cap="flat" cmpd="sng" algn="ctr">
+                      <a:solidFill>
+                        <a:srgbClr val="C9CED6"/>
+                      </a:solidFill>
+                      <a:prstDash val="solid"/>
+                      <a:round/>
+                      <a:headEnd type="none" w="med" len="med"/>
+                      <a:tailEnd type="none" w="med" len="med"/>
+                    </a:lnB>
+                  </a:tcPr>
+                </a:tc>
+                <a:tc>
+                  <a:txBody>
+                    <a:bodyPr/>
+                    <a:lstStyle/>
+                    <a:p>
+                      <a:pPr algn="ctr" indent="0" marL="0">
+                        <a:buNone/>
+                      </a:pPr>
+                      <a:r>
+                        <a:rPr lang="en-US" sz="1100" dirty="0">
+                          <a:solidFill>
+                            <a:srgbClr val="222222"/>
+                          </a:solidFill>
+                          <a:latin typeface="맑은 고딕" pitchFamily="34" charset="0"/>
+                          <a:ea typeface="맑은 고딕" pitchFamily="34" charset="-122"/>
+                          <a:cs typeface="맑은 고딕" pitchFamily="34" charset="-120"/>
+                        </a:rPr>
+                        <a:t>6.5</a:t>
+                      </a:r>
+                      <a:endParaRPr lang="en-US" sz="1100" dirty="0">
+                        <a:latin typeface="맑은 고딕" charset="0"/>
+                        <a:ea typeface="맑은 고딕" charset="0"/>
+                        <a:cs typeface="맑은 고딕" charset="0"/>
+                      </a:endParaRPr>
+                    </a:p>
+                  </a:txBody>
+                  <a:tcPr marL="54864" marR="54864" marT="27432" marB="27432" anchor="ctr">
+                    <a:lnL w="9525" cap="flat" cmpd="sng" algn="ctr">
+                      <a:solidFill>
+                        <a:srgbClr val="C9CED6"/>
+                      </a:solidFill>
+                      <a:prstDash val="solid"/>
+                      <a:round/>
+                      <a:headEnd type="none" w="med" len="med"/>
+                      <a:tailEnd type="none" w="med" len="med"/>
+                    </a:lnL>
+                    <a:lnR w="9525" cap="flat" cmpd="sng" algn="ctr">
+                      <a:solidFill>
+                        <a:srgbClr val="C9CED6"/>
+                      </a:solidFill>
+                      <a:prstDash val="solid"/>
+                      <a:round/>
+                      <a:headEnd type="none" w="med" len="med"/>
+                      <a:tailEnd type="none" w="med" len="med"/>
+                    </a:lnR>
+                    <a:lnT w="9525" cap="flat" cmpd="sng" algn="ctr">
+                      <a:solidFill>
+                        <a:srgbClr val="C9CED6"/>
+                      </a:solidFill>
+                      <a:prstDash val="solid"/>
+                      <a:round/>
+                      <a:headEnd type="none" w="med" len="med"/>
+                      <a:tailEnd type="none" w="med" len="med"/>
+                    </a:lnT>
+                    <a:lnB w="9525" cap="flat" cmpd="sng" algn="ctr">
+                      <a:solidFill>
+                        <a:srgbClr val="C9CED6"/>
+                      </a:solidFill>
+                      <a:prstDash val="solid"/>
+                      <a:round/>
+                      <a:headEnd type="none" w="med" len="med"/>
+                      <a:tailEnd type="none" w="med" len="med"/>
+                    </a:lnB>
+                  </a:tcPr>
+                </a:tc>
+                <a:tc>
+                  <a:txBody>
+                    <a:bodyPr/>
+                    <a:lstStyle/>
+                    <a:p>
+                      <a:pPr algn="ctr" indent="0" marL="0">
+                        <a:buNone/>
+                      </a:pPr>
+                      <a:r>
+                        <a:rPr lang="en-US" sz="1100" dirty="0">
+                          <a:solidFill>
+                            <a:srgbClr val="222222"/>
+                          </a:solidFill>
+                          <a:latin typeface="맑은 고딕" pitchFamily="34" charset="0"/>
+                          <a:ea typeface="맑은 고딕" pitchFamily="34" charset="-122"/>
+                          <a:cs typeface="맑은 고딕" pitchFamily="34" charset="-120"/>
+                        </a:rPr>
+                        <a:t>10</a:t>
+                      </a:r>
+                      <a:endParaRPr lang="en-US" sz="1100" dirty="0">
+                        <a:latin typeface="맑은 고딕" charset="0"/>
+                        <a:ea typeface="맑은 고딕" charset="0"/>
+                        <a:cs typeface="맑은 고딕" charset="0"/>
+                      </a:endParaRPr>
+                    </a:p>
+                  </a:txBody>
+                  <a:tcPr marL="54864" marR="54864" marT="27432" marB="27432" anchor="ctr">
+                    <a:lnL w="9525" cap="flat" cmpd="sng" algn="ctr">
+                      <a:solidFill>
+                        <a:srgbClr val="C9CED6"/>
+                      </a:solidFill>
+                      <a:prstDash val="solid"/>
+                      <a:round/>
+                      <a:headEnd type="none" w="med" len="med"/>
+                      <a:tailEnd type="none" w="med" len="med"/>
+                    </a:lnL>
+                    <a:lnR w="9525" cap="flat" cmpd="sng" algn="ctr">
+                      <a:solidFill>
+                        <a:srgbClr val="C9CED6"/>
+                      </a:solidFill>
+                      <a:prstDash val="solid"/>
+                      <a:round/>
+                      <a:headEnd type="none" w="med" len="med"/>
+                      <a:tailEnd type="none" w="med" len="med"/>
+                    </a:lnR>
+                    <a:lnT w="9525" cap="flat" cmpd="sng" algn="ctr">
+                      <a:solidFill>
+                        <a:srgbClr val="C9CED6"/>
+                      </a:solidFill>
+                      <a:prstDash val="solid"/>
+                      <a:round/>
+                      <a:headEnd type="none" w="med" len="med"/>
+                      <a:tailEnd type="none" w="med" len="med"/>
+                    </a:lnT>
+                    <a:lnB w="9525" cap="flat" cmpd="sng" algn="ctr">
+                      <a:solidFill>
+                        <a:srgbClr val="C9CED6"/>
+                      </a:solidFill>
+                      <a:prstDash val="solid"/>
+                      <a:round/>
+                      <a:headEnd type="none" w="med" len="med"/>
+                      <a:tailEnd type="none" w="med" len="med"/>
+                    </a:lnB>
+                  </a:tcPr>
+                </a:tc>
+                <a:tc>
+                  <a:txBody>
+                    <a:bodyPr/>
+                    <a:lstStyle/>
+                    <a:p>
+                      <a:pPr algn="ctr" indent="0" marL="0">
+                        <a:buNone/>
+                      </a:pPr>
+                      <a:r>
+                        <a:rPr lang="en-US" sz="1100" dirty="0">
+                          <a:solidFill>
+                            <a:srgbClr val="222222"/>
+                          </a:solidFill>
+                          <a:latin typeface="맑은 고딕" pitchFamily="34" charset="0"/>
+                          <a:ea typeface="맑은 고딕" pitchFamily="34" charset="-122"/>
+                          <a:cs typeface="맑은 고딕" pitchFamily="34" charset="-120"/>
+                        </a:rPr>
+                        <a:t>5</a:t>
+                      </a:r>
+                      <a:endParaRPr lang="en-US" sz="1100" dirty="0">
+                        <a:latin typeface="맑은 고딕" charset="0"/>
+                        <a:ea typeface="맑은 고딕" charset="0"/>
+                        <a:cs typeface="맑은 고딕" charset="0"/>
+                      </a:endParaRPr>
+                    </a:p>
+                  </a:txBody>
+                  <a:tcPr marL="54864" marR="54864" marT="27432" marB="27432" anchor="ctr">
+                    <a:lnL w="9525" cap="flat" cmpd="sng" algn="ctr">
+                      <a:solidFill>
+                        <a:srgbClr val="C9CED6"/>
+                      </a:solidFill>
+                      <a:prstDash val="solid"/>
+                      <a:round/>
+                      <a:headEnd type="none" w="med" len="med"/>
+                      <a:tailEnd type="none" w="med" len="med"/>
+                    </a:lnL>
+                    <a:lnR w="9525" cap="flat" cmpd="sng" algn="ctr">
+                      <a:solidFill>
+                        <a:srgbClr val="C9CED6"/>
+                      </a:solidFill>
+                      <a:prstDash val="solid"/>
+                      <a:round/>
+                      <a:headEnd type="none" w="med" len="med"/>
+                      <a:tailEnd type="none" w="med" len="med"/>
+                    </a:lnR>
+                    <a:lnT w="9525" cap="flat" cmpd="sng" algn="ctr">
+                      <a:solidFill>
+                        <a:srgbClr val="C9CED6"/>
+                      </a:solidFill>
+                      <a:prstDash val="solid"/>
+                      <a:round/>
+                      <a:headEnd type="none" w="med" len="med"/>
+                      <a:tailEnd type="none" w="med" len="med"/>
+                    </a:lnT>
+                    <a:lnB w="9525" cap="flat" cmpd="sng" algn="ctr">
+                      <a:solidFill>
+                        <a:srgbClr val="C9CED6"/>
+                      </a:solidFill>
+                      <a:prstDash val="solid"/>
+                      <a:round/>
+                      <a:headEnd type="none" w="med" len="med"/>
+                      <a:tailEnd type="none" w="med" len="med"/>
+                    </a:lnB>
+                  </a:tcPr>
+                </a:tc>
+                <a:tc>
+                  <a:txBody>
+                    <a:bodyPr/>
+                    <a:lstStyle/>
+                    <a:p>
+                      <a:pPr algn="ctr" indent="0" marL="0">
+                        <a:buNone/>
+                      </a:pPr>
+                      <a:r>
+                        <a:rPr lang="en-US" sz="1100" dirty="0">
+                          <a:solidFill>
+                            <a:srgbClr val="222222"/>
+                          </a:solidFill>
+                          <a:latin typeface="맑은 고딕" pitchFamily="34" charset="0"/>
+                          <a:ea typeface="맑은 고딕" pitchFamily="34" charset="-122"/>
+                          <a:cs typeface="맑은 고딕" pitchFamily="34" charset="-120"/>
+                        </a:rPr>
+                        <a:t>O</a:t>
+                      </a:r>
+                      <a:endParaRPr lang="en-US" sz="1100" dirty="0">
+                        <a:latin typeface="맑은 고딕" charset="0"/>
+                        <a:ea typeface="맑은 고딕" charset="0"/>
+                        <a:cs typeface="맑은 고딕" charset="0"/>
+                      </a:endParaRPr>
+                    </a:p>
+                  </a:txBody>
+                  <a:tcPr marL="54864" marR="54864" marT="27432" marB="27432" anchor="ctr">
+                    <a:lnL w="9525" cap="flat" cmpd="sng" algn="ctr">
+                      <a:solidFill>
+                        <a:srgbClr val="C9CED6"/>
+                      </a:solidFill>
+                      <a:prstDash val="solid"/>
+                      <a:round/>
+                      <a:headEnd type="none" w="med" len="med"/>
+                      <a:tailEnd type="none" w="med" len="med"/>
+                    </a:lnL>
+                    <a:lnR w="9525" cap="flat" cmpd="sng" algn="ctr">
+                      <a:solidFill>
+                        <a:srgbClr val="C9CED6"/>
+                      </a:solidFill>
+                      <a:prstDash val="solid"/>
+                      <a:round/>
+                      <a:headEnd type="none" w="med" len="med"/>
+                      <a:tailEnd type="none" w="med" len="med"/>
+                    </a:lnR>
+                    <a:lnT w="9525" cap="flat" cmpd="sng" algn="ctr">
+                      <a:solidFill>
+                        <a:srgbClr val="C9CED6"/>
+                      </a:solidFill>
+                      <a:prstDash val="solid"/>
+                      <a:round/>
+                      <a:headEnd type="none" w="med" len="med"/>
+                      <a:tailEnd type="none" w="med" len="med"/>
+                    </a:lnT>
+                    <a:lnB w="9525" cap="flat" cmpd="sng" algn="ctr">
+                      <a:solidFill>
+                        <a:srgbClr val="C9CED6"/>
+                      </a:solidFill>
+                      <a:prstDash val="solid"/>
+                      <a:round/>
+                      <a:headEnd type="none" w="med" len="med"/>
+                      <a:tailEnd type="none" w="med" len="med"/>
+                    </a:lnB>
+                  </a:tcPr>
+                </a:tc>
+              </a:tr>
+              <a:tr h="329184">
+                <a:tc>
+                  <a:txBody>
+                    <a:bodyPr/>
+                    <a:lstStyle/>
+                    <a:p>
+                      <a:pPr algn="ctr" indent="0" marL="0">
+                        <a:buNone/>
+                      </a:pPr>
+                      <a:r>
+                        <a:rPr lang="en-US" sz="1100" dirty="0">
+                          <a:solidFill>
+                            <a:srgbClr val="222222"/>
+                          </a:solidFill>
+                          <a:latin typeface="맑은 고딕" pitchFamily="34" charset="0"/>
+                          <a:ea typeface="맑은 고딕" pitchFamily="34" charset="-122"/>
+                          <a:cs typeface="맑은 고딕" pitchFamily="34" charset="-120"/>
+                        </a:rPr>
+                        <a:t>2개용(38cm)</a:t>
+                      </a:r>
+                      <a:endParaRPr lang="en-US" sz="1100" dirty="0">
+                        <a:latin typeface="맑은 고딕" charset="0"/>
+                        <a:ea typeface="맑은 고딕" charset="0"/>
+                        <a:cs typeface="맑은 고딕" charset="0"/>
+                      </a:endParaRPr>
+                    </a:p>
+                  </a:txBody>
+                  <a:tcPr marL="54864" marR="54864" marT="27432" marB="27432" anchor="ctr">
+                    <a:lnL w="9525" cap="flat" cmpd="sng" algn="ctr">
+                      <a:solidFill>
+                        <a:srgbClr val="C9CED6"/>
+                      </a:solidFill>
+                      <a:prstDash val="solid"/>
+                      <a:round/>
+                      <a:headEnd type="none" w="med" len="med"/>
+                      <a:tailEnd type="none" w="med" len="med"/>
+                    </a:lnL>
+                    <a:lnR w="9525" cap="flat" cmpd="sng" algn="ctr">
+                      <a:solidFill>
+                        <a:srgbClr val="C9CED6"/>
+                      </a:solidFill>
+                      <a:prstDash val="solid"/>
+                      <a:round/>
+                      <a:headEnd type="none" w="med" len="med"/>
+                      <a:tailEnd type="none" w="med" len="med"/>
+                    </a:lnR>
+                    <a:lnT w="9525" cap="flat" cmpd="sng" algn="ctr">
+                      <a:solidFill>
+                        <a:srgbClr val="C9CED6"/>
+                      </a:solidFill>
+                      <a:prstDash val="solid"/>
+                      <a:round/>
+                      <a:headEnd type="none" w="med" len="med"/>
+                      <a:tailEnd type="none" w="med" len="med"/>
+                    </a:lnT>
+                    <a:lnB w="9525" cap="flat" cmpd="sng" algn="ctr">
+                      <a:solidFill>
+                        <a:srgbClr val="C9CED6"/>
+                      </a:solidFill>
+                      <a:prstDash val="solid"/>
+                      <a:round/>
+                      <a:headEnd type="none" w="med" len="med"/>
+                      <a:tailEnd type="none" w="med" len="med"/>
+                    </a:lnB>
+                  </a:tcPr>
+                </a:tc>
+                <a:tc>
+                  <a:txBody>
+                    <a:bodyPr/>
+                    <a:lstStyle/>
+                    <a:p>
+                      <a:pPr algn="ctr" indent="0" marL="0">
+                        <a:buNone/>
+                      </a:pPr>
+                      <a:r>
+                        <a:rPr lang="en-US" sz="1100" dirty="0">
+                          <a:solidFill>
+                            <a:srgbClr val="222222"/>
+                          </a:solidFill>
+                          <a:latin typeface="맑은 고딕" pitchFamily="34" charset="0"/>
+                          <a:ea typeface="맑은 고딕" pitchFamily="34" charset="-122"/>
+                          <a:cs typeface="맑은 고딕" pitchFamily="34" charset="-120"/>
+                        </a:rPr>
+                        <a:t>77 × 35 × 22</a:t>
+                      </a:r>
+                      <a:endParaRPr lang="en-US" sz="1100" dirty="0">
+                        <a:latin typeface="맑은 고딕" charset="0"/>
+                        <a:ea typeface="맑은 고딕" charset="0"/>
+                        <a:cs typeface="맑은 고딕" charset="0"/>
+                      </a:endParaRPr>
+                    </a:p>
+                  </a:txBody>
+                  <a:tcPr marL="54864" marR="54864" marT="27432" marB="27432" anchor="ctr">
+                    <a:lnL w="9525" cap="flat" cmpd="sng" algn="ctr">
+                      <a:solidFill>
+                        <a:srgbClr val="C9CED6"/>
+                      </a:solidFill>
+                      <a:prstDash val="solid"/>
+                      <a:round/>
+                      <a:headEnd type="none" w="med" len="med"/>
+                      <a:tailEnd type="none" w="med" len="med"/>
+                    </a:lnL>
+                    <a:lnR w="9525" cap="flat" cmpd="sng" algn="ctr">
+                      <a:solidFill>
+                        <a:srgbClr val="C9CED6"/>
+                      </a:solidFill>
+                      <a:prstDash val="solid"/>
+                      <a:round/>
+                      <a:headEnd type="none" w="med" len="med"/>
+                      <a:tailEnd type="none" w="med" len="med"/>
+                    </a:lnR>
+                    <a:lnT w="9525" cap="flat" cmpd="sng" algn="ctr">
+                      <a:solidFill>
+                        <a:srgbClr val="C9CED6"/>
+                      </a:solidFill>
+                      <a:prstDash val="solid"/>
+                      <a:round/>
+                      <a:headEnd type="none" w="med" len="med"/>
+                      <a:tailEnd type="none" w="med" len="med"/>
+                    </a:lnT>
+                    <a:lnB w="9525" cap="flat" cmpd="sng" algn="ctr">
+                      <a:solidFill>
+                        <a:srgbClr val="C9CED6"/>
+                      </a:solidFill>
+                      <a:prstDash val="solid"/>
+                      <a:round/>
+                      <a:headEnd type="none" w="med" len="med"/>
+                      <a:tailEnd type="none" w="med" len="med"/>
+                    </a:lnB>
+                  </a:tcPr>
+                </a:tc>
+                <a:tc>
+                  <a:txBody>
+                    <a:bodyPr/>
+                    <a:lstStyle/>
+                    <a:p>
+                      <a:pPr algn="ctr" indent="0" marL="0">
+                        <a:buNone/>
+                      </a:pPr>
+                      <a:endParaRPr lang="en-US" sz="1100" dirty="0">
+                        <a:latin typeface="맑은 고딕" charset="0"/>
+                        <a:ea typeface="맑은 고딕" charset="0"/>
+                        <a:cs typeface="맑은 고딕" charset="0"/>
+                      </a:endParaRPr>
+                    </a:p>
+                  </a:txBody>
+                  <a:tcPr marL="54864" marR="54864" marT="27432" marB="27432" anchor="ctr">
+                    <a:lnL w="9525" cap="flat" cmpd="sng" algn="ctr">
+                      <a:solidFill>
+                        <a:srgbClr val="C9CED6"/>
+                      </a:solidFill>
+                      <a:prstDash val="solid"/>
+                      <a:round/>
+                      <a:headEnd type="none" w="med" len="med"/>
+                      <a:tailEnd type="none" w="med" len="med"/>
+                    </a:lnL>
+                    <a:lnR w="9525" cap="flat" cmpd="sng" algn="ctr">
+                      <a:solidFill>
+                        <a:srgbClr val="C9CED6"/>
+                      </a:solidFill>
+                      <a:prstDash val="solid"/>
+                      <a:round/>
+                      <a:headEnd type="none" w="med" len="med"/>
+                      <a:tailEnd type="none" w="med" len="med"/>
+                    </a:lnR>
+                    <a:lnT w="9525" cap="flat" cmpd="sng" algn="ctr">
+                      <a:solidFill>
+                        <a:srgbClr val="C9CED6"/>
+                      </a:solidFill>
+                      <a:prstDash val="solid"/>
+                      <a:round/>
+                      <a:headEnd type="none" w="med" len="med"/>
+                      <a:tailEnd type="none" w="med" len="med"/>
+                    </a:lnT>
+                    <a:lnB w="9525" cap="flat" cmpd="sng" algn="ctr">
+                      <a:solidFill>
+                        <a:srgbClr val="C9CED6"/>
+                      </a:solidFill>
+                      <a:prstDash val="solid"/>
+                      <a:round/>
+                      <a:headEnd type="none" w="med" len="med"/>
+                      <a:tailEnd type="none" w="med" len="med"/>
+                    </a:lnB>
+                  </a:tcPr>
+                </a:tc>
+                <a:tc>
+                  <a:txBody>
+                    <a:bodyPr/>
+                    <a:lstStyle/>
+                    <a:p>
+                      <a:pPr algn="ctr" indent="0" marL="0">
+                        <a:buNone/>
+                      </a:pPr>
+                      <a:endParaRPr lang="en-US" sz="1100" dirty="0">
+                        <a:latin typeface="맑은 고딕" charset="0"/>
+                        <a:ea typeface="맑은 고딕" charset="0"/>
+                        <a:cs typeface="맑은 고딕" charset="0"/>
+                      </a:endParaRPr>
+                    </a:p>
+                  </a:txBody>
+                  <a:tcPr marL="54864" marR="54864" marT="27432" marB="27432" anchor="ctr">
+                    <a:lnL w="9525" cap="flat" cmpd="sng" algn="ctr">
+                      <a:solidFill>
+                        <a:srgbClr val="C9CED6"/>
+                      </a:solidFill>
+                      <a:prstDash val="solid"/>
+                      <a:round/>
+                      <a:headEnd type="none" w="med" len="med"/>
+                      <a:tailEnd type="none" w="med" len="med"/>
+                    </a:lnL>
+                    <a:lnR w="9525" cap="flat" cmpd="sng" algn="ctr">
+                      <a:solidFill>
+                        <a:srgbClr val="C9CED6"/>
+                      </a:solidFill>
+                      <a:prstDash val="solid"/>
+                      <a:round/>
+                      <a:headEnd type="none" w="med" len="med"/>
+                      <a:tailEnd type="none" w="med" len="med"/>
+                    </a:lnR>
+                    <a:lnT w="9525" cap="flat" cmpd="sng" algn="ctr">
+                      <a:solidFill>
+                        <a:srgbClr val="C9CED6"/>
+                      </a:solidFill>
+                      <a:prstDash val="solid"/>
+                      <a:round/>
+                      <a:headEnd type="none" w="med" len="med"/>
+                      <a:tailEnd type="none" w="med" len="med"/>
+                    </a:lnT>
+                    <a:lnB w="9525" cap="flat" cmpd="sng" algn="ctr">
+                      <a:solidFill>
+                        <a:srgbClr val="C9CED6"/>
+                      </a:solidFill>
+                      <a:prstDash val="solid"/>
+                      <a:round/>
+                      <a:headEnd type="none" w="med" len="med"/>
+                      <a:tailEnd type="none" w="med" len="med"/>
+                    </a:lnB>
+                  </a:tcPr>
+                </a:tc>
+                <a:tc>
+                  <a:txBody>
+                    <a:bodyPr/>
+                    <a:lstStyle/>
+                    <a:p>
+                      <a:pPr algn="ctr" indent="0" marL="0">
+                        <a:buNone/>
+                      </a:pPr>
+                      <a:r>
+                        <a:rPr lang="en-US" sz="1100" dirty="0">
+                          <a:solidFill>
+                            <a:srgbClr val="222222"/>
+                          </a:solidFill>
+                          <a:latin typeface="맑은 고딕" pitchFamily="34" charset="0"/>
+                          <a:ea typeface="맑은 고딕" pitchFamily="34" charset="-122"/>
+                          <a:cs typeface="맑은 고딕" pitchFamily="34" charset="-120"/>
+                        </a:rPr>
+                        <a:t>2</a:t>
+                      </a:r>
+                      <a:endParaRPr lang="en-US" sz="1100" dirty="0">
+                        <a:latin typeface="맑은 고딕" charset="0"/>
+                        <a:ea typeface="맑은 고딕" charset="0"/>
+                        <a:cs typeface="맑은 고딕" charset="0"/>
+                      </a:endParaRPr>
+                    </a:p>
+                  </a:txBody>
+                  <a:tcPr marL="54864" marR="54864" marT="27432" marB="27432" anchor="ctr">
+                    <a:lnL w="9525" cap="flat" cmpd="sng" algn="ctr">
+                      <a:solidFill>
+                        <a:srgbClr val="C9CED6"/>
+                      </a:solidFill>
+                      <a:prstDash val="solid"/>
+                      <a:round/>
+                      <a:headEnd type="none" w="med" len="med"/>
+                      <a:tailEnd type="none" w="med" len="med"/>
+                    </a:lnL>
+                    <a:lnR w="9525" cap="flat" cmpd="sng" algn="ctr">
+                      <a:solidFill>
+                        <a:srgbClr val="C9CED6"/>
+                      </a:solidFill>
+                      <a:prstDash val="solid"/>
+                      <a:round/>
+                      <a:headEnd type="none" w="med" len="med"/>
+                      <a:tailEnd type="none" w="med" len="med"/>
+                    </a:lnR>
+                    <a:lnT w="9525" cap="flat" cmpd="sng" algn="ctr">
+                      <a:solidFill>
+                        <a:srgbClr val="C9CED6"/>
+                      </a:solidFill>
+                      <a:prstDash val="solid"/>
+                      <a:round/>
+                      <a:headEnd type="none" w="med" len="med"/>
+                      <a:tailEnd type="none" w="med" len="med"/>
+                    </a:lnT>
+                    <a:lnB w="9525" cap="flat" cmpd="sng" algn="ctr">
+                      <a:solidFill>
+                        <a:srgbClr val="C9CED6"/>
+                      </a:solidFill>
+                      <a:prstDash val="solid"/>
+                      <a:round/>
+                      <a:headEnd type="none" w="med" len="med"/>
+                      <a:tailEnd type="none" w="med" len="med"/>
+                    </a:lnB>
+                  </a:tcPr>
+                </a:tc>
+                <a:tc>
+                  <a:txBody>
+                    <a:bodyPr/>
+                    <a:lstStyle/>
+                    <a:p>
+                      <a:pPr algn="ctr" indent="0" marL="0">
+                        <a:buNone/>
+                      </a:pPr>
+                      <a:r>
+                        <a:rPr lang="en-US" sz="1100" dirty="0">
+                          <a:solidFill>
+                            <a:srgbClr val="C0392B"/>
+                          </a:solidFill>
+                          <a:latin typeface="맑은 고딕" pitchFamily="34" charset="0"/>
+                          <a:ea typeface="맑은 고딕" pitchFamily="34" charset="-122"/>
+                          <a:cs typeface="맑은 고딕" pitchFamily="34" charset="-120"/>
+                        </a:rPr>
+                        <a:t>X</a:t>
+                      </a:r>
+                      <a:endParaRPr lang="en-US" sz="1100" dirty="0">
+                        <a:latin typeface="맑은 고딕" charset="0"/>
+                        <a:ea typeface="맑은 고딕" charset="0"/>
+                        <a:cs typeface="맑은 고딕" charset="0"/>
+                      </a:endParaRPr>
+                    </a:p>
+                  </a:txBody>
+                  <a:tcPr marL="54864" marR="54864" marT="27432" marB="27432" anchor="ctr">
+                    <a:lnL w="9525" cap="flat" cmpd="sng" algn="ctr">
+                      <a:solidFill>
+                        <a:srgbClr val="C9CED6"/>
+                      </a:solidFill>
+                      <a:prstDash val="solid"/>
+                      <a:round/>
+                      <a:headEnd type="none" w="med" len="med"/>
+                      <a:tailEnd type="none" w="med" len="med"/>
+                    </a:lnL>
+                    <a:lnR w="9525" cap="flat" cmpd="sng" algn="ctr">
+                      <a:solidFill>
+                        <a:srgbClr val="C9CED6"/>
+                      </a:solidFill>
+                      <a:prstDash val="solid"/>
+                      <a:round/>
+                      <a:headEnd type="none" w="med" len="med"/>
+                      <a:tailEnd type="none" w="med" len="med"/>
+                    </a:lnR>
+                    <a:lnT w="9525" cap="flat" cmpd="sng" algn="ctr">
+                      <a:solidFill>
+                        <a:srgbClr val="C9CED6"/>
+                      </a:solidFill>
+                      <a:prstDash val="solid"/>
+                      <a:round/>
+                      <a:headEnd type="none" w="med" len="med"/>
+                      <a:tailEnd type="none" w="med" len="med"/>
+                    </a:lnT>
+                    <a:lnB w="9525" cap="flat" cmpd="sng" algn="ctr">
+                      <a:solidFill>
+                        <a:srgbClr val="C9CED6"/>
+                      </a:solidFill>
+                      <a:prstDash val="solid"/>
+                      <a:round/>
+                      <a:headEnd type="none" w="med" len="med"/>
+                      <a:tailEnd type="none" w="med" len="med"/>
+                    </a:lnB>
+                  </a:tcPr>
+                </a:tc>
+              </a:tr>
+            </a:tbl>
+          </a:graphicData>
+        </a:graphic>
+      </p:graphicFrame>
+      <p:sp>
+        <p:nvSpPr>
+          <p:cNvPr id="11" name="Text 6"/>
+          <p:cNvSpPr/>
+          <p:nvPr/>
+        </p:nvSpPr>
+        <p:spPr>
+          <a:xfrm>
+            <a:off x="5120640" y="4114800"/>
+            <a:ext cx="6519672" cy="1280160"/>
+          </a:xfrm>
+          <a:prstGeom prst="rect">
+            <a:avLst/>
+          </a:prstGeom>
+          <a:noFill/>
+          <a:ln/>
+        </p:spPr>
+        <p:txBody>
+          <a:bodyPr wrap="square" lIns="0" tIns="0" rIns="0" bIns="0" rtlCol="0" anchor="t"/>
+          <a:lstStyle/>
+          <a:p>
+            <a:pPr marL="342900" indent="-342900">
+              <a:spcAft>
+                <a:spcPts val="600"/>
+              </a:spcAft>
+              <a:buSzPct val="100000"/>
+              <a:buChar char="•"/>
+            </a:pPr>
+            <a:r>
+              <a:rPr lang="en-US" sz="1200" dirty="0">
+                <a:solidFill>
+                  <a:srgbClr val="222222"/>
+                </a:solidFill>
+                <a:latin typeface="맑은 고딕" pitchFamily="34" charset="0"/>
+                <a:ea typeface="맑은 고딕" pitchFamily="34" charset="-122"/>
+                <a:cs typeface="맑은 고딕" pitchFamily="34" charset="-120"/>
+              </a:rPr>
+              <a:t>아우터 박스에 이너 박스를 담고 밴딩·라벨(박스 번호) 작업 후 출고</a:t>
+            </a:r>
+            <a:endParaRPr lang="en-US" sz="1200" dirty="0"/>
+          </a:p>
+          <a:p>
+            <a:pPr marL="342900" indent="-342900">
+              <a:spcAft>
+                <a:spcPts val="600"/>
+              </a:spcAft>
+              <a:buSzPct val="100000"/>
+              <a:buChar char="•"/>
+            </a:pPr>
+            <a:r>
+              <a:rPr lang="en-US" sz="1200" dirty="0">
+                <a:solidFill>
+                  <a:srgbClr val="222222"/>
+                </a:solidFill>
+                <a:latin typeface="맑은 고딕" pitchFamily="34" charset="0"/>
+                <a:ea typeface="맑은 고딕" pitchFamily="34" charset="-122"/>
+                <a:cs typeface="맑은 고딕" pitchFamily="34" charset="-120"/>
+              </a:rPr>
+              <a:t>45cm 5개용은 출고 물량 저조로 포장 자재 미보유</a:t>
+            </a:r>
+            <a:endParaRPr lang="en-US" sz="1200" dirty="0"/>
+          </a:p>
+          <a:p>
+            <a:pPr marL="342900" indent="-342900">
+              <a:spcAft>
+                <a:spcPts val="600"/>
+              </a:spcAft>
+              <a:buSzPct val="100000"/>
+              <a:buChar char="•"/>
+            </a:pPr>
+            <a:r>
+              <a:rPr lang="en-US" sz="1200" dirty="0">
+                <a:solidFill>
+                  <a:srgbClr val="222222"/>
+                </a:solidFill>
+                <a:latin typeface="맑은 고딕" pitchFamily="34" charset="0"/>
+                <a:ea typeface="맑은 고딕" pitchFamily="34" charset="-122"/>
+                <a:cs typeface="맑은 고딕" pitchFamily="34" charset="-120"/>
+              </a:rPr>
+              <a:t>2개용(38cm)은 Transport Validation 미완료 – 비멸균 품목에만 사용</a:t>
+            </a:r>
+            <a:endParaRPr lang="en-US" sz="1200" dirty="0"/>
+          </a:p>
+        </p:txBody>
+      </p:sp>
     </p:spTree>
   </p:cSld>
   <p:clrMapOvr>
